--- a/output/dashboard_summary.pptx
+++ b/output/dashboard_summary.pptx
@@ -2,7 +2,7 @@
 <file path=ppt/presentation.xml><?xml version="1.0" encoding="utf-8"?>
 <p:presentation xmlns:a="http://schemas.openxmlformats.org/drawingml/2006/main" xmlns:p="http://schemas.openxmlformats.org/presentationml/2006/main" xmlns:r="http://schemas.openxmlformats.org/officeDocument/2006/relationships" autoCompressPictures="0" saveSubsetFonts="1">
   <p:sldMasterIdLst>
-    <p:sldMasterId id="2147483648" r:id="rId1"/>
+    <p:sldMasterId id="2147483660" r:id="rId1"/>
   </p:sldMasterIdLst>
   <p:sldIdLst>
     <p:sldId id="256" r:id="rId2"/>
@@ -36,7 +36,7 @@
     <a:defPPr>
       <a:defRPr lang="en-US"/>
     </a:defPPr>
-    <a:lvl1pPr algn="l" defTabSz="457200" eaLnBrk="1" hangingPunct="1" latinLnBrk="0" marL="0" rtl="0">
+    <a:lvl1pPr algn="l" defTabSz="914400" eaLnBrk="1" hangingPunct="1" latinLnBrk="0" marL="0" rtl="0">
       <a:defRPr kern="1200" sz="1800">
         <a:solidFill>
           <a:schemeClr val="tx1"/>
@@ -46,7 +46,7 @@
         <a:cs typeface="+mn-cs"/>
       </a:defRPr>
     </a:lvl1pPr>
-    <a:lvl2pPr algn="l" defTabSz="457200" eaLnBrk="1" hangingPunct="1" latinLnBrk="0" marL="457200" rtl="0">
+    <a:lvl2pPr algn="l" defTabSz="914400" eaLnBrk="1" hangingPunct="1" latinLnBrk="0" marL="457200" rtl="0">
       <a:defRPr kern="1200" sz="1800">
         <a:solidFill>
           <a:schemeClr val="tx1"/>
@@ -56,7 +56,7 @@
         <a:cs typeface="+mn-cs"/>
       </a:defRPr>
     </a:lvl2pPr>
-    <a:lvl3pPr algn="l" defTabSz="457200" eaLnBrk="1" hangingPunct="1" latinLnBrk="0" marL="914400" rtl="0">
+    <a:lvl3pPr algn="l" defTabSz="914400" eaLnBrk="1" hangingPunct="1" latinLnBrk="0" marL="914400" rtl="0">
       <a:defRPr kern="1200" sz="1800">
         <a:solidFill>
           <a:schemeClr val="tx1"/>
@@ -66,7 +66,7 @@
         <a:cs typeface="+mn-cs"/>
       </a:defRPr>
     </a:lvl3pPr>
-    <a:lvl4pPr algn="l" defTabSz="457200" eaLnBrk="1" hangingPunct="1" latinLnBrk="0" marL="1371600" rtl="0">
+    <a:lvl4pPr algn="l" defTabSz="914400" eaLnBrk="1" hangingPunct="1" latinLnBrk="0" marL="1371600" rtl="0">
       <a:defRPr kern="1200" sz="1800">
         <a:solidFill>
           <a:schemeClr val="tx1"/>
@@ -76,7 +76,7 @@
         <a:cs typeface="+mn-cs"/>
       </a:defRPr>
     </a:lvl4pPr>
-    <a:lvl5pPr algn="l" defTabSz="457200" eaLnBrk="1" hangingPunct="1" latinLnBrk="0" marL="1828800" rtl="0">
+    <a:lvl5pPr algn="l" defTabSz="914400" eaLnBrk="1" hangingPunct="1" latinLnBrk="0" marL="1828800" rtl="0">
       <a:defRPr kern="1200" sz="1800">
         <a:solidFill>
           <a:schemeClr val="tx1"/>
@@ -86,7 +86,7 @@
         <a:cs typeface="+mn-cs"/>
       </a:defRPr>
     </a:lvl5pPr>
-    <a:lvl6pPr algn="l" defTabSz="457200" eaLnBrk="1" hangingPunct="1" latinLnBrk="0" marL="2286000" rtl="0">
+    <a:lvl6pPr algn="l" defTabSz="914400" eaLnBrk="1" hangingPunct="1" latinLnBrk="0" marL="2286000" rtl="0">
       <a:defRPr kern="1200" sz="1800">
         <a:solidFill>
           <a:schemeClr val="tx1"/>
@@ -96,7 +96,7 @@
         <a:cs typeface="+mn-cs"/>
       </a:defRPr>
     </a:lvl6pPr>
-    <a:lvl7pPr algn="l" defTabSz="457200" eaLnBrk="1" hangingPunct="1" latinLnBrk="0" marL="2743200" rtl="0">
+    <a:lvl7pPr algn="l" defTabSz="914400" eaLnBrk="1" hangingPunct="1" latinLnBrk="0" marL="2743200" rtl="0">
       <a:defRPr kern="1200" sz="1800">
         <a:solidFill>
           <a:schemeClr val="tx1"/>
@@ -106,7 +106,7 @@
         <a:cs typeface="+mn-cs"/>
       </a:defRPr>
     </a:lvl7pPr>
-    <a:lvl8pPr algn="l" defTabSz="457200" eaLnBrk="1" hangingPunct="1" latinLnBrk="0" marL="3200400" rtl="0">
+    <a:lvl8pPr algn="l" defTabSz="914400" eaLnBrk="1" hangingPunct="1" latinLnBrk="0" marL="3200400" rtl="0">
       <a:defRPr kern="1200" sz="1800">
         <a:solidFill>
           <a:schemeClr val="tx1"/>
@@ -116,7 +116,7 @@
         <a:cs typeface="+mn-cs"/>
       </a:defRPr>
     </a:lvl8pPr>
-    <a:lvl9pPr algn="l" defTabSz="457200" eaLnBrk="1" hangingPunct="1" latinLnBrk="0" marL="3657600" rtl="0">
+    <a:lvl9pPr algn="l" defTabSz="914400" eaLnBrk="1" hangingPunct="1" latinLnBrk="0" marL="3657600" rtl="0">
       <a:defRPr kern="1200" sz="1800">
         <a:solidFill>
           <a:schemeClr val="tx1"/>
@@ -147,7 +147,7 @@
 </file>
 
 <file path=ppt/slideLayouts/slideLayout1.xml><?xml version="1.0" encoding="utf-8"?>
-<p:sldLayout xmlns:a="http://schemas.openxmlformats.org/drawingml/2006/main" xmlns:r="http://schemas.openxmlformats.org/officeDocument/2006/relationships" xmlns:p="http://schemas.openxmlformats.org/presentationml/2006/main" type="title" preserve="1">
+<p:sldLayout xmlns:a="http://schemas.openxmlformats.org/drawingml/2006/main" xmlns:r="http://schemas.openxmlformats.org/officeDocument/2006/relationships" xmlns:p="http://schemas.openxmlformats.org/presentationml/2006/main" showMasterSp="0" type="title" preserve="1">
   <p:cSld name="Title Slide">
     <p:spTree>
       <p:nvGrpSpPr>
@@ -165,45 +165,117 @@
       </p:grpSpPr>
       <p:sp>
         <p:nvSpPr>
-          <p:cNvPr id="2" name="Title 1"/>
+          <p:cNvPr id="8" name="Rectangle 7">
+            <a:extLst>
+              <a:ext uri="{FF2B5EF4-FFF2-40B4-BE49-F238E27FC236}">
+                <a16:creationId xmlns:a16="http://schemas.microsoft.com/office/drawing/2014/main" id="{9DA6793D-AD28-6579-4655-3167D9103203}"/>
+              </a:ext>
+            </a:extLst>
+          </p:cNvPr>
+          <p:cNvSpPr/>
+          <p:nvPr/>
+        </p:nvSpPr>
+        <p:spPr>
+          <a:xfrm>
+            <a:off x="-1" y="841773"/>
+            <a:ext cx="9144001" cy="2953422"/>
+          </a:xfrm>
+          <a:prstGeom prst="rect">
+            <a:avLst/>
+          </a:prstGeom>
+          <a:solidFill>
+            <a:schemeClr val="accent2"/>
+          </a:solidFill>
+          <a:ln>
+            <a:noFill/>
+          </a:ln>
+        </p:spPr>
+        <p:style>
+          <a:lnRef idx="2">
+            <a:schemeClr val="accent1">
+              <a:shade val="15000"/>
+            </a:schemeClr>
+          </a:lnRef>
+          <a:fillRef idx="1">
+            <a:schemeClr val="accent1"/>
+          </a:fillRef>
+          <a:effectRef idx="0">
+            <a:schemeClr val="accent1"/>
+          </a:effectRef>
+          <a:fontRef idx="minor">
+            <a:schemeClr val="lt1"/>
+          </a:fontRef>
+        </p:style>
+        <p:txBody>
+          <a:bodyPr rtlCol="0" anchor="ctr"/>
+          <a:lstStyle/>
+          <a:p>
+            <a:pPr algn="ctr"/>
+            <a:endParaRPr lang="en-US" sz="1350"/>
+          </a:p>
+        </p:txBody>
+      </p:sp>
+      <p:sp>
+        <p:nvSpPr>
+          <p:cNvPr id="2" name="Title 1">
+            <a:extLst>
+              <a:ext uri="{FF2B5EF4-FFF2-40B4-BE49-F238E27FC236}">
+                <a16:creationId xmlns:a16="http://schemas.microsoft.com/office/drawing/2014/main" id="{602B37E5-D300-1592-3196-16347820FA03}"/>
+              </a:ext>
+            </a:extLst>
+          </p:cNvPr>
           <p:cNvSpPr>
             <a:spLocks noGrp="1"/>
           </p:cNvSpPr>
           <p:nvPr>
-            <p:ph type="ctrTitle"/>
+            <p:ph type="ctrTitle" hasCustomPrompt="1"/>
           </p:nvPr>
         </p:nvSpPr>
         <p:spPr>
           <a:xfrm>
-            <a:off x="685800" y="1597819"/>
-            <a:ext cx="7772400" cy="1102519"/>
+            <a:off x="1143000" y="841772"/>
+            <a:ext cx="6858000" cy="1790700"/>
           </a:xfrm>
         </p:spPr>
         <p:txBody>
-          <a:bodyPr/>
-          <a:lstStyle/>
+          <a:bodyPr anchor="b"/>
+          <a:lstStyle>
+            <a:lvl1pPr algn="ctr">
+              <a:defRPr sz="4500" b="1">
+                <a:solidFill>
+                  <a:schemeClr val="bg1"/>
+                </a:solidFill>
+              </a:defRPr>
+            </a:lvl1pPr>
+          </a:lstStyle>
           <a:p>
             <a:r>
-              <a:rPr lang="en-US"/>
-              <a:t>Click to edit Master title style</a:t>
+              <a:rPr lang="en-US" dirty="0"/>
+              <a:t>Slide Deck Title</a:t>
             </a:r>
           </a:p>
         </p:txBody>
       </p:sp>
       <p:sp>
         <p:nvSpPr>
-          <p:cNvPr id="3" name="Subtitle 2"/>
+          <p:cNvPr id="3" name="Subtitle 2">
+            <a:extLst>
+              <a:ext uri="{FF2B5EF4-FFF2-40B4-BE49-F238E27FC236}">
+                <a16:creationId xmlns:a16="http://schemas.microsoft.com/office/drawing/2014/main" id="{70E89392-98FE-25C5-8C7E-F04934948651}"/>
+              </a:ext>
+            </a:extLst>
+          </p:cNvPr>
           <p:cNvSpPr>
             <a:spLocks noGrp="1"/>
           </p:cNvSpPr>
           <p:nvPr>
-            <p:ph type="subTitle" idx="1"/>
+            <p:ph type="subTitle" idx="1" hasCustomPrompt="1"/>
           </p:nvPr>
         </p:nvSpPr>
         <p:spPr>
           <a:xfrm>
-            <a:off x="1371600" y="2914650"/>
-            <a:ext cx="6400800" cy="1314450"/>
+            <a:off x="1143000" y="2701529"/>
+            <a:ext cx="6858000" cy="934640"/>
           </a:xfrm>
         </p:spPr>
         <p:txBody>
@@ -211,172 +283,289 @@
           <a:lstStyle>
             <a:lvl1pPr marL="0" indent="0" algn="ctr">
               <a:buNone/>
-              <a:defRPr>
+              <a:defRPr sz="1800">
                 <a:solidFill>
-                  <a:schemeClr val="tx1">
-                    <a:tint val="75000"/>
-                  </a:schemeClr>
+                  <a:schemeClr val="bg1"/>
                 </a:solidFill>
               </a:defRPr>
             </a:lvl1pPr>
             <a:lvl2pPr marL="342900" indent="0" algn="ctr">
               <a:buNone/>
-              <a:defRPr>
-                <a:solidFill>
-                  <a:schemeClr val="tx1">
-                    <a:tint val="75000"/>
-                  </a:schemeClr>
-                </a:solidFill>
-              </a:defRPr>
+              <a:defRPr sz="1500"/>
             </a:lvl2pPr>
             <a:lvl3pPr marL="685800" indent="0" algn="ctr">
               <a:buNone/>
-              <a:defRPr>
-                <a:solidFill>
-                  <a:schemeClr val="tx1">
-                    <a:tint val="75000"/>
-                  </a:schemeClr>
-                </a:solidFill>
-              </a:defRPr>
+              <a:defRPr sz="1350"/>
             </a:lvl3pPr>
             <a:lvl4pPr marL="1028700" indent="0" algn="ctr">
               <a:buNone/>
-              <a:defRPr>
-                <a:solidFill>
-                  <a:schemeClr val="tx1">
-                    <a:tint val="75000"/>
-                  </a:schemeClr>
-                </a:solidFill>
-              </a:defRPr>
+              <a:defRPr sz="1200"/>
             </a:lvl4pPr>
             <a:lvl5pPr marL="1371600" indent="0" algn="ctr">
               <a:buNone/>
-              <a:defRPr>
-                <a:solidFill>
-                  <a:schemeClr val="tx1">
-                    <a:tint val="75000"/>
-                  </a:schemeClr>
-                </a:solidFill>
-              </a:defRPr>
+              <a:defRPr sz="1200"/>
             </a:lvl5pPr>
             <a:lvl6pPr marL="1714500" indent="0" algn="ctr">
               <a:buNone/>
-              <a:defRPr>
-                <a:solidFill>
-                  <a:schemeClr val="tx1">
-                    <a:tint val="75000"/>
-                  </a:schemeClr>
-                </a:solidFill>
-              </a:defRPr>
+              <a:defRPr sz="1200"/>
             </a:lvl6pPr>
             <a:lvl7pPr marL="2057400" indent="0" algn="ctr">
               <a:buNone/>
-              <a:defRPr>
-                <a:solidFill>
-                  <a:schemeClr val="tx1">
-                    <a:tint val="75000"/>
-                  </a:schemeClr>
-                </a:solidFill>
-              </a:defRPr>
+              <a:defRPr sz="1200"/>
             </a:lvl7pPr>
             <a:lvl8pPr marL="2400300" indent="0" algn="ctr">
               <a:buNone/>
-              <a:defRPr>
-                <a:solidFill>
-                  <a:schemeClr val="tx1">
-                    <a:tint val="75000"/>
-                  </a:schemeClr>
-                </a:solidFill>
-              </a:defRPr>
+              <a:defRPr sz="1200"/>
             </a:lvl8pPr>
             <a:lvl9pPr marL="2743200" indent="0" algn="ctr">
               <a:buNone/>
-              <a:defRPr>
-                <a:solidFill>
-                  <a:schemeClr val="tx1">
-                    <a:tint val="75000"/>
-                  </a:schemeClr>
-                </a:solidFill>
-              </a:defRPr>
+              <a:defRPr sz="1200"/>
             </a:lvl9pPr>
           </a:lstStyle>
           <a:p>
             <a:r>
-              <a:rPr lang="en-US"/>
-              <a:t>Click to edit Master subtitle style</a:t>
+              <a:rPr lang="en-US" dirty="0"/>
+              <a:t>Solano County Office of Education</a:t>
             </a:r>
+          </a:p>
+          <a:p>
+            <a:r>
+              <a:rPr lang="en-US" dirty="0"/>
+              <a:t>Year</a:t>
+            </a:r>
+          </a:p>
+        </p:txBody>
+      </p:sp>
+      <p:pic>
+        <p:nvPicPr>
+          <p:cNvPr id="10" name="Picture 9" descr="A logo with red text&#10;&#10;AI-generated content may be incorrect.">
+            <a:extLst>
+              <a:ext uri="{FF2B5EF4-FFF2-40B4-BE49-F238E27FC236}">
+                <a16:creationId xmlns:a16="http://schemas.microsoft.com/office/drawing/2014/main" id="{2F148169-FAD3-3EE6-1283-58A7C10D5451}"/>
+              </a:ext>
+            </a:extLst>
+          </p:cNvPr>
+          <p:cNvPicPr>
+            <a:picLocks noChangeAspect="1"/>
+          </p:cNvPicPr>
+          <p:nvPr/>
+        </p:nvPicPr>
+        <p:blipFill>
+          <a:blip r:embed="rId2">
+            <a:extLst>
+              <a:ext uri="{28A0092B-C50C-407E-A947-70E740481C1C}">
+                <a14:useLocalDpi xmlns:a14="http://schemas.microsoft.com/office/drawing/2010/main" val="0"/>
+              </a:ext>
+            </a:extLst>
+          </a:blip>
+          <a:stretch>
+            <a:fillRect/>
+          </a:stretch>
+        </p:blipFill>
+        <p:spPr>
+          <a:xfrm>
+            <a:off x="3599959" y="4098803"/>
+            <a:ext cx="1944082" cy="921397"/>
+          </a:xfrm>
+          <a:prstGeom prst="rect">
+            <a:avLst/>
+          </a:prstGeom>
+        </p:spPr>
+      </p:pic>
+      <p:sp>
+        <p:nvSpPr>
+          <p:cNvPr id="11" name="Freeform: Shape 10">
+            <a:extLst>
+              <a:ext uri="{FF2B5EF4-FFF2-40B4-BE49-F238E27FC236}">
+                <a16:creationId xmlns:a16="http://schemas.microsoft.com/office/drawing/2014/main" id="{44F89569-3AEF-3D51-67FA-CC5951347DA3}"/>
+              </a:ext>
+            </a:extLst>
+          </p:cNvPr>
+          <p:cNvSpPr/>
+          <p:nvPr/>
+        </p:nvSpPr>
+        <p:spPr>
+          <a:xfrm>
+            <a:off x="492919" y="504134"/>
+            <a:ext cx="3814763" cy="1703285"/>
+          </a:xfrm>
+          <a:custGeom>
+            <a:avLst/>
+            <a:gdLst>
+              <a:gd name="connsiteX0" fmla="*/ 0 w 5086350"/>
+              <a:gd name="connsiteY0" fmla="*/ 2271047 h 2271047"/>
+              <a:gd name="connsiteX1" fmla="*/ 1676400 w 5086350"/>
+              <a:gd name="connsiteY1" fmla="*/ 280322 h 2271047"/>
+              <a:gd name="connsiteX2" fmla="*/ 5086350 w 5086350"/>
+              <a:gd name="connsiteY2" fmla="*/ 61247 h 2271047"/>
+            </a:gdLst>
+            <a:ahLst/>
+            <a:cxnLst>
+              <a:cxn ang="0">
+                <a:pos x="connsiteX0" y="connsiteY0"/>
+              </a:cxn>
+              <a:cxn ang="0">
+                <a:pos x="connsiteX1" y="connsiteY1"/>
+              </a:cxn>
+              <a:cxn ang="0">
+                <a:pos x="connsiteX2" y="connsiteY2"/>
+              </a:cxn>
+            </a:cxnLst>
+            <a:rect l="l" t="t" r="r" b="b"/>
+            <a:pathLst>
+              <a:path w="5086350" h="2271047">
+                <a:moveTo>
+                  <a:pt x="0" y="2271047"/>
+                </a:moveTo>
+                <a:cubicBezTo>
+                  <a:pt x="414337" y="1459834"/>
+                  <a:pt x="828675" y="648622"/>
+                  <a:pt x="1676400" y="280322"/>
+                </a:cubicBezTo>
+                <a:cubicBezTo>
+                  <a:pt x="2524125" y="-87978"/>
+                  <a:pt x="3805237" y="-13366"/>
+                  <a:pt x="5086350" y="61247"/>
+                </a:cubicBezTo>
+              </a:path>
+            </a:pathLst>
+          </a:custGeom>
+          <a:noFill/>
+          <a:ln w="139700" cap="rnd">
+            <a:solidFill>
+              <a:schemeClr val="accent1"/>
+            </a:solidFill>
+            <a:prstDash val="dash"/>
+          </a:ln>
+        </p:spPr>
+        <p:style>
+          <a:lnRef idx="2">
+            <a:schemeClr val="accent1">
+              <a:shade val="15000"/>
+            </a:schemeClr>
+          </a:lnRef>
+          <a:fillRef idx="1">
+            <a:schemeClr val="accent1"/>
+          </a:fillRef>
+          <a:effectRef idx="0">
+            <a:schemeClr val="accent1"/>
+          </a:effectRef>
+          <a:fontRef idx="minor">
+            <a:schemeClr val="lt1"/>
+          </a:fontRef>
+        </p:style>
+        <p:txBody>
+          <a:bodyPr rtlCol="0" anchor="ctr"/>
+          <a:lstStyle/>
+          <a:p>
+            <a:pPr algn="ctr"/>
+            <a:endParaRPr lang="en-US" sz="1350" dirty="0"/>
           </a:p>
         </p:txBody>
       </p:sp>
       <p:sp>
         <p:nvSpPr>
-          <p:cNvPr id="4" name="Date Placeholder 3"/>
-          <p:cNvSpPr>
-            <a:spLocks noGrp="1"/>
-          </p:cNvSpPr>
-          <p:nvPr>
-            <p:ph type="dt" sz="half" idx="10"/>
-          </p:nvPr>
+          <p:cNvPr id="12" name="Freeform: Shape 11">
+            <a:extLst>
+              <a:ext uri="{FF2B5EF4-FFF2-40B4-BE49-F238E27FC236}">
+                <a16:creationId xmlns:a16="http://schemas.microsoft.com/office/drawing/2014/main" id="{7149CECC-EA79-8690-BFAC-4690CC292177}"/>
+              </a:ext>
+            </a:extLst>
+          </p:cNvPr>
+          <p:cNvSpPr/>
+          <p:nvPr/>
         </p:nvSpPr>
-        <p:spPr/>
+        <p:spPr>
+          <a:xfrm>
+            <a:off x="6060385" y="1848678"/>
+            <a:ext cx="2929559" cy="2446791"/>
+          </a:xfrm>
+          <a:custGeom>
+            <a:avLst/>
+            <a:gdLst>
+              <a:gd name="connsiteX0" fmla="*/ 0 w 3906078"/>
+              <a:gd name="connsiteY0" fmla="*/ 2097157 h 3262388"/>
+              <a:gd name="connsiteX1" fmla="*/ 2117035 w 3906078"/>
+              <a:gd name="connsiteY1" fmla="*/ 3170583 h 3262388"/>
+              <a:gd name="connsiteX2" fmla="*/ 3906078 w 3906078"/>
+              <a:gd name="connsiteY2" fmla="*/ 0 h 3262388"/>
+              <a:gd name="connsiteX3" fmla="*/ 3906078 w 3906078"/>
+              <a:gd name="connsiteY3" fmla="*/ 0 h 3262388"/>
+            </a:gdLst>
+            <a:ahLst/>
+            <a:cxnLst>
+              <a:cxn ang="0">
+                <a:pos x="connsiteX0" y="connsiteY0"/>
+              </a:cxn>
+              <a:cxn ang="0">
+                <a:pos x="connsiteX1" y="connsiteY1"/>
+              </a:cxn>
+              <a:cxn ang="0">
+                <a:pos x="connsiteX2" y="connsiteY2"/>
+              </a:cxn>
+              <a:cxn ang="0">
+                <a:pos x="connsiteX3" y="connsiteY3"/>
+              </a:cxn>
+            </a:cxnLst>
+            <a:rect l="l" t="t" r="r" b="b"/>
+            <a:pathLst>
+              <a:path w="3906078" h="3262388">
+                <a:moveTo>
+                  <a:pt x="0" y="2097157"/>
+                </a:moveTo>
+                <a:cubicBezTo>
+                  <a:pt x="733011" y="2808633"/>
+                  <a:pt x="1466022" y="3520109"/>
+                  <a:pt x="2117035" y="3170583"/>
+                </a:cubicBezTo>
+                <a:cubicBezTo>
+                  <a:pt x="2768048" y="2821057"/>
+                  <a:pt x="3906078" y="0"/>
+                  <a:pt x="3906078" y="0"/>
+                </a:cubicBezTo>
+                <a:lnTo>
+                  <a:pt x="3906078" y="0"/>
+                </a:lnTo>
+              </a:path>
+            </a:pathLst>
+          </a:custGeom>
+          <a:noFill/>
+          <a:ln w="152400" cap="rnd">
+            <a:solidFill>
+              <a:schemeClr val="accent1"/>
+            </a:solidFill>
+            <a:prstDash val="dash"/>
+          </a:ln>
+        </p:spPr>
+        <p:style>
+          <a:lnRef idx="2">
+            <a:schemeClr val="accent1">
+              <a:shade val="15000"/>
+            </a:schemeClr>
+          </a:lnRef>
+          <a:fillRef idx="1">
+            <a:schemeClr val="accent1"/>
+          </a:fillRef>
+          <a:effectRef idx="0">
+            <a:schemeClr val="accent1"/>
+          </a:effectRef>
+          <a:fontRef idx="minor">
+            <a:schemeClr val="lt1"/>
+          </a:fontRef>
+        </p:style>
         <p:txBody>
-          <a:bodyPr/>
+          <a:bodyPr rtlCol="0" anchor="ctr"/>
           <a:lstStyle/>
           <a:p>
-            <a:fld id="{241EB5C9-1307-BA42-ABA2-0BC069CD8E7F}" type="datetimeFigureOut">
-              <a:rPr lang="en-US" smtClean="0"/>
-              <a:t>1/2/22</a:t>
-            </a:fld>
-            <a:endParaRPr lang="en-US"/>
-          </a:p>
-        </p:txBody>
-      </p:sp>
-      <p:sp>
-        <p:nvSpPr>
-          <p:cNvPr id="5" name="Footer Placeholder 4"/>
-          <p:cNvSpPr>
-            <a:spLocks noGrp="1"/>
-          </p:cNvSpPr>
-          <p:nvPr>
-            <p:ph type="ftr" sz="quarter" idx="11"/>
-          </p:nvPr>
-        </p:nvSpPr>
-        <p:spPr/>
-        <p:txBody>
-          <a:bodyPr/>
-          <a:lstStyle/>
-          <a:p>
-            <a:endParaRPr lang="en-US"/>
-          </a:p>
-        </p:txBody>
-      </p:sp>
-      <p:sp>
-        <p:nvSpPr>
-          <p:cNvPr id="6" name="Slide Number Placeholder 5"/>
-          <p:cNvSpPr>
-            <a:spLocks noGrp="1"/>
-          </p:cNvSpPr>
-          <p:nvPr>
-            <p:ph type="sldNum" sz="quarter" idx="12"/>
-          </p:nvPr>
-        </p:nvSpPr>
-        <p:spPr/>
-        <p:txBody>
-          <a:bodyPr/>
-          <a:lstStyle/>
-          <a:p>
-            <a:fld id="{C5EF2332-01BF-834F-8236-50238282D533}" type="slidenum">
-              <a:rPr lang="en-US" smtClean="0"/>
-              <a:t>‹#›</a:t>
-            </a:fld>
-            <a:endParaRPr lang="en-US"/>
+            <a:pPr algn="ctr"/>
+            <a:endParaRPr lang="en-US" sz="1350"/>
           </a:p>
         </p:txBody>
       </p:sp>
     </p:spTree>
     <p:extLst>
       <p:ext uri="{BB962C8B-B14F-4D97-AF65-F5344CB8AC3E}">
-        <p14:creationId xmlns:p14="http://schemas.microsoft.com/office/powerpoint/2010/main" val="1444357513"/>
+        <p14:creationId xmlns:p14="http://schemas.microsoft.com/office/powerpoint/2010/main" val="3251605932"/>
       </p:ext>
     </p:extLst>
   </p:cSld>
@@ -751,72 +940,92 @@
       </p:grpSpPr>
       <p:sp>
         <p:nvSpPr>
-          <p:cNvPr id="2" name="Title 1"/>
+          <p:cNvPr id="2" name="Title 1">
+            <a:extLst>
+              <a:ext uri="{FF2B5EF4-FFF2-40B4-BE49-F238E27FC236}">
+                <a16:creationId xmlns:a16="http://schemas.microsoft.com/office/drawing/2014/main" id="{2DEB43F4-64B6-7152-A0ED-E3A60DA1F14B}"/>
+              </a:ext>
+            </a:extLst>
+          </p:cNvPr>
           <p:cNvSpPr>
             <a:spLocks noGrp="1"/>
           </p:cNvSpPr>
           <p:nvPr>
-            <p:ph type="title"/>
+            <p:ph type="title" hasCustomPrompt="1"/>
           </p:nvPr>
         </p:nvSpPr>
         <p:spPr/>
         <p:txBody>
           <a:bodyPr/>
-          <a:lstStyle/>
+          <a:lstStyle>
+            <a:lvl1pPr>
+              <a:defRPr/>
+            </a:lvl1pPr>
+          </a:lstStyle>
           <a:p>
             <a:r>
-              <a:rPr lang="en-US"/>
-              <a:t>Click to edit Master title style</a:t>
+              <a:rPr lang="en-US" dirty="0"/>
+              <a:t>Slide Title</a:t>
             </a:r>
           </a:p>
         </p:txBody>
       </p:sp>
       <p:sp>
         <p:nvSpPr>
-          <p:cNvPr id="3" name="Content Placeholder 2"/>
+          <p:cNvPr id="3" name="Content Placeholder 2">
+            <a:extLst>
+              <a:ext uri="{FF2B5EF4-FFF2-40B4-BE49-F238E27FC236}">
+                <a16:creationId xmlns:a16="http://schemas.microsoft.com/office/drawing/2014/main" id="{05EBDBDD-1506-E6EB-08B3-3B4E995DE2B3}"/>
+              </a:ext>
+            </a:extLst>
+          </p:cNvPr>
           <p:cNvSpPr>
             <a:spLocks noGrp="1"/>
           </p:cNvSpPr>
           <p:nvPr>
-            <p:ph idx="1"/>
+            <p:ph idx="1" hasCustomPrompt="1"/>
           </p:nvPr>
         </p:nvSpPr>
         <p:spPr/>
         <p:txBody>
           <a:bodyPr/>
-          <a:lstStyle/>
+          <a:lstStyle>
+            <a:lvl1pPr>
+              <a:defRPr/>
+            </a:lvl1pPr>
+          </a:lstStyle>
           <a:p>
             <a:pPr lvl="0"/>
             <a:r>
-              <a:rPr lang="en-US"/>
-              <a:t>Click to edit Master text styles</a:t>
+              <a:rPr lang="en-US" dirty="0"/>
+              <a:t>Main Text</a:t>
             </a:r>
           </a:p>
           <a:p>
             <a:pPr lvl="1"/>
             <a:r>
-              <a:rPr lang="en-US"/>
+              <a:rPr lang="en-US" dirty="0"/>
               <a:t>Second level</a:t>
             </a:r>
           </a:p>
           <a:p>
             <a:pPr lvl="2"/>
             <a:r>
-              <a:rPr lang="en-US"/>
+              <a:rPr lang="en-US" dirty="0"/>
               <a:t>Third level</a:t>
             </a:r>
           </a:p>
           <a:p>
             <a:pPr lvl="3"/>
             <a:r>
-              <a:rPr lang="en-US"/>
+              <a:rPr lang="en-US" dirty="0"/>
               <a:t>Fourth level</a:t>
             </a:r>
           </a:p>
           <a:p>
             <a:pPr lvl="4"/>
             <a:r>
-              <a:rPr lang="en-US"/>
+              <a:rPr lang="en-US" dirty="0"/>
               <a:t>Fifth level</a:t>
             </a:r>
           </a:p>
@@ -824,7 +1033,13 @@
       </p:sp>
       <p:sp>
         <p:nvSpPr>
-          <p:cNvPr id="4" name="Date Placeholder 3"/>
+          <p:cNvPr id="4" name="Date Placeholder 3">
+            <a:extLst>
+              <a:ext uri="{FF2B5EF4-FFF2-40B4-BE49-F238E27FC236}">
+                <a16:creationId xmlns:a16="http://schemas.microsoft.com/office/drawing/2014/main" id="{316091B4-31B8-DD41-AE08-CB0747A5D76C}"/>
+              </a:ext>
+            </a:extLst>
+          </p:cNvPr>
           <p:cNvSpPr>
             <a:spLocks noGrp="1"/>
           </p:cNvSpPr>
@@ -839,7 +1054,7 @@
           <a:p>
             <a:fld id="{241EB5C9-1307-BA42-ABA2-0BC069CD8E7F}" type="datetimeFigureOut">
               <a:rPr lang="en-US" smtClean="0"/>
-              <a:t>1/2/22</a:t>
+              <a:t>11/17/2025</a:t>
             </a:fld>
             <a:endParaRPr lang="en-US"/>
           </a:p>
@@ -847,7 +1062,13 @@
       </p:sp>
       <p:sp>
         <p:nvSpPr>
-          <p:cNvPr id="5" name="Footer Placeholder 4"/>
+          <p:cNvPr id="5" name="Footer Placeholder 4">
+            <a:extLst>
+              <a:ext uri="{FF2B5EF4-FFF2-40B4-BE49-F238E27FC236}">
+                <a16:creationId xmlns:a16="http://schemas.microsoft.com/office/drawing/2014/main" id="{3150F418-43D3-D2A8-0634-01AC126835F3}"/>
+              </a:ext>
+            </a:extLst>
+          </p:cNvPr>
           <p:cNvSpPr>
             <a:spLocks noGrp="1"/>
           </p:cNvSpPr>
@@ -866,7 +1087,13 @@
       </p:sp>
       <p:sp>
         <p:nvSpPr>
-          <p:cNvPr id="6" name="Slide Number Placeholder 5"/>
+          <p:cNvPr id="6" name="Slide Number Placeholder 5">
+            <a:extLst>
+              <a:ext uri="{FF2B5EF4-FFF2-40B4-BE49-F238E27FC236}">
+                <a16:creationId xmlns:a16="http://schemas.microsoft.com/office/drawing/2014/main" id="{51749F20-DAA1-B85A-A5A4-925B01310F9E}"/>
+              </a:ext>
+            </a:extLst>
+          </p:cNvPr>
           <p:cNvSpPr>
             <a:spLocks noGrp="1"/>
           </p:cNvSpPr>
@@ -887,16 +1114,81 @@
           </a:p>
         </p:txBody>
       </p:sp>
+      <p:cxnSp>
+        <p:nvCxnSpPr>
+          <p:cNvPr id="10" name="Straight Connector 9">
+            <a:extLst>
+              <a:ext uri="{FF2B5EF4-FFF2-40B4-BE49-F238E27FC236}">
+                <a16:creationId xmlns:a16="http://schemas.microsoft.com/office/drawing/2014/main" id="{E8F28216-D270-E846-BA46-F5D9D419737B}"/>
+              </a:ext>
+            </a:extLst>
+          </p:cNvPr>
+          <p:cNvCxnSpPr>
+            <a:cxnSpLocks/>
+          </p:cNvCxnSpPr>
+          <p:nvPr/>
+        </p:nvCxnSpPr>
+        <p:spPr>
+          <a:xfrm>
+            <a:off x="1729408" y="4600575"/>
+            <a:ext cx="7414592" cy="0"/>
+          </a:xfrm>
+          <a:prstGeom prst="line">
+            <a:avLst/>
+          </a:prstGeom>
+          <a:ln w="152400" cap="rnd">
+            <a:solidFill>
+              <a:schemeClr val="accent3"/>
+            </a:solidFill>
+            <a:prstDash val="dash"/>
+          </a:ln>
+        </p:spPr>
+        <p:style>
+          <a:lnRef idx="2">
+            <a:schemeClr val="accent1"/>
+          </a:lnRef>
+          <a:fillRef idx="0">
+            <a:schemeClr val="accent1"/>
+          </a:fillRef>
+          <a:effectRef idx="1">
+            <a:schemeClr val="accent1"/>
+          </a:effectRef>
+          <a:fontRef idx="minor">
+            <a:schemeClr val="tx1"/>
+          </a:fontRef>
+        </p:style>
+      </p:cxnSp>
     </p:spTree>
     <p:extLst>
       <p:ext uri="{BB962C8B-B14F-4D97-AF65-F5344CB8AC3E}">
-        <p14:creationId xmlns:p14="http://schemas.microsoft.com/office/powerpoint/2010/main" val="338346009"/>
+        <p14:creationId xmlns:p14="http://schemas.microsoft.com/office/powerpoint/2010/main" val="1405405665"/>
       </p:ext>
     </p:extLst>
   </p:cSld>
   <p:clrMapOvr>
     <a:masterClrMapping/>
   </p:clrMapOvr>
+  <p:extLst>
+    <p:ext uri="{DCECCB84-F9BA-43D5-87BE-67443E8EF086}">
+      <p15:sldGuideLst xmlns:p15="http://schemas.microsoft.com/office/powerpoint/2012/main">
+        <p15:guide id="1" orient="horz" pos="2160">
+          <p15:clr>
+            <a:srgbClr val="FBAE40"/>
+          </p15:clr>
+        </p15:guide>
+        <p15:guide id="2" pos="216">
+          <p15:clr>
+            <a:srgbClr val="FBAE40"/>
+          </p15:clr>
+        </p15:guide>
+        <p15:guide id="3" pos="6672">
+          <p15:clr>
+            <a:srgbClr val="FBAE40"/>
+          </p15:clr>
+        </p15:guide>
+      </p15:sldGuideLst>
+    </p:ext>
+  </p:extLst>
 </p:sldLayout>
 </file>
 
@@ -919,140 +1211,199 @@
       </p:grpSpPr>
       <p:sp>
         <p:nvSpPr>
-          <p:cNvPr id="2" name="Title 1"/>
+          <p:cNvPr id="7" name="Rectangle 6">
+            <a:extLst>
+              <a:ext uri="{FF2B5EF4-FFF2-40B4-BE49-F238E27FC236}">
+                <a16:creationId xmlns:a16="http://schemas.microsoft.com/office/drawing/2014/main" id="{B8823472-6FCE-8B41-F3B5-DBC80E5F3DA3}"/>
+              </a:ext>
+            </a:extLst>
+          </p:cNvPr>
+          <p:cNvSpPr/>
+          <p:nvPr/>
+        </p:nvSpPr>
+        <p:spPr>
+          <a:xfrm>
+            <a:off x="623887" y="935832"/>
+            <a:ext cx="8520113" cy="2557462"/>
+          </a:xfrm>
+          <a:prstGeom prst="rect">
+            <a:avLst/>
+          </a:prstGeom>
+          <a:ln>
+            <a:noFill/>
+          </a:ln>
+        </p:spPr>
+        <p:style>
+          <a:lnRef idx="2">
+            <a:schemeClr val="accent1">
+              <a:shade val="15000"/>
+            </a:schemeClr>
+          </a:lnRef>
+          <a:fillRef idx="1">
+            <a:schemeClr val="accent1"/>
+          </a:fillRef>
+          <a:effectRef idx="0">
+            <a:schemeClr val="accent1"/>
+          </a:effectRef>
+          <a:fontRef idx="minor">
+            <a:schemeClr val="lt1"/>
+          </a:fontRef>
+        </p:style>
+        <p:txBody>
+          <a:bodyPr rtlCol="0" anchor="ctr"/>
+          <a:lstStyle/>
+          <a:p>
+            <a:pPr algn="ctr"/>
+            <a:endParaRPr lang="en-US" sz="1350"/>
+          </a:p>
+        </p:txBody>
+      </p:sp>
+      <p:sp>
+        <p:nvSpPr>
+          <p:cNvPr id="2" name="Title 1">
+            <a:extLst>
+              <a:ext uri="{FF2B5EF4-FFF2-40B4-BE49-F238E27FC236}">
+                <a16:creationId xmlns:a16="http://schemas.microsoft.com/office/drawing/2014/main" id="{E4048048-D19C-FCF2-EEF1-69C60400FEDC}"/>
+              </a:ext>
+            </a:extLst>
+          </p:cNvPr>
           <p:cNvSpPr>
             <a:spLocks noGrp="1"/>
           </p:cNvSpPr>
           <p:nvPr>
-            <p:ph type="title"/>
+            <p:ph type="title" hasCustomPrompt="1"/>
           </p:nvPr>
         </p:nvSpPr>
         <p:spPr>
           <a:xfrm>
-            <a:off x="722313" y="3305176"/>
-            <a:ext cx="7772400" cy="1021556"/>
+            <a:off x="623887" y="1282304"/>
+            <a:ext cx="7548563" cy="2210990"/>
           </a:xfrm>
         </p:spPr>
         <p:txBody>
-          <a:bodyPr anchor="t"/>
+          <a:bodyPr anchor="b"/>
           <a:lstStyle>
-            <a:lvl1pPr algn="l">
-              <a:defRPr sz="3000" b="1" cap="all"/>
+            <a:lvl1pPr>
+              <a:defRPr sz="4500"/>
             </a:lvl1pPr>
           </a:lstStyle>
           <a:p>
             <a:r>
-              <a:rPr lang="en-US"/>
-              <a:t>Click to edit Master title style</a:t>
+              <a:rPr lang="en-US" dirty="0"/>
+              <a:t>Section Title</a:t>
             </a:r>
           </a:p>
         </p:txBody>
       </p:sp>
       <p:sp>
         <p:nvSpPr>
-          <p:cNvPr id="3" name="Text Placeholder 2"/>
+          <p:cNvPr id="3" name="Text Placeholder 2">
+            <a:extLst>
+              <a:ext uri="{FF2B5EF4-FFF2-40B4-BE49-F238E27FC236}">
+                <a16:creationId xmlns:a16="http://schemas.microsoft.com/office/drawing/2014/main" id="{6F44ADA5-CE26-005B-405A-67A440538B0D}"/>
+              </a:ext>
+            </a:extLst>
+          </p:cNvPr>
           <p:cNvSpPr>
             <a:spLocks noGrp="1"/>
           </p:cNvSpPr>
           <p:nvPr>
-            <p:ph type="body" idx="1"/>
+            <p:ph type="body" idx="1" hasCustomPrompt="1"/>
           </p:nvPr>
         </p:nvSpPr>
         <p:spPr>
           <a:xfrm>
-            <a:off x="722313" y="2180035"/>
-            <a:ext cx="7772400" cy="1125140"/>
+            <a:off x="628650" y="3573066"/>
+            <a:ext cx="7543800" cy="798910"/>
           </a:xfrm>
         </p:spPr>
         <p:txBody>
-          <a:bodyPr anchor="b"/>
+          <a:bodyPr/>
           <a:lstStyle>
             <a:lvl1pPr marL="0" indent="0">
               <a:buNone/>
-              <a:defRPr sz="1500">
+              <a:defRPr sz="1800">
                 <a:solidFill>
-                  <a:schemeClr val="tx1">
-                    <a:tint val="75000"/>
-                  </a:schemeClr>
+                  <a:schemeClr val="tx1"/>
                 </a:solidFill>
               </a:defRPr>
             </a:lvl1pPr>
             <a:lvl2pPr marL="342900" indent="0">
               <a:buNone/>
-              <a:defRPr sz="1350">
+              <a:defRPr sz="1500">
                 <a:solidFill>
                   <a:schemeClr val="tx1">
-                    <a:tint val="75000"/>
+                    <a:tint val="82000"/>
                   </a:schemeClr>
                 </a:solidFill>
               </a:defRPr>
             </a:lvl2pPr>
             <a:lvl3pPr marL="685800" indent="0">
               <a:buNone/>
-              <a:defRPr sz="1200">
+              <a:defRPr sz="1350">
                 <a:solidFill>
                   <a:schemeClr val="tx1">
-                    <a:tint val="75000"/>
+                    <a:tint val="82000"/>
                   </a:schemeClr>
                 </a:solidFill>
               </a:defRPr>
             </a:lvl3pPr>
             <a:lvl4pPr marL="1028700" indent="0">
               <a:buNone/>
-              <a:defRPr sz="1050">
+              <a:defRPr sz="1200">
                 <a:solidFill>
                   <a:schemeClr val="tx1">
-                    <a:tint val="75000"/>
+                    <a:tint val="82000"/>
                   </a:schemeClr>
                 </a:solidFill>
               </a:defRPr>
             </a:lvl4pPr>
             <a:lvl5pPr marL="1371600" indent="0">
               <a:buNone/>
-              <a:defRPr sz="1050">
+              <a:defRPr sz="1200">
                 <a:solidFill>
                   <a:schemeClr val="tx1">
-                    <a:tint val="75000"/>
+                    <a:tint val="82000"/>
                   </a:schemeClr>
                 </a:solidFill>
               </a:defRPr>
             </a:lvl5pPr>
             <a:lvl6pPr marL="1714500" indent="0">
               <a:buNone/>
-              <a:defRPr sz="1050">
+              <a:defRPr sz="1200">
                 <a:solidFill>
                   <a:schemeClr val="tx1">
-                    <a:tint val="75000"/>
+                    <a:tint val="82000"/>
                   </a:schemeClr>
                 </a:solidFill>
               </a:defRPr>
             </a:lvl6pPr>
             <a:lvl7pPr marL="2057400" indent="0">
               <a:buNone/>
-              <a:defRPr sz="1050">
+              <a:defRPr sz="1200">
                 <a:solidFill>
                   <a:schemeClr val="tx1">
-                    <a:tint val="75000"/>
+                    <a:tint val="82000"/>
                   </a:schemeClr>
                 </a:solidFill>
               </a:defRPr>
             </a:lvl7pPr>
             <a:lvl8pPr marL="2400300" indent="0">
               <a:buNone/>
-              <a:defRPr sz="1050">
+              <a:defRPr sz="1200">
                 <a:solidFill>
                   <a:schemeClr val="tx1">
-                    <a:tint val="75000"/>
+                    <a:tint val="82000"/>
                   </a:schemeClr>
                 </a:solidFill>
               </a:defRPr>
             </a:lvl8pPr>
             <a:lvl9pPr marL="2743200" indent="0">
               <a:buNone/>
-              <a:defRPr sz="1050">
+              <a:defRPr sz="1200">
                 <a:solidFill>
                   <a:schemeClr val="tx1">
-                    <a:tint val="75000"/>
+                    <a:tint val="82000"/>
                   </a:schemeClr>
                 </a:solidFill>
               </a:defRPr>
@@ -1061,15 +1412,21 @@
           <a:p>
             <a:pPr lvl="0"/>
             <a:r>
-              <a:rPr lang="en-US"/>
-              <a:t>Click to edit Master text styles</a:t>
+              <a:rPr lang="en-US" dirty="0"/>
+              <a:t>Section Subtitle</a:t>
             </a:r>
           </a:p>
         </p:txBody>
       </p:sp>
       <p:sp>
         <p:nvSpPr>
-          <p:cNvPr id="4" name="Date Placeholder 3"/>
+          <p:cNvPr id="4" name="Date Placeholder 3">
+            <a:extLst>
+              <a:ext uri="{FF2B5EF4-FFF2-40B4-BE49-F238E27FC236}">
+                <a16:creationId xmlns:a16="http://schemas.microsoft.com/office/drawing/2014/main" id="{425A271C-9DDB-19D8-2F10-46CCCDB3481B}"/>
+              </a:ext>
+            </a:extLst>
+          </p:cNvPr>
           <p:cNvSpPr>
             <a:spLocks noGrp="1"/>
           </p:cNvSpPr>
@@ -1084,7 +1441,7 @@
           <a:p>
             <a:fld id="{241EB5C9-1307-BA42-ABA2-0BC069CD8E7F}" type="datetimeFigureOut">
               <a:rPr lang="en-US" smtClean="0"/>
-              <a:t>1/2/22</a:t>
+              <a:t>11/17/2025</a:t>
             </a:fld>
             <a:endParaRPr lang="en-US"/>
           </a:p>
@@ -1092,7 +1449,13 @@
       </p:sp>
       <p:sp>
         <p:nvSpPr>
-          <p:cNvPr id="5" name="Footer Placeholder 4"/>
+          <p:cNvPr id="5" name="Footer Placeholder 4">
+            <a:extLst>
+              <a:ext uri="{FF2B5EF4-FFF2-40B4-BE49-F238E27FC236}">
+                <a16:creationId xmlns:a16="http://schemas.microsoft.com/office/drawing/2014/main" id="{936E8297-7D53-A648-EAC3-121A42A017AB}"/>
+              </a:ext>
+            </a:extLst>
+          </p:cNvPr>
           <p:cNvSpPr>
             <a:spLocks noGrp="1"/>
           </p:cNvSpPr>
@@ -1111,7 +1474,13 @@
       </p:sp>
       <p:sp>
         <p:nvSpPr>
-          <p:cNvPr id="6" name="Slide Number Placeholder 5"/>
+          <p:cNvPr id="6" name="Slide Number Placeholder 5">
+            <a:extLst>
+              <a:ext uri="{FF2B5EF4-FFF2-40B4-BE49-F238E27FC236}">
+                <a16:creationId xmlns:a16="http://schemas.microsoft.com/office/drawing/2014/main" id="{EC7026ED-E004-9B8A-D597-E622A5319454}"/>
+              </a:ext>
+            </a:extLst>
+          </p:cNvPr>
           <p:cNvSpPr>
             <a:spLocks noGrp="1"/>
           </p:cNvSpPr>
@@ -1132,10 +1501,101 @@
           </a:p>
         </p:txBody>
       </p:sp>
+      <p:sp>
+        <p:nvSpPr>
+          <p:cNvPr id="11" name="Freeform: Shape 10">
+            <a:extLst>
+              <a:ext uri="{FF2B5EF4-FFF2-40B4-BE49-F238E27FC236}">
+                <a16:creationId xmlns:a16="http://schemas.microsoft.com/office/drawing/2014/main" id="{58FD2DCB-887F-2D1C-B9E5-05B57E55E1CB}"/>
+              </a:ext>
+            </a:extLst>
+          </p:cNvPr>
+          <p:cNvSpPr/>
+          <p:nvPr/>
+        </p:nvSpPr>
+        <p:spPr>
+          <a:xfrm>
+            <a:off x="3637722" y="655982"/>
+            <a:ext cx="4691103" cy="3570633"/>
+          </a:xfrm>
+          <a:custGeom>
+            <a:avLst/>
+            <a:gdLst>
+              <a:gd name="connsiteX0" fmla="*/ 0 w 6254804"/>
+              <a:gd name="connsiteY0" fmla="*/ 0 h 4760844"/>
+              <a:gd name="connsiteX1" fmla="*/ 5774634 w 6254804"/>
+              <a:gd name="connsiteY1" fmla="*/ 1033670 h 4760844"/>
+              <a:gd name="connsiteX2" fmla="*/ 5854147 w 6254804"/>
+              <a:gd name="connsiteY2" fmla="*/ 4760844 h 4760844"/>
+            </a:gdLst>
+            <a:ahLst/>
+            <a:cxnLst>
+              <a:cxn ang="0">
+                <a:pos x="connsiteX0" y="connsiteY0"/>
+              </a:cxn>
+              <a:cxn ang="0">
+                <a:pos x="connsiteX1" y="connsiteY1"/>
+              </a:cxn>
+              <a:cxn ang="0">
+                <a:pos x="connsiteX2" y="connsiteY2"/>
+              </a:cxn>
+            </a:cxnLst>
+            <a:rect l="l" t="t" r="r" b="b"/>
+            <a:pathLst>
+              <a:path w="6254804" h="4760844">
+                <a:moveTo>
+                  <a:pt x="0" y="0"/>
+                </a:moveTo>
+                <a:cubicBezTo>
+                  <a:pt x="2399471" y="120098"/>
+                  <a:pt x="4798943" y="240196"/>
+                  <a:pt x="5774634" y="1033670"/>
+                </a:cubicBezTo>
+                <a:cubicBezTo>
+                  <a:pt x="6750325" y="1827144"/>
+                  <a:pt x="5953538" y="4104861"/>
+                  <a:pt x="5854147" y="4760844"/>
+                </a:cubicBezTo>
+              </a:path>
+            </a:pathLst>
+          </a:custGeom>
+          <a:noFill/>
+          <a:ln w="152400" cap="rnd">
+            <a:solidFill>
+              <a:schemeClr val="accent4"/>
+            </a:solidFill>
+            <a:prstDash val="dash"/>
+          </a:ln>
+        </p:spPr>
+        <p:style>
+          <a:lnRef idx="2">
+            <a:schemeClr val="accent1">
+              <a:shade val="15000"/>
+            </a:schemeClr>
+          </a:lnRef>
+          <a:fillRef idx="1">
+            <a:schemeClr val="accent1"/>
+          </a:fillRef>
+          <a:effectRef idx="0">
+            <a:schemeClr val="accent1"/>
+          </a:effectRef>
+          <a:fontRef idx="minor">
+            <a:schemeClr val="lt1"/>
+          </a:fontRef>
+        </p:style>
+        <p:txBody>
+          <a:bodyPr rtlCol="0" anchor="ctr"/>
+          <a:lstStyle/>
+          <a:p>
+            <a:pPr algn="ctr"/>
+            <a:endParaRPr lang="en-US" sz="1350"/>
+          </a:p>
+        </p:txBody>
+      </p:sp>
     </p:spTree>
     <p:extLst>
       <p:ext uri="{BB962C8B-B14F-4D97-AF65-F5344CB8AC3E}">
-        <p14:creationId xmlns:p14="http://schemas.microsoft.com/office/powerpoint/2010/main" val="1073069076"/>
+        <p14:creationId xmlns:p14="http://schemas.microsoft.com/office/powerpoint/2010/main" val="866032693"/>
       </p:ext>
     </p:extLst>
   </p:cSld>
@@ -1164,105 +1624,102 @@
       </p:grpSpPr>
       <p:sp>
         <p:nvSpPr>
-          <p:cNvPr id="2" name="Title 1"/>
+          <p:cNvPr id="2" name="Title 1">
+            <a:extLst>
+              <a:ext uri="{FF2B5EF4-FFF2-40B4-BE49-F238E27FC236}">
+                <a16:creationId xmlns:a16="http://schemas.microsoft.com/office/drawing/2014/main" id="{DCBB3FF2-E634-8F42-EAD5-E75E57C41D32}"/>
+              </a:ext>
+            </a:extLst>
+          </p:cNvPr>
           <p:cNvSpPr>
             <a:spLocks noGrp="1"/>
           </p:cNvSpPr>
           <p:nvPr>
-            <p:ph type="title"/>
+            <p:ph type="title" hasCustomPrompt="1"/>
           </p:nvPr>
         </p:nvSpPr>
-        <p:spPr/>
+        <p:spPr>
+          <a:xfrm>
+            <a:off x="228601" y="203670"/>
+            <a:ext cx="7943850" cy="858982"/>
+          </a:xfrm>
+        </p:spPr>
         <p:txBody>
           <a:bodyPr/>
-          <a:lstStyle/>
+          <a:lstStyle>
+            <a:lvl1pPr>
+              <a:defRPr/>
+            </a:lvl1pPr>
+          </a:lstStyle>
           <a:p>
             <a:r>
-              <a:rPr lang="en-US"/>
-              <a:t>Click to edit Master title style</a:t>
+              <a:rPr lang="en-US" dirty="0"/>
+              <a:t>Slide Title</a:t>
             </a:r>
           </a:p>
         </p:txBody>
       </p:sp>
       <p:sp>
         <p:nvSpPr>
-          <p:cNvPr id="3" name="Content Placeholder 2"/>
+          <p:cNvPr id="3" name="Content Placeholder 2">
+            <a:extLst>
+              <a:ext uri="{FF2B5EF4-FFF2-40B4-BE49-F238E27FC236}">
+                <a16:creationId xmlns:a16="http://schemas.microsoft.com/office/drawing/2014/main" id="{D58747BF-1C1B-2FE2-6738-90D2B83732FE}"/>
+              </a:ext>
+            </a:extLst>
+          </p:cNvPr>
           <p:cNvSpPr>
             <a:spLocks noGrp="1"/>
           </p:cNvSpPr>
           <p:nvPr>
-            <p:ph sz="half" idx="1"/>
+            <p:ph sz="half" idx="1" hasCustomPrompt="1"/>
           </p:nvPr>
         </p:nvSpPr>
         <p:spPr>
           <a:xfrm>
-            <a:off x="457200" y="1200151"/>
-            <a:ext cx="4038600" cy="3394472"/>
+            <a:off x="228600" y="1200151"/>
+            <a:ext cx="3900488" cy="3171825"/>
           </a:xfrm>
         </p:spPr>
         <p:txBody>
           <a:bodyPr/>
           <a:lstStyle>
             <a:lvl1pPr>
-              <a:defRPr sz="2100"/>
+              <a:defRPr/>
             </a:lvl1pPr>
-            <a:lvl2pPr>
-              <a:defRPr sz="1800"/>
-            </a:lvl2pPr>
-            <a:lvl3pPr>
-              <a:defRPr sz="1500"/>
-            </a:lvl3pPr>
-            <a:lvl4pPr>
-              <a:defRPr sz="1350"/>
-            </a:lvl4pPr>
-            <a:lvl5pPr>
-              <a:defRPr sz="1350"/>
-            </a:lvl5pPr>
-            <a:lvl6pPr>
-              <a:defRPr sz="1350"/>
-            </a:lvl6pPr>
-            <a:lvl7pPr>
-              <a:defRPr sz="1350"/>
-            </a:lvl7pPr>
-            <a:lvl8pPr>
-              <a:defRPr sz="1350"/>
-            </a:lvl8pPr>
-            <a:lvl9pPr>
-              <a:defRPr sz="1350"/>
-            </a:lvl9pPr>
           </a:lstStyle>
           <a:p>
             <a:pPr lvl="0"/>
             <a:r>
-              <a:rPr lang="en-US"/>
-              <a:t>Click to edit Master text styles</a:t>
+              <a:rPr lang="en-US" dirty="0"/>
+              <a:t>List 1</a:t>
             </a:r>
           </a:p>
           <a:p>
             <a:pPr lvl="1"/>
             <a:r>
-              <a:rPr lang="en-US"/>
+              <a:rPr lang="en-US" dirty="0"/>
               <a:t>Second level</a:t>
             </a:r>
           </a:p>
           <a:p>
             <a:pPr lvl="2"/>
             <a:r>
-              <a:rPr lang="en-US"/>
+              <a:rPr lang="en-US" dirty="0"/>
               <a:t>Third level</a:t>
             </a:r>
           </a:p>
           <a:p>
             <a:pPr lvl="3"/>
             <a:r>
-              <a:rPr lang="en-US"/>
+              <a:rPr lang="en-US" dirty="0"/>
               <a:t>Fourth level</a:t>
             </a:r>
           </a:p>
           <a:p>
             <a:pPr lvl="4"/>
             <a:r>
-              <a:rPr lang="en-US"/>
+              <a:rPr lang="en-US" dirty="0"/>
               <a:t>Fifth level</a:t>
             </a:r>
           </a:p>
@@ -1270,83 +1727,65 @@
       </p:sp>
       <p:sp>
         <p:nvSpPr>
-          <p:cNvPr id="4" name="Content Placeholder 3"/>
+          <p:cNvPr id="4" name="Content Placeholder 3">
+            <a:extLst>
+              <a:ext uri="{FF2B5EF4-FFF2-40B4-BE49-F238E27FC236}">
+                <a16:creationId xmlns:a16="http://schemas.microsoft.com/office/drawing/2014/main" id="{EAFC7A5C-C637-0C0F-84D0-C65B20B93DAB}"/>
+              </a:ext>
+            </a:extLst>
+          </p:cNvPr>
           <p:cNvSpPr>
             <a:spLocks noGrp="1"/>
           </p:cNvSpPr>
           <p:nvPr>
-            <p:ph sz="half" idx="2"/>
+            <p:ph sz="half" idx="2" hasCustomPrompt="1"/>
           </p:nvPr>
         </p:nvSpPr>
         <p:spPr>
           <a:xfrm>
-            <a:off x="4648200" y="1200151"/>
-            <a:ext cx="4038600" cy="3394472"/>
+            <a:off x="4271963" y="1200151"/>
+            <a:ext cx="3900488" cy="3171825"/>
           </a:xfrm>
         </p:spPr>
         <p:txBody>
           <a:bodyPr/>
           <a:lstStyle>
             <a:lvl1pPr>
-              <a:defRPr sz="2100"/>
+              <a:defRPr/>
             </a:lvl1pPr>
-            <a:lvl2pPr>
-              <a:defRPr sz="1800"/>
-            </a:lvl2pPr>
-            <a:lvl3pPr>
-              <a:defRPr sz="1500"/>
-            </a:lvl3pPr>
-            <a:lvl4pPr>
-              <a:defRPr sz="1350"/>
-            </a:lvl4pPr>
-            <a:lvl5pPr>
-              <a:defRPr sz="1350"/>
-            </a:lvl5pPr>
-            <a:lvl6pPr>
-              <a:defRPr sz="1350"/>
-            </a:lvl6pPr>
-            <a:lvl7pPr>
-              <a:defRPr sz="1350"/>
-            </a:lvl7pPr>
-            <a:lvl8pPr>
-              <a:defRPr sz="1350"/>
-            </a:lvl8pPr>
-            <a:lvl9pPr>
-              <a:defRPr sz="1350"/>
-            </a:lvl9pPr>
           </a:lstStyle>
           <a:p>
             <a:pPr lvl="0"/>
             <a:r>
-              <a:rPr lang="en-US"/>
-              <a:t>Click to edit Master text styles</a:t>
+              <a:rPr lang="en-US" dirty="0"/>
+              <a:t>List 2</a:t>
             </a:r>
           </a:p>
           <a:p>
             <a:pPr lvl="1"/>
             <a:r>
-              <a:rPr lang="en-US"/>
+              <a:rPr lang="en-US" dirty="0"/>
               <a:t>Second level</a:t>
             </a:r>
           </a:p>
           <a:p>
             <a:pPr lvl="2"/>
             <a:r>
-              <a:rPr lang="en-US"/>
+              <a:rPr lang="en-US" dirty="0"/>
               <a:t>Third level</a:t>
             </a:r>
           </a:p>
           <a:p>
             <a:pPr lvl="3"/>
             <a:r>
-              <a:rPr lang="en-US"/>
+              <a:rPr lang="en-US" dirty="0"/>
               <a:t>Fourth level</a:t>
             </a:r>
           </a:p>
           <a:p>
             <a:pPr lvl="4"/>
             <a:r>
-              <a:rPr lang="en-US"/>
+              <a:rPr lang="en-US" dirty="0"/>
               <a:t>Fifth level</a:t>
             </a:r>
           </a:p>
@@ -1354,7 +1793,13 @@
       </p:sp>
       <p:sp>
         <p:nvSpPr>
-          <p:cNvPr id="5" name="Date Placeholder 4"/>
+          <p:cNvPr id="5" name="Date Placeholder 4">
+            <a:extLst>
+              <a:ext uri="{FF2B5EF4-FFF2-40B4-BE49-F238E27FC236}">
+                <a16:creationId xmlns:a16="http://schemas.microsoft.com/office/drawing/2014/main" id="{7426474A-54C5-4363-7F5F-8A79ED9197D7}"/>
+              </a:ext>
+            </a:extLst>
+          </p:cNvPr>
           <p:cNvSpPr>
             <a:spLocks noGrp="1"/>
           </p:cNvSpPr>
@@ -1369,7 +1814,7 @@
           <a:p>
             <a:fld id="{241EB5C9-1307-BA42-ABA2-0BC069CD8E7F}" type="datetimeFigureOut">
               <a:rPr lang="en-US" smtClean="0"/>
-              <a:t>1/2/22</a:t>
+              <a:t>11/17/2025</a:t>
             </a:fld>
             <a:endParaRPr lang="en-US"/>
           </a:p>
@@ -1377,7 +1822,13 @@
       </p:sp>
       <p:sp>
         <p:nvSpPr>
-          <p:cNvPr id="6" name="Footer Placeholder 5"/>
+          <p:cNvPr id="6" name="Footer Placeholder 5">
+            <a:extLst>
+              <a:ext uri="{FF2B5EF4-FFF2-40B4-BE49-F238E27FC236}">
+                <a16:creationId xmlns:a16="http://schemas.microsoft.com/office/drawing/2014/main" id="{596D01FC-222C-52CD-979A-7450EBFA224D}"/>
+              </a:ext>
+            </a:extLst>
+          </p:cNvPr>
           <p:cNvSpPr>
             <a:spLocks noGrp="1"/>
           </p:cNvSpPr>
@@ -1396,7 +1847,13 @@
       </p:sp>
       <p:sp>
         <p:nvSpPr>
-          <p:cNvPr id="7" name="Slide Number Placeholder 6"/>
+          <p:cNvPr id="7" name="Slide Number Placeholder 6">
+            <a:extLst>
+              <a:ext uri="{FF2B5EF4-FFF2-40B4-BE49-F238E27FC236}">
+                <a16:creationId xmlns:a16="http://schemas.microsoft.com/office/drawing/2014/main" id="{689598F6-471D-0DE7-50D5-BCF292DCE475}"/>
+              </a:ext>
+            </a:extLst>
+          </p:cNvPr>
           <p:cNvSpPr>
             <a:spLocks noGrp="1"/>
           </p:cNvSpPr>
@@ -1417,10 +1874,153 @@
           </a:p>
         </p:txBody>
       </p:sp>
+      <p:sp>
+        <p:nvSpPr>
+          <p:cNvPr id="8" name="Rectangle 7">
+            <a:extLst>
+              <a:ext uri="{FF2B5EF4-FFF2-40B4-BE49-F238E27FC236}">
+                <a16:creationId xmlns:a16="http://schemas.microsoft.com/office/drawing/2014/main" id="{528A158D-B595-542C-25E8-626C46A16A18}"/>
+              </a:ext>
+            </a:extLst>
+          </p:cNvPr>
+          <p:cNvSpPr/>
+          <p:nvPr/>
+        </p:nvSpPr>
+        <p:spPr>
+          <a:xfrm>
+            <a:off x="8243888" y="0"/>
+            <a:ext cx="784989" cy="4300538"/>
+          </a:xfrm>
+          <a:prstGeom prst="rect">
+            <a:avLst/>
+          </a:prstGeom>
+          <a:solidFill>
+            <a:schemeClr val="accent2"/>
+          </a:solidFill>
+          <a:ln>
+            <a:noFill/>
+          </a:ln>
+        </p:spPr>
+        <p:style>
+          <a:lnRef idx="2">
+            <a:schemeClr val="accent1">
+              <a:shade val="15000"/>
+            </a:schemeClr>
+          </a:lnRef>
+          <a:fillRef idx="1">
+            <a:schemeClr val="accent1"/>
+          </a:fillRef>
+          <a:effectRef idx="0">
+            <a:schemeClr val="accent1"/>
+          </a:effectRef>
+          <a:fontRef idx="minor">
+            <a:schemeClr val="lt1"/>
+          </a:fontRef>
+        </p:style>
+        <p:txBody>
+          <a:bodyPr rtlCol="0" anchor="ctr"/>
+          <a:lstStyle/>
+          <a:p>
+            <a:pPr algn="ctr"/>
+            <a:endParaRPr lang="en-US" sz="1350"/>
+          </a:p>
+        </p:txBody>
+      </p:sp>
+      <p:sp>
+        <p:nvSpPr>
+          <p:cNvPr id="12" name="Freeform: Shape 11">
+            <a:extLst>
+              <a:ext uri="{FF2B5EF4-FFF2-40B4-BE49-F238E27FC236}">
+                <a16:creationId xmlns:a16="http://schemas.microsoft.com/office/drawing/2014/main" id="{81F5335E-4220-233B-0D6F-D2EFFDC806B5}"/>
+              </a:ext>
+            </a:extLst>
+          </p:cNvPr>
+          <p:cNvSpPr/>
+          <p:nvPr/>
+        </p:nvSpPr>
+        <p:spPr>
+          <a:xfrm>
+            <a:off x="8468139" y="70765"/>
+            <a:ext cx="560738" cy="4036581"/>
+          </a:xfrm>
+          <a:custGeom>
+            <a:avLst/>
+            <a:gdLst>
+              <a:gd name="connsiteX0" fmla="*/ 516835 w 598639"/>
+              <a:gd name="connsiteY0" fmla="*/ 0 h 5486400"/>
+              <a:gd name="connsiteX1" fmla="*/ 556591 w 598639"/>
+              <a:gd name="connsiteY1" fmla="*/ 3607904 h 5486400"/>
+              <a:gd name="connsiteX2" fmla="*/ 0 w 598639"/>
+              <a:gd name="connsiteY2" fmla="*/ 5486400 h 5486400"/>
+            </a:gdLst>
+            <a:ahLst/>
+            <a:cxnLst>
+              <a:cxn ang="0">
+                <a:pos x="connsiteX0" y="connsiteY0"/>
+              </a:cxn>
+              <a:cxn ang="0">
+                <a:pos x="connsiteX1" y="connsiteY1"/>
+              </a:cxn>
+              <a:cxn ang="0">
+                <a:pos x="connsiteX2" y="connsiteY2"/>
+              </a:cxn>
+            </a:cxnLst>
+            <a:rect l="l" t="t" r="r" b="b"/>
+            <a:pathLst>
+              <a:path w="598639" h="5486400">
+                <a:moveTo>
+                  <a:pt x="516835" y="0"/>
+                </a:moveTo>
+                <a:cubicBezTo>
+                  <a:pt x="579782" y="1346752"/>
+                  <a:pt x="642730" y="2693504"/>
+                  <a:pt x="556591" y="3607904"/>
+                </a:cubicBezTo>
+                <a:cubicBezTo>
+                  <a:pt x="470452" y="4522304"/>
+                  <a:pt x="235226" y="5004352"/>
+                  <a:pt x="0" y="5486400"/>
+                </a:cubicBezTo>
+              </a:path>
+            </a:pathLst>
+          </a:custGeom>
+          <a:noFill/>
+          <a:ln w="152400" cap="rnd">
+            <a:solidFill>
+              <a:schemeClr val="accent5"/>
+            </a:solidFill>
+            <a:prstDash val="dash"/>
+          </a:ln>
+        </p:spPr>
+        <p:style>
+          <a:lnRef idx="2">
+            <a:schemeClr val="accent1">
+              <a:shade val="15000"/>
+            </a:schemeClr>
+          </a:lnRef>
+          <a:fillRef idx="1">
+            <a:schemeClr val="accent1"/>
+          </a:fillRef>
+          <a:effectRef idx="0">
+            <a:schemeClr val="accent1"/>
+          </a:effectRef>
+          <a:fontRef idx="minor">
+            <a:schemeClr val="lt1"/>
+          </a:fontRef>
+        </p:style>
+        <p:txBody>
+          <a:bodyPr rtlCol="0" anchor="ctr"/>
+          <a:lstStyle/>
+          <a:p>
+            <a:pPr algn="ctr"/>
+            <a:endParaRPr lang="en-US" sz="1350"/>
+          </a:p>
+        </p:txBody>
+      </p:sp>
     </p:spTree>
     <p:extLst>
       <p:ext uri="{BB962C8B-B14F-4D97-AF65-F5344CB8AC3E}">
-        <p14:creationId xmlns:p14="http://schemas.microsoft.com/office/powerpoint/2010/main" val="2619886245"/>
+        <p14:creationId xmlns:p14="http://schemas.microsoft.com/office/powerpoint/2010/main" val="3690899863"/>
       </p:ext>
     </p:extLst>
   </p:cSld>
@@ -1431,7 +2031,7 @@
 </file>
 
 <file path=ppt/slideLayouts/slideLayout5.xml><?xml version="1.0" encoding="utf-8"?>
-<p:sldLayout xmlns:a="http://schemas.openxmlformats.org/drawingml/2006/main" xmlns:r="http://schemas.openxmlformats.org/officeDocument/2006/relationships" xmlns:p="http://schemas.openxmlformats.org/presentationml/2006/main" type="twoTxTwoObj" preserve="1">
+<p:sldLayout xmlns:a="http://schemas.openxmlformats.org/drawingml/2006/main" xmlns:r="http://schemas.openxmlformats.org/officeDocument/2006/relationships" xmlns:p="http://schemas.openxmlformats.org/presentationml/2006/main" preserve="1">
   <p:cSld name="Comparison">
     <p:spTree>
       <p:nvGrpSpPr>
@@ -1449,44 +2049,24 @@
       </p:grpSpPr>
       <p:sp>
         <p:nvSpPr>
-          <p:cNvPr id="2" name="Title 1"/>
+          <p:cNvPr id="3" name="Text Placeholder 2">
+            <a:extLst>
+              <a:ext uri="{FF2B5EF4-FFF2-40B4-BE49-F238E27FC236}">
+                <a16:creationId xmlns:a16="http://schemas.microsoft.com/office/drawing/2014/main" id="{8C863A39-311D-EDD0-1064-22B05135CA4D}"/>
+              </a:ext>
+            </a:extLst>
+          </p:cNvPr>
           <p:cNvSpPr>
             <a:spLocks noGrp="1"/>
           </p:cNvSpPr>
           <p:nvPr>
-            <p:ph type="title"/>
-          </p:nvPr>
-        </p:nvSpPr>
-        <p:spPr/>
-        <p:txBody>
-          <a:bodyPr/>
-          <a:lstStyle>
-            <a:lvl1pPr>
-              <a:defRPr/>
-            </a:lvl1pPr>
-          </a:lstStyle>
-          <a:p>
-            <a:r>
-              <a:rPr lang="en-US"/>
-              <a:t>Click to edit Master title style</a:t>
-            </a:r>
-          </a:p>
-        </p:txBody>
-      </p:sp>
-      <p:sp>
-        <p:nvSpPr>
-          <p:cNvPr id="3" name="Text Placeholder 2"/>
-          <p:cNvSpPr>
-            <a:spLocks noGrp="1"/>
-          </p:cNvSpPr>
-          <p:nvPr>
-            <p:ph type="body" idx="1"/>
+            <p:ph type="body" idx="1" hasCustomPrompt="1"/>
           </p:nvPr>
         </p:nvSpPr>
         <p:spPr>
           <a:xfrm>
-            <a:off x="457200" y="1151335"/>
-            <a:ext cx="4040188" cy="479822"/>
+            <a:off x="228601" y="200026"/>
+            <a:ext cx="3964781" cy="857250"/>
           </a:xfrm>
         </p:spPr>
         <p:txBody>
@@ -1532,91 +2112,73 @@
           <a:p>
             <a:pPr lvl="0"/>
             <a:r>
-              <a:rPr lang="en-US"/>
-              <a:t>Click to edit Master text styles</a:t>
+              <a:rPr lang="en-US" dirty="0"/>
+              <a:t>List Title</a:t>
             </a:r>
           </a:p>
         </p:txBody>
       </p:sp>
       <p:sp>
         <p:nvSpPr>
-          <p:cNvPr id="4" name="Content Placeholder 3"/>
+          <p:cNvPr id="4" name="Content Placeholder 3">
+            <a:extLst>
+              <a:ext uri="{FF2B5EF4-FFF2-40B4-BE49-F238E27FC236}">
+                <a16:creationId xmlns:a16="http://schemas.microsoft.com/office/drawing/2014/main" id="{5385E2FE-0F28-8067-C68F-B0DEFDB25BDD}"/>
+              </a:ext>
+            </a:extLst>
+          </p:cNvPr>
           <p:cNvSpPr>
             <a:spLocks noGrp="1"/>
           </p:cNvSpPr>
           <p:nvPr>
-            <p:ph sz="half" idx="2"/>
+            <p:ph sz="half" idx="2" hasCustomPrompt="1"/>
           </p:nvPr>
         </p:nvSpPr>
         <p:spPr>
           <a:xfrm>
-            <a:off x="457200" y="1631156"/>
-            <a:ext cx="4040188" cy="2963466"/>
+            <a:off x="228601" y="1200150"/>
+            <a:ext cx="3964781" cy="3171825"/>
           </a:xfrm>
         </p:spPr>
         <p:txBody>
           <a:bodyPr/>
           <a:lstStyle>
             <a:lvl1pPr>
-              <a:defRPr sz="1800"/>
+              <a:defRPr/>
             </a:lvl1pPr>
-            <a:lvl2pPr>
-              <a:defRPr sz="1500"/>
-            </a:lvl2pPr>
-            <a:lvl3pPr>
-              <a:defRPr sz="1350"/>
-            </a:lvl3pPr>
-            <a:lvl4pPr>
-              <a:defRPr sz="1200"/>
-            </a:lvl4pPr>
-            <a:lvl5pPr>
-              <a:defRPr sz="1200"/>
-            </a:lvl5pPr>
-            <a:lvl6pPr>
-              <a:defRPr sz="1200"/>
-            </a:lvl6pPr>
-            <a:lvl7pPr>
-              <a:defRPr sz="1200"/>
-            </a:lvl7pPr>
-            <a:lvl8pPr>
-              <a:defRPr sz="1200"/>
-            </a:lvl8pPr>
-            <a:lvl9pPr>
-              <a:defRPr sz="1200"/>
-            </a:lvl9pPr>
           </a:lstStyle>
           <a:p>
             <a:pPr lvl="0"/>
             <a:r>
-              <a:rPr lang="en-US"/>
-              <a:t>Click to edit Master text styles</a:t>
+              <a:rPr lang="en-US" dirty="0"/>
+              <a:t>Main Text</a:t>
             </a:r>
           </a:p>
           <a:p>
             <a:pPr lvl="1"/>
             <a:r>
-              <a:rPr lang="en-US"/>
+              <a:rPr lang="en-US" dirty="0"/>
               <a:t>Second level</a:t>
             </a:r>
           </a:p>
           <a:p>
             <a:pPr lvl="2"/>
             <a:r>
-              <a:rPr lang="en-US"/>
+              <a:rPr lang="en-US" dirty="0"/>
               <a:t>Third level</a:t>
             </a:r>
           </a:p>
           <a:p>
             <a:pPr lvl="3"/>
             <a:r>
-              <a:rPr lang="en-US"/>
+              <a:rPr lang="en-US" dirty="0"/>
               <a:t>Fourth level</a:t>
             </a:r>
           </a:p>
           <a:p>
             <a:pPr lvl="4"/>
             <a:r>
-              <a:rPr lang="en-US"/>
+              <a:rPr lang="en-US" dirty="0"/>
               <a:t>Fifth level</a:t>
             </a:r>
           </a:p>
@@ -1624,18 +2186,24 @@
       </p:sp>
       <p:sp>
         <p:nvSpPr>
-          <p:cNvPr id="5" name="Text Placeholder 4"/>
+          <p:cNvPr id="5" name="Text Placeholder 4">
+            <a:extLst>
+              <a:ext uri="{FF2B5EF4-FFF2-40B4-BE49-F238E27FC236}">
+                <a16:creationId xmlns:a16="http://schemas.microsoft.com/office/drawing/2014/main" id="{BE830E3E-149F-5466-CF77-6210714A454F}"/>
+              </a:ext>
+            </a:extLst>
+          </p:cNvPr>
           <p:cNvSpPr>
             <a:spLocks noGrp="1"/>
           </p:cNvSpPr>
           <p:nvPr>
-            <p:ph type="body" sz="quarter" idx="3"/>
+            <p:ph type="body" sz="quarter" idx="3" hasCustomPrompt="1"/>
           </p:nvPr>
         </p:nvSpPr>
         <p:spPr>
           <a:xfrm>
-            <a:off x="4645026" y="1151335"/>
-            <a:ext cx="4041775" cy="479822"/>
+            <a:off x="4207669" y="200027"/>
+            <a:ext cx="3964781" cy="857250"/>
           </a:xfrm>
         </p:spPr>
         <p:txBody>
@@ -1681,91 +2249,73 @@
           <a:p>
             <a:pPr lvl="0"/>
             <a:r>
-              <a:rPr lang="en-US"/>
-              <a:t>Click to edit Master text styles</a:t>
+              <a:rPr lang="en-US" dirty="0"/>
+              <a:t>List Title</a:t>
             </a:r>
           </a:p>
         </p:txBody>
       </p:sp>
       <p:sp>
         <p:nvSpPr>
-          <p:cNvPr id="6" name="Content Placeholder 5"/>
+          <p:cNvPr id="6" name="Content Placeholder 5">
+            <a:extLst>
+              <a:ext uri="{FF2B5EF4-FFF2-40B4-BE49-F238E27FC236}">
+                <a16:creationId xmlns:a16="http://schemas.microsoft.com/office/drawing/2014/main" id="{B4562B61-410C-BE66-21BC-D4DDE5464288}"/>
+              </a:ext>
+            </a:extLst>
+          </p:cNvPr>
           <p:cNvSpPr>
             <a:spLocks noGrp="1"/>
           </p:cNvSpPr>
           <p:nvPr>
-            <p:ph sz="quarter" idx="4"/>
+            <p:ph sz="quarter" idx="4" hasCustomPrompt="1"/>
           </p:nvPr>
         </p:nvSpPr>
         <p:spPr>
           <a:xfrm>
-            <a:off x="4645026" y="1631156"/>
-            <a:ext cx="4041775" cy="2963466"/>
+            <a:off x="4207669" y="1200150"/>
+            <a:ext cx="3964781" cy="3171825"/>
           </a:xfrm>
         </p:spPr>
         <p:txBody>
           <a:bodyPr/>
           <a:lstStyle>
             <a:lvl1pPr>
-              <a:defRPr sz="1800"/>
+              <a:defRPr/>
             </a:lvl1pPr>
-            <a:lvl2pPr>
-              <a:defRPr sz="1500"/>
-            </a:lvl2pPr>
-            <a:lvl3pPr>
-              <a:defRPr sz="1350"/>
-            </a:lvl3pPr>
-            <a:lvl4pPr>
-              <a:defRPr sz="1200"/>
-            </a:lvl4pPr>
-            <a:lvl5pPr>
-              <a:defRPr sz="1200"/>
-            </a:lvl5pPr>
-            <a:lvl6pPr>
-              <a:defRPr sz="1200"/>
-            </a:lvl6pPr>
-            <a:lvl7pPr>
-              <a:defRPr sz="1200"/>
-            </a:lvl7pPr>
-            <a:lvl8pPr>
-              <a:defRPr sz="1200"/>
-            </a:lvl8pPr>
-            <a:lvl9pPr>
-              <a:defRPr sz="1200"/>
-            </a:lvl9pPr>
           </a:lstStyle>
           <a:p>
             <a:pPr lvl="0"/>
             <a:r>
-              <a:rPr lang="en-US"/>
-              <a:t>Click to edit Master text styles</a:t>
+              <a:rPr lang="en-US" dirty="0"/>
+              <a:t>Main Text</a:t>
             </a:r>
           </a:p>
           <a:p>
             <a:pPr lvl="1"/>
             <a:r>
-              <a:rPr lang="en-US"/>
+              <a:rPr lang="en-US" dirty="0"/>
               <a:t>Second level</a:t>
             </a:r>
           </a:p>
           <a:p>
             <a:pPr lvl="2"/>
             <a:r>
-              <a:rPr lang="en-US"/>
+              <a:rPr lang="en-US" dirty="0"/>
               <a:t>Third level</a:t>
             </a:r>
           </a:p>
           <a:p>
             <a:pPr lvl="3"/>
             <a:r>
-              <a:rPr lang="en-US"/>
+              <a:rPr lang="en-US" dirty="0"/>
               <a:t>Fourth level</a:t>
             </a:r>
           </a:p>
           <a:p>
             <a:pPr lvl="4"/>
             <a:r>
-              <a:rPr lang="en-US"/>
+              <a:rPr lang="en-US" dirty="0"/>
               <a:t>Fifth level</a:t>
             </a:r>
           </a:p>
@@ -1773,7 +2323,13 @@
       </p:sp>
       <p:sp>
         <p:nvSpPr>
-          <p:cNvPr id="7" name="Date Placeholder 6"/>
+          <p:cNvPr id="7" name="Date Placeholder 6">
+            <a:extLst>
+              <a:ext uri="{FF2B5EF4-FFF2-40B4-BE49-F238E27FC236}">
+                <a16:creationId xmlns:a16="http://schemas.microsoft.com/office/drawing/2014/main" id="{EA9F675C-1731-C865-448A-DF71EB5FC983}"/>
+              </a:ext>
+            </a:extLst>
+          </p:cNvPr>
           <p:cNvSpPr>
             <a:spLocks noGrp="1"/>
           </p:cNvSpPr>
@@ -1788,7 +2344,7 @@
           <a:p>
             <a:fld id="{241EB5C9-1307-BA42-ABA2-0BC069CD8E7F}" type="datetimeFigureOut">
               <a:rPr lang="en-US" smtClean="0"/>
-              <a:t>1/2/22</a:t>
+              <a:t>11/17/2025</a:t>
             </a:fld>
             <a:endParaRPr lang="en-US"/>
           </a:p>
@@ -1796,7 +2352,13 @@
       </p:sp>
       <p:sp>
         <p:nvSpPr>
-          <p:cNvPr id="8" name="Footer Placeholder 7"/>
+          <p:cNvPr id="8" name="Footer Placeholder 7">
+            <a:extLst>
+              <a:ext uri="{FF2B5EF4-FFF2-40B4-BE49-F238E27FC236}">
+                <a16:creationId xmlns:a16="http://schemas.microsoft.com/office/drawing/2014/main" id="{725BBB28-D9B5-0C7D-EE33-F73D55EAD7F4}"/>
+              </a:ext>
+            </a:extLst>
+          </p:cNvPr>
           <p:cNvSpPr>
             <a:spLocks noGrp="1"/>
           </p:cNvSpPr>
@@ -1815,7 +2377,13 @@
       </p:sp>
       <p:sp>
         <p:nvSpPr>
-          <p:cNvPr id="9" name="Slide Number Placeholder 8"/>
+          <p:cNvPr id="9" name="Slide Number Placeholder 8">
+            <a:extLst>
+              <a:ext uri="{FF2B5EF4-FFF2-40B4-BE49-F238E27FC236}">
+                <a16:creationId xmlns:a16="http://schemas.microsoft.com/office/drawing/2014/main" id="{0DD5C3C0-4B56-7E44-1C3F-40A2FF97277B}"/>
+              </a:ext>
+            </a:extLst>
+          </p:cNvPr>
           <p:cNvSpPr>
             <a:spLocks noGrp="1"/>
           </p:cNvSpPr>
@@ -1836,10 +2404,153 @@
           </a:p>
         </p:txBody>
       </p:sp>
+      <p:sp>
+        <p:nvSpPr>
+          <p:cNvPr id="11" name="Rectangle 10">
+            <a:extLst>
+              <a:ext uri="{FF2B5EF4-FFF2-40B4-BE49-F238E27FC236}">
+                <a16:creationId xmlns:a16="http://schemas.microsoft.com/office/drawing/2014/main" id="{2A370E64-30CF-B169-B400-FD27A117DF2E}"/>
+              </a:ext>
+            </a:extLst>
+          </p:cNvPr>
+          <p:cNvSpPr/>
+          <p:nvPr/>
+        </p:nvSpPr>
+        <p:spPr>
+          <a:xfrm>
+            <a:off x="8243888" y="0"/>
+            <a:ext cx="784989" cy="4300538"/>
+          </a:xfrm>
+          <a:prstGeom prst="rect">
+            <a:avLst/>
+          </a:prstGeom>
+          <a:solidFill>
+            <a:schemeClr val="accent3"/>
+          </a:solidFill>
+          <a:ln>
+            <a:noFill/>
+          </a:ln>
+        </p:spPr>
+        <p:style>
+          <a:lnRef idx="2">
+            <a:schemeClr val="accent1">
+              <a:shade val="15000"/>
+            </a:schemeClr>
+          </a:lnRef>
+          <a:fillRef idx="1">
+            <a:schemeClr val="accent1"/>
+          </a:fillRef>
+          <a:effectRef idx="0">
+            <a:schemeClr val="accent1"/>
+          </a:effectRef>
+          <a:fontRef idx="minor">
+            <a:schemeClr val="lt1"/>
+          </a:fontRef>
+        </p:style>
+        <p:txBody>
+          <a:bodyPr rtlCol="0" anchor="ctr"/>
+          <a:lstStyle/>
+          <a:p>
+            <a:pPr algn="ctr"/>
+            <a:endParaRPr lang="en-US" sz="1350"/>
+          </a:p>
+        </p:txBody>
+      </p:sp>
+      <p:sp>
+        <p:nvSpPr>
+          <p:cNvPr id="13" name="Freeform: Shape 12">
+            <a:extLst>
+              <a:ext uri="{FF2B5EF4-FFF2-40B4-BE49-F238E27FC236}">
+                <a16:creationId xmlns:a16="http://schemas.microsoft.com/office/drawing/2014/main" id="{E647216B-3CAC-1A13-29DF-7D88BE439849}"/>
+              </a:ext>
+            </a:extLst>
+          </p:cNvPr>
+          <p:cNvSpPr/>
+          <p:nvPr/>
+        </p:nvSpPr>
+        <p:spPr>
+          <a:xfrm>
+            <a:off x="8468139" y="70765"/>
+            <a:ext cx="560738" cy="4036581"/>
+          </a:xfrm>
+          <a:custGeom>
+            <a:avLst/>
+            <a:gdLst>
+              <a:gd name="connsiteX0" fmla="*/ 516835 w 598639"/>
+              <a:gd name="connsiteY0" fmla="*/ 0 h 5486400"/>
+              <a:gd name="connsiteX1" fmla="*/ 556591 w 598639"/>
+              <a:gd name="connsiteY1" fmla="*/ 3607904 h 5486400"/>
+              <a:gd name="connsiteX2" fmla="*/ 0 w 598639"/>
+              <a:gd name="connsiteY2" fmla="*/ 5486400 h 5486400"/>
+            </a:gdLst>
+            <a:ahLst/>
+            <a:cxnLst>
+              <a:cxn ang="0">
+                <a:pos x="connsiteX0" y="connsiteY0"/>
+              </a:cxn>
+              <a:cxn ang="0">
+                <a:pos x="connsiteX1" y="connsiteY1"/>
+              </a:cxn>
+              <a:cxn ang="0">
+                <a:pos x="connsiteX2" y="connsiteY2"/>
+              </a:cxn>
+            </a:cxnLst>
+            <a:rect l="l" t="t" r="r" b="b"/>
+            <a:pathLst>
+              <a:path w="598639" h="5486400">
+                <a:moveTo>
+                  <a:pt x="516835" y="0"/>
+                </a:moveTo>
+                <a:cubicBezTo>
+                  <a:pt x="579782" y="1346752"/>
+                  <a:pt x="642730" y="2693504"/>
+                  <a:pt x="556591" y="3607904"/>
+                </a:cubicBezTo>
+                <a:cubicBezTo>
+                  <a:pt x="470452" y="4522304"/>
+                  <a:pt x="235226" y="5004352"/>
+                  <a:pt x="0" y="5486400"/>
+                </a:cubicBezTo>
+              </a:path>
+            </a:pathLst>
+          </a:custGeom>
+          <a:noFill/>
+          <a:ln w="152400" cap="rnd">
+            <a:solidFill>
+              <a:schemeClr val="accent1"/>
+            </a:solidFill>
+            <a:prstDash val="dash"/>
+          </a:ln>
+        </p:spPr>
+        <p:style>
+          <a:lnRef idx="2">
+            <a:schemeClr val="accent1">
+              <a:shade val="15000"/>
+            </a:schemeClr>
+          </a:lnRef>
+          <a:fillRef idx="1">
+            <a:schemeClr val="accent1"/>
+          </a:fillRef>
+          <a:effectRef idx="0">
+            <a:schemeClr val="accent1"/>
+          </a:effectRef>
+          <a:fontRef idx="minor">
+            <a:schemeClr val="lt1"/>
+          </a:fontRef>
+        </p:style>
+        <p:txBody>
+          <a:bodyPr rtlCol="0" anchor="ctr"/>
+          <a:lstStyle/>
+          <a:p>
+            <a:pPr algn="ctr"/>
+            <a:endParaRPr lang="en-US" sz="1350"/>
+          </a:p>
+        </p:txBody>
+      </p:sp>
     </p:spTree>
     <p:extLst>
       <p:ext uri="{BB962C8B-B14F-4D97-AF65-F5344CB8AC3E}">
-        <p14:creationId xmlns:p14="http://schemas.microsoft.com/office/powerpoint/2010/main" val="2535793967"/>
+        <p14:creationId xmlns:p14="http://schemas.microsoft.com/office/powerpoint/2010/main" val="1829085580"/>
       </p:ext>
     </p:extLst>
   </p:cSld>
@@ -1850,8 +2561,8 @@
 </file>
 
 <file path=ppt/slideLayouts/slideLayout6.xml><?xml version="1.0" encoding="utf-8"?>
-<p:sldLayout xmlns:a="http://schemas.openxmlformats.org/drawingml/2006/main" xmlns:r="http://schemas.openxmlformats.org/officeDocument/2006/relationships" xmlns:p="http://schemas.openxmlformats.org/presentationml/2006/main" type="titleOnly" preserve="1">
-  <p:cSld name="Title Only">
+<p:sldLayout xmlns:a="http://schemas.openxmlformats.org/drawingml/2006/main" xmlns:r="http://schemas.openxmlformats.org/officeDocument/2006/relationships" xmlns:p="http://schemas.openxmlformats.org/presentationml/2006/main" type="blank" preserve="1">
+  <p:cSld name="Blank">
     <p:spTree>
       <p:nvGrpSpPr>
         <p:cNvPr id="1" name=""/>
@@ -1868,29 +2579,13 @@
       </p:grpSpPr>
       <p:sp>
         <p:nvSpPr>
-          <p:cNvPr id="2" name="Title 1"/>
-          <p:cNvSpPr>
-            <a:spLocks noGrp="1"/>
-          </p:cNvSpPr>
-          <p:nvPr>
-            <p:ph type="title"/>
-          </p:nvPr>
-        </p:nvSpPr>
-        <p:spPr/>
-        <p:txBody>
-          <a:bodyPr/>
-          <a:lstStyle/>
-          <a:p>
-            <a:r>
-              <a:rPr lang="en-US"/>
-              <a:t>Click to edit Master title style</a:t>
-            </a:r>
-          </a:p>
-        </p:txBody>
-      </p:sp>
-      <p:sp>
-        <p:nvSpPr>
-          <p:cNvPr id="3" name="Date Placeholder 2"/>
+          <p:cNvPr id="2" name="Date Placeholder 1">
+            <a:extLst>
+              <a:ext uri="{FF2B5EF4-FFF2-40B4-BE49-F238E27FC236}">
+                <a16:creationId xmlns:a16="http://schemas.microsoft.com/office/drawing/2014/main" id="{1E135FF1-EA2D-3150-E8C2-F2D7500C1DD9}"/>
+              </a:ext>
+            </a:extLst>
+          </p:cNvPr>
           <p:cNvSpPr>
             <a:spLocks noGrp="1"/>
           </p:cNvSpPr>
@@ -1905,7 +2600,7 @@
           <a:p>
             <a:fld id="{241EB5C9-1307-BA42-ABA2-0BC069CD8E7F}" type="datetimeFigureOut">
               <a:rPr lang="en-US" smtClean="0"/>
-              <a:t>1/2/22</a:t>
+              <a:t>11/17/2025</a:t>
             </a:fld>
             <a:endParaRPr lang="en-US"/>
           </a:p>
@@ -1913,7 +2608,13 @@
       </p:sp>
       <p:sp>
         <p:nvSpPr>
-          <p:cNvPr id="4" name="Footer Placeholder 3"/>
+          <p:cNvPr id="3" name="Footer Placeholder 2">
+            <a:extLst>
+              <a:ext uri="{FF2B5EF4-FFF2-40B4-BE49-F238E27FC236}">
+                <a16:creationId xmlns:a16="http://schemas.microsoft.com/office/drawing/2014/main" id="{B04523D5-449C-E93F-40F2-67755A60279C}"/>
+              </a:ext>
+            </a:extLst>
+          </p:cNvPr>
           <p:cNvSpPr>
             <a:spLocks noGrp="1"/>
           </p:cNvSpPr>
@@ -1932,7 +2633,13 @@
       </p:sp>
       <p:sp>
         <p:nvSpPr>
-          <p:cNvPr id="5" name="Slide Number Placeholder 4"/>
+          <p:cNvPr id="4" name="Slide Number Placeholder 3">
+            <a:extLst>
+              <a:ext uri="{FF2B5EF4-FFF2-40B4-BE49-F238E27FC236}">
+                <a16:creationId xmlns:a16="http://schemas.microsoft.com/office/drawing/2014/main" id="{896A4E59-6B95-9836-A2EF-BD7CD9F608E0}"/>
+              </a:ext>
+            </a:extLst>
+          </p:cNvPr>
           <p:cNvSpPr>
             <a:spLocks noGrp="1"/>
           </p:cNvSpPr>
@@ -1953,10 +2660,54 @@
           </a:p>
         </p:txBody>
       </p:sp>
+      <p:cxnSp>
+        <p:nvCxnSpPr>
+          <p:cNvPr id="6" name="Straight Connector 5">
+            <a:extLst>
+              <a:ext uri="{FF2B5EF4-FFF2-40B4-BE49-F238E27FC236}">
+                <a16:creationId xmlns:a16="http://schemas.microsoft.com/office/drawing/2014/main" id="{5C98B9CA-0B23-6657-F0CF-DEE47DA2A1B4}"/>
+              </a:ext>
+            </a:extLst>
+          </p:cNvPr>
+          <p:cNvCxnSpPr>
+            <a:cxnSpLocks/>
+          </p:cNvCxnSpPr>
+          <p:nvPr/>
+        </p:nvCxnSpPr>
+        <p:spPr>
+          <a:xfrm>
+            <a:off x="1729408" y="4600575"/>
+            <a:ext cx="7414592" cy="0"/>
+          </a:xfrm>
+          <a:prstGeom prst="line">
+            <a:avLst/>
+          </a:prstGeom>
+          <a:ln w="152400" cap="rnd">
+            <a:solidFill>
+              <a:schemeClr val="accent1"/>
+            </a:solidFill>
+            <a:prstDash val="dash"/>
+          </a:ln>
+        </p:spPr>
+        <p:style>
+          <a:lnRef idx="2">
+            <a:schemeClr val="accent1"/>
+          </a:lnRef>
+          <a:fillRef idx="0">
+            <a:schemeClr val="accent1"/>
+          </a:fillRef>
+          <a:effectRef idx="1">
+            <a:schemeClr val="accent1"/>
+          </a:effectRef>
+          <a:fontRef idx="minor">
+            <a:schemeClr val="tx1"/>
+          </a:fontRef>
+        </p:style>
+      </p:cxnSp>
     </p:spTree>
     <p:extLst>
       <p:ext uri="{BB962C8B-B14F-4D97-AF65-F5344CB8AC3E}">
-        <p14:creationId xmlns:p14="http://schemas.microsoft.com/office/powerpoint/2010/main" val="3472721253"/>
+        <p14:creationId xmlns:p14="http://schemas.microsoft.com/office/powerpoint/2010/main" val="1779000984"/>
       </p:ext>
     </p:extLst>
   </p:cSld>
@@ -1967,8 +2718,8 @@
 </file>
 
 <file path=ppt/slideLayouts/slideLayout7.xml><?xml version="1.0" encoding="utf-8"?>
-<p:sldLayout xmlns:a="http://schemas.openxmlformats.org/drawingml/2006/main" xmlns:r="http://schemas.openxmlformats.org/officeDocument/2006/relationships" xmlns:p="http://schemas.openxmlformats.org/presentationml/2006/main" type="blank" preserve="1">
-  <p:cSld name="Blank">
+<p:sldLayout xmlns:a="http://schemas.openxmlformats.org/drawingml/2006/main" xmlns:r="http://schemas.openxmlformats.org/officeDocument/2006/relationships" xmlns:p="http://schemas.openxmlformats.org/presentationml/2006/main" type="objTx" preserve="1">
+  <p:cSld name="Content with Caption">
     <p:spTree>
       <p:nvGrpSpPr>
         <p:cNvPr id="1" name=""/>
@@ -1985,7 +2736,211 @@
       </p:grpSpPr>
       <p:sp>
         <p:nvSpPr>
-          <p:cNvPr id="2" name="Date Placeholder 1"/>
+          <p:cNvPr id="2" name="Title 1">
+            <a:extLst>
+              <a:ext uri="{FF2B5EF4-FFF2-40B4-BE49-F238E27FC236}">
+                <a16:creationId xmlns:a16="http://schemas.microsoft.com/office/drawing/2014/main" id="{72E9FA3F-0910-D16A-A913-DC177EE30D21}"/>
+              </a:ext>
+            </a:extLst>
+          </p:cNvPr>
+          <p:cNvSpPr>
+            <a:spLocks noGrp="1"/>
+          </p:cNvSpPr>
+          <p:nvPr>
+            <p:ph type="title" hasCustomPrompt="1"/>
+          </p:nvPr>
+        </p:nvSpPr>
+        <p:spPr>
+          <a:xfrm>
+            <a:off x="228600" y="200025"/>
+            <a:ext cx="3350419" cy="857250"/>
+          </a:xfrm>
+        </p:spPr>
+        <p:txBody>
+          <a:bodyPr anchor="b"/>
+          <a:lstStyle>
+            <a:lvl1pPr>
+              <a:defRPr sz="2400"/>
+            </a:lvl1pPr>
+          </a:lstStyle>
+          <a:p>
+            <a:r>
+              <a:rPr lang="en-US" dirty="0"/>
+              <a:t>Slide Title</a:t>
+            </a:r>
+          </a:p>
+        </p:txBody>
+      </p:sp>
+      <p:sp>
+        <p:nvSpPr>
+          <p:cNvPr id="3" name="Content Placeholder 2">
+            <a:extLst>
+              <a:ext uri="{FF2B5EF4-FFF2-40B4-BE49-F238E27FC236}">
+                <a16:creationId xmlns:a16="http://schemas.microsoft.com/office/drawing/2014/main" id="{0A1AC1A9-99B2-6D1E-7DAB-0A95CA0595C9}"/>
+              </a:ext>
+            </a:extLst>
+          </p:cNvPr>
+          <p:cNvSpPr>
+            <a:spLocks noGrp="1"/>
+          </p:cNvSpPr>
+          <p:nvPr>
+            <p:ph idx="1" hasCustomPrompt="1"/>
+          </p:nvPr>
+        </p:nvSpPr>
+        <p:spPr>
+          <a:xfrm>
+            <a:off x="3887391" y="200026"/>
+            <a:ext cx="4285059" cy="4195763"/>
+          </a:xfrm>
+        </p:spPr>
+        <p:txBody>
+          <a:bodyPr/>
+          <a:lstStyle>
+            <a:lvl1pPr>
+              <a:defRPr sz="2400"/>
+            </a:lvl1pPr>
+            <a:lvl2pPr>
+              <a:defRPr sz="2100"/>
+            </a:lvl2pPr>
+            <a:lvl3pPr>
+              <a:defRPr sz="1800"/>
+            </a:lvl3pPr>
+            <a:lvl4pPr>
+              <a:defRPr sz="1500"/>
+            </a:lvl4pPr>
+            <a:lvl5pPr>
+              <a:defRPr sz="1500"/>
+            </a:lvl5pPr>
+            <a:lvl6pPr>
+              <a:defRPr sz="1500"/>
+            </a:lvl6pPr>
+            <a:lvl7pPr>
+              <a:defRPr sz="1500"/>
+            </a:lvl7pPr>
+            <a:lvl8pPr>
+              <a:defRPr sz="1500"/>
+            </a:lvl8pPr>
+            <a:lvl9pPr>
+              <a:defRPr sz="1500"/>
+            </a:lvl9pPr>
+          </a:lstStyle>
+          <a:p>
+            <a:pPr lvl="0"/>
+            <a:r>
+              <a:rPr lang="en-US" dirty="0"/>
+              <a:t>Main Text</a:t>
+            </a:r>
+          </a:p>
+          <a:p>
+            <a:pPr lvl="1"/>
+            <a:r>
+              <a:rPr lang="en-US" dirty="0"/>
+              <a:t>Second level</a:t>
+            </a:r>
+          </a:p>
+          <a:p>
+            <a:pPr lvl="2"/>
+            <a:r>
+              <a:rPr lang="en-US" dirty="0"/>
+              <a:t>Third level</a:t>
+            </a:r>
+          </a:p>
+          <a:p>
+            <a:pPr lvl="3"/>
+            <a:r>
+              <a:rPr lang="en-US" dirty="0"/>
+              <a:t>Fourth level</a:t>
+            </a:r>
+          </a:p>
+          <a:p>
+            <a:pPr lvl="4"/>
+            <a:r>
+              <a:rPr lang="en-US" dirty="0"/>
+              <a:t>Fifth level</a:t>
+            </a:r>
+          </a:p>
+        </p:txBody>
+      </p:sp>
+      <p:sp>
+        <p:nvSpPr>
+          <p:cNvPr id="4" name="Text Placeholder 3">
+            <a:extLst>
+              <a:ext uri="{FF2B5EF4-FFF2-40B4-BE49-F238E27FC236}">
+                <a16:creationId xmlns:a16="http://schemas.microsoft.com/office/drawing/2014/main" id="{898FAA3D-BBAF-D97F-3C0A-EB2F8D0B8BF9}"/>
+              </a:ext>
+            </a:extLst>
+          </p:cNvPr>
+          <p:cNvSpPr>
+            <a:spLocks noGrp="1"/>
+          </p:cNvSpPr>
+          <p:nvPr>
+            <p:ph type="body" sz="half" idx="2" hasCustomPrompt="1"/>
+          </p:nvPr>
+        </p:nvSpPr>
+        <p:spPr>
+          <a:xfrm>
+            <a:off x="228600" y="1200150"/>
+            <a:ext cx="3350419" cy="3201591"/>
+          </a:xfrm>
+        </p:spPr>
+        <p:txBody>
+          <a:bodyPr/>
+          <a:lstStyle>
+            <a:lvl1pPr marL="0" indent="0">
+              <a:buNone/>
+              <a:defRPr sz="1200"/>
+            </a:lvl1pPr>
+            <a:lvl2pPr marL="342900" indent="0">
+              <a:buNone/>
+              <a:defRPr sz="1050"/>
+            </a:lvl2pPr>
+            <a:lvl3pPr marL="685800" indent="0">
+              <a:buNone/>
+              <a:defRPr sz="900"/>
+            </a:lvl3pPr>
+            <a:lvl4pPr marL="1028700" indent="0">
+              <a:buNone/>
+              <a:defRPr sz="750"/>
+            </a:lvl4pPr>
+            <a:lvl5pPr marL="1371600" indent="0">
+              <a:buNone/>
+              <a:defRPr sz="750"/>
+            </a:lvl5pPr>
+            <a:lvl6pPr marL="1714500" indent="0">
+              <a:buNone/>
+              <a:defRPr sz="750"/>
+            </a:lvl6pPr>
+            <a:lvl7pPr marL="2057400" indent="0">
+              <a:buNone/>
+              <a:defRPr sz="750"/>
+            </a:lvl7pPr>
+            <a:lvl8pPr marL="2400300" indent="0">
+              <a:buNone/>
+              <a:defRPr sz="750"/>
+            </a:lvl8pPr>
+            <a:lvl9pPr marL="2743200" indent="0">
+              <a:buNone/>
+              <a:defRPr sz="750"/>
+            </a:lvl9pPr>
+          </a:lstStyle>
+          <a:p>
+            <a:pPr lvl="0"/>
+            <a:r>
+              <a:rPr lang="en-US" dirty="0"/>
+              <a:t>Text</a:t>
+            </a:r>
+          </a:p>
+        </p:txBody>
+      </p:sp>
+      <p:sp>
+        <p:nvSpPr>
+          <p:cNvPr id="5" name="Date Placeholder 4">
+            <a:extLst>
+              <a:ext uri="{FF2B5EF4-FFF2-40B4-BE49-F238E27FC236}">
+                <a16:creationId xmlns:a16="http://schemas.microsoft.com/office/drawing/2014/main" id="{30B46386-E505-E119-1B25-236D4089CF6D}"/>
+              </a:ext>
+            </a:extLst>
+          </p:cNvPr>
           <p:cNvSpPr>
             <a:spLocks noGrp="1"/>
           </p:cNvSpPr>
@@ -2000,7 +2955,7 @@
           <a:p>
             <a:fld id="{241EB5C9-1307-BA42-ABA2-0BC069CD8E7F}" type="datetimeFigureOut">
               <a:rPr lang="en-US" smtClean="0"/>
-              <a:t>1/2/22</a:t>
+              <a:t>11/17/2025</a:t>
             </a:fld>
             <a:endParaRPr lang="en-US"/>
           </a:p>
@@ -2008,7 +2963,13 @@
       </p:sp>
       <p:sp>
         <p:nvSpPr>
-          <p:cNvPr id="3" name="Footer Placeholder 2"/>
+          <p:cNvPr id="6" name="Footer Placeholder 5">
+            <a:extLst>
+              <a:ext uri="{FF2B5EF4-FFF2-40B4-BE49-F238E27FC236}">
+                <a16:creationId xmlns:a16="http://schemas.microsoft.com/office/drawing/2014/main" id="{5234CEF2-8E6A-6F3D-54B5-CF22A4D4CD58}"/>
+              </a:ext>
+            </a:extLst>
+          </p:cNvPr>
           <p:cNvSpPr>
             <a:spLocks noGrp="1"/>
           </p:cNvSpPr>
@@ -2027,7 +2988,13 @@
       </p:sp>
       <p:sp>
         <p:nvSpPr>
-          <p:cNvPr id="4" name="Slide Number Placeholder 3"/>
+          <p:cNvPr id="7" name="Slide Number Placeholder 6">
+            <a:extLst>
+              <a:ext uri="{FF2B5EF4-FFF2-40B4-BE49-F238E27FC236}">
+                <a16:creationId xmlns:a16="http://schemas.microsoft.com/office/drawing/2014/main" id="{A7D53A72-219E-40D7-3E04-972B310ED99C}"/>
+              </a:ext>
+            </a:extLst>
+          </p:cNvPr>
           <p:cNvSpPr>
             <a:spLocks noGrp="1"/>
           </p:cNvSpPr>
@@ -2048,10 +3015,54 @@
           </a:p>
         </p:txBody>
       </p:sp>
+      <p:cxnSp>
+        <p:nvCxnSpPr>
+          <p:cNvPr id="9" name="Straight Connector 8">
+            <a:extLst>
+              <a:ext uri="{FF2B5EF4-FFF2-40B4-BE49-F238E27FC236}">
+                <a16:creationId xmlns:a16="http://schemas.microsoft.com/office/drawing/2014/main" id="{6B16039B-BAC2-5B3A-226D-EE8C5EDD1DD0}"/>
+              </a:ext>
+            </a:extLst>
+          </p:cNvPr>
+          <p:cNvCxnSpPr>
+            <a:cxnSpLocks/>
+          </p:cNvCxnSpPr>
+          <p:nvPr/>
+        </p:nvCxnSpPr>
+        <p:spPr>
+          <a:xfrm>
+            <a:off x="1729408" y="4600575"/>
+            <a:ext cx="7414592" cy="0"/>
+          </a:xfrm>
+          <a:prstGeom prst="line">
+            <a:avLst/>
+          </a:prstGeom>
+          <a:ln w="152400" cap="rnd">
+            <a:solidFill>
+              <a:schemeClr val="accent3"/>
+            </a:solidFill>
+            <a:prstDash val="dash"/>
+          </a:ln>
+        </p:spPr>
+        <p:style>
+          <a:lnRef idx="2">
+            <a:schemeClr val="accent1"/>
+          </a:lnRef>
+          <a:fillRef idx="0">
+            <a:schemeClr val="accent1"/>
+          </a:fillRef>
+          <a:effectRef idx="1">
+            <a:schemeClr val="accent1"/>
+          </a:effectRef>
+          <a:fontRef idx="minor">
+            <a:schemeClr val="tx1"/>
+          </a:fontRef>
+        </p:style>
+      </p:cxnSp>
     </p:spTree>
     <p:extLst>
       <p:ext uri="{BB962C8B-B14F-4D97-AF65-F5344CB8AC3E}">
-        <p14:creationId xmlns:p14="http://schemas.microsoft.com/office/powerpoint/2010/main" val="2130901097"/>
+        <p14:creationId xmlns:p14="http://schemas.microsoft.com/office/powerpoint/2010/main" val="2360471511"/>
       </p:ext>
     </p:extLst>
   </p:cSld>
@@ -2592,9 +3603,12 @@
 <p:sldMaster xmlns:a="http://schemas.openxmlformats.org/drawingml/2006/main" xmlns:p="http://schemas.openxmlformats.org/presentationml/2006/main" xmlns:r="http://schemas.openxmlformats.org/officeDocument/2006/relationships">
   <p:cSld>
     <p:bg>
-      <p:bgRef idx="1001">
-        <a:schemeClr val="bg1"/>
-      </p:bgRef>
+      <p:bgPr>
+        <a:solidFill>
+          <a:schemeClr val="bg1"/>
+        </a:solidFill>
+        <a:effectLst/>
+      </p:bgPr>
     </p:bg>
     <p:spTree>
       <p:nvGrpSpPr>
@@ -2612,7 +3626,13 @@
       </p:grpSpPr>
       <p:sp>
         <p:nvSpPr>
-          <p:cNvPr id="2" name="Title Placeholder 1"/>
+          <p:cNvPr id="2" name="Title Placeholder 1">
+            <a:extLst>
+              <a:ext uri="{FF2B5EF4-FFF2-40B4-BE49-F238E27FC236}">
+                <a16:creationId xmlns:a16="http://schemas.microsoft.com/office/drawing/2014/main" id="{E6C18AAF-324D-890B-8CE0-4C9B6094679D}"/>
+              </a:ext>
+            </a:extLst>
+          </p:cNvPr>
           <p:cNvSpPr>
             <a:spLocks noGrp="1"/>
           </p:cNvSpPr>
@@ -2622,29 +3642,35 @@
         </p:nvSpPr>
         <p:spPr>
           <a:xfrm>
-            <a:off x="457200" y="205979"/>
-            <a:ext cx="8229600" cy="857250"/>
+            <a:off x="245993" y="203670"/>
+            <a:ext cx="7923972" cy="858982"/>
           </a:xfrm>
           <a:prstGeom prst="rect">
             <a:avLst/>
           </a:prstGeom>
         </p:spPr>
         <p:txBody>
-          <a:bodyPr anchor="ctr" bIns="45720" lIns="91440" rIns="91440" rtlCol="0" tIns="45720" vert="horz">
+          <a:bodyPr anchor="b" bIns="45720" lIns="91440" rIns="91440" rtlCol="0" tIns="45720" vert="horz">
             <a:normAutofit/>
           </a:bodyPr>
           <a:lstStyle/>
           <a:p>
             <a:r>
-              <a:rPr lang="en-US"/>
-              <a:t>Click to edit Master title style</a:t>
+              <a:rPr dirty="0" lang="en-US"/>
+              <a:t>Title</a:t>
             </a:r>
           </a:p>
         </p:txBody>
       </p:sp>
       <p:sp>
         <p:nvSpPr>
-          <p:cNvPr id="3" name="Text Placeholder 2"/>
+          <p:cNvPr id="3" name="Text Placeholder 2">
+            <a:extLst>
+              <a:ext uri="{FF2B5EF4-FFF2-40B4-BE49-F238E27FC236}">
+                <a16:creationId xmlns:a16="http://schemas.microsoft.com/office/drawing/2014/main" id="{23B4A5F6-8323-9919-A672-9D317BBD0B03}"/>
+              </a:ext>
+            </a:extLst>
+          </p:cNvPr>
           <p:cNvSpPr>
             <a:spLocks noGrp="1"/>
           </p:cNvSpPr>
@@ -2654,8 +3680,8 @@
         </p:nvSpPr>
         <p:spPr>
           <a:xfrm>
-            <a:off x="457200" y="1200151"/>
-            <a:ext cx="8229600" cy="3394472"/>
+            <a:off x="245993" y="1219201"/>
+            <a:ext cx="7923973" cy="3152774"/>
           </a:xfrm>
           <a:prstGeom prst="rect">
             <a:avLst/>
@@ -2669,35 +3695,35 @@
           <a:p>
             <a:pPr lvl="0"/>
             <a:r>
-              <a:rPr lang="en-US"/>
-              <a:t>Click to edit Master text styles</a:t>
+              <a:rPr dirty="0" lang="en-US"/>
+              <a:t>Main text</a:t>
             </a:r>
           </a:p>
           <a:p>
             <a:pPr lvl="1"/>
             <a:r>
-              <a:rPr lang="en-US"/>
+              <a:rPr dirty="0" lang="en-US"/>
               <a:t>Second level</a:t>
             </a:r>
           </a:p>
           <a:p>
             <a:pPr lvl="2"/>
             <a:r>
-              <a:rPr lang="en-US"/>
+              <a:rPr dirty="0" lang="en-US"/>
               <a:t>Third level</a:t>
             </a:r>
           </a:p>
           <a:p>
             <a:pPr lvl="3"/>
             <a:r>
-              <a:rPr lang="en-US"/>
+              <a:rPr dirty="0" lang="en-US"/>
               <a:t>Fourth level</a:t>
             </a:r>
           </a:p>
           <a:p>
             <a:pPr lvl="4"/>
             <a:r>
-              <a:rPr lang="en-US"/>
+              <a:rPr dirty="0" lang="en-US"/>
               <a:t>Fifth level</a:t>
             </a:r>
           </a:p>
@@ -2705,7 +3731,13 @@
       </p:sp>
       <p:sp>
         <p:nvSpPr>
-          <p:cNvPr id="4" name="Date Placeholder 3"/>
+          <p:cNvPr id="4" name="Date Placeholder 3">
+            <a:extLst>
+              <a:ext uri="{FF2B5EF4-FFF2-40B4-BE49-F238E27FC236}">
+                <a16:creationId xmlns:a16="http://schemas.microsoft.com/office/drawing/2014/main" id="{C45970F7-7315-13A4-126E-0747228EC5B3}"/>
+              </a:ext>
+            </a:extLst>
+          </p:cNvPr>
           <p:cNvSpPr>
             <a:spLocks noGrp="1"/>
           </p:cNvSpPr>
@@ -2715,8 +3747,55 @@
         </p:nvSpPr>
         <p:spPr>
           <a:xfrm>
-            <a:off x="457200" y="4767263"/>
-            <a:ext cx="2133600" cy="273844"/>
+            <a:off x="7087374" y="4798891"/>
+            <a:ext cx="1257300" cy="273844"/>
+          </a:xfrm>
+          <a:prstGeom prst="rect">
+            <a:avLst/>
+          </a:prstGeom>
+        </p:spPr>
+        <p:txBody>
+          <a:bodyPr anchor="ctr" bIns="45720" lIns="91440" rIns="91440" rtlCol="0" tIns="45720" vert="horz"/>
+          <a:lstStyle>
+            <a:lvl1pPr algn="r">
+              <a:defRPr sz="900">
+                <a:solidFill>
+                  <a:schemeClr val="tx1">
+                    <a:tint val="82000"/>
+                  </a:schemeClr>
+                </a:solidFill>
+              </a:defRPr>
+            </a:lvl1pPr>
+          </a:lstStyle>
+          <a:p>
+            <a:fld id="{241EB5C9-1307-BA42-ABA2-0BC069CD8E7F}" type="datetimeFigureOut">
+              <a:rPr lang="en-US" smtClean="0"/>
+              <a:t>11/17/2025</a:t>
+            </a:fld>
+            <a:endParaRPr lang="en-US"/>
+          </a:p>
+        </p:txBody>
+      </p:sp>
+      <p:sp>
+        <p:nvSpPr>
+          <p:cNvPr id="5" name="Footer Placeholder 4">
+            <a:extLst>
+              <a:ext uri="{FF2B5EF4-FFF2-40B4-BE49-F238E27FC236}">
+                <a16:creationId xmlns:a16="http://schemas.microsoft.com/office/drawing/2014/main" id="{4AFA7FAE-201A-EAAF-3B3D-98B985B8F1C3}"/>
+              </a:ext>
+            </a:extLst>
+          </p:cNvPr>
+          <p:cNvSpPr>
+            <a:spLocks noGrp="1"/>
+          </p:cNvSpPr>
+          <p:nvPr>
+            <p:ph idx="3" sz="quarter" type="ftr"/>
+          </p:nvPr>
+        </p:nvSpPr>
+        <p:spPr>
+          <a:xfrm>
+            <a:off x="1729409" y="4812507"/>
+            <a:ext cx="5214864" cy="273844"/>
           </a:xfrm>
           <a:prstGeom prst="rect">
             <a:avLst/>
@@ -2729,48 +3808,7 @@
               <a:defRPr sz="900">
                 <a:solidFill>
                   <a:schemeClr val="tx1">
-                    <a:tint val="75000"/>
-                  </a:schemeClr>
-                </a:solidFill>
-              </a:defRPr>
-            </a:lvl1pPr>
-          </a:lstStyle>
-          <a:p>
-            <a:fld id="{241EB5C9-1307-BA42-ABA2-0BC069CD8E7F}" type="datetimeFigureOut">
-              <a:rPr lang="en-US" smtClean="0"/>
-              <a:t>1/2/22</a:t>
-            </a:fld>
-            <a:endParaRPr lang="en-US"/>
-          </a:p>
-        </p:txBody>
-      </p:sp>
-      <p:sp>
-        <p:nvSpPr>
-          <p:cNvPr id="5" name="Footer Placeholder 4"/>
-          <p:cNvSpPr>
-            <a:spLocks noGrp="1"/>
-          </p:cNvSpPr>
-          <p:nvPr>
-            <p:ph idx="3" sz="quarter" type="ftr"/>
-          </p:nvPr>
-        </p:nvSpPr>
-        <p:spPr>
-          <a:xfrm>
-            <a:off x="3124200" y="4767263"/>
-            <a:ext cx="2895600" cy="273844"/>
-          </a:xfrm>
-          <a:prstGeom prst="rect">
-            <a:avLst/>
-          </a:prstGeom>
-        </p:spPr>
-        <p:txBody>
-          <a:bodyPr anchor="ctr" bIns="45720" lIns="91440" rIns="91440" rtlCol="0" tIns="45720" vert="horz"/>
-          <a:lstStyle>
-            <a:lvl1pPr algn="ctr">
-              <a:defRPr sz="900">
-                <a:solidFill>
-                  <a:schemeClr val="tx1">
-                    <a:tint val="75000"/>
+                    <a:tint val="82000"/>
                   </a:schemeClr>
                 </a:solidFill>
               </a:defRPr>
@@ -2783,7 +3821,13 @@
       </p:sp>
       <p:sp>
         <p:nvSpPr>
-          <p:cNvPr id="6" name="Slide Number Placeholder 5"/>
+          <p:cNvPr id="6" name="Slide Number Placeholder 5">
+            <a:extLst>
+              <a:ext uri="{FF2B5EF4-FFF2-40B4-BE49-F238E27FC236}">
+                <a16:creationId xmlns:a16="http://schemas.microsoft.com/office/drawing/2014/main" id="{ECC6150E-BC56-D6A3-1D4E-AB4F94BD505E}"/>
+              </a:ext>
+            </a:extLst>
+          </p:cNvPr>
           <p:cNvSpPr>
             <a:spLocks noGrp="1"/>
           </p:cNvSpPr>
@@ -2793,8 +3837,8 @@
         </p:nvSpPr>
         <p:spPr>
           <a:xfrm>
-            <a:off x="6553200" y="4767263"/>
-            <a:ext cx="2133600" cy="273844"/>
+            <a:off x="8487776" y="4798892"/>
+            <a:ext cx="541101" cy="273844"/>
           </a:xfrm>
           <a:prstGeom prst="rect">
             <a:avLst/>
@@ -2807,7 +3851,7 @@
               <a:defRPr sz="900">
                 <a:solidFill>
                   <a:schemeClr val="tx1">
-                    <a:tint val="75000"/>
+                    <a:tint val="82000"/>
                   </a:schemeClr>
                 </a:solidFill>
               </a:defRPr>
@@ -2822,35 +3866,70 @@
           </a:p>
         </p:txBody>
       </p:sp>
+      <p:pic>
+        <p:nvPicPr>
+          <p:cNvPr descr="A logo with red text  AI-generated content may be incorrect." id="8" name="Picture 7">
+            <a:extLst>
+              <a:ext uri="{FF2B5EF4-FFF2-40B4-BE49-F238E27FC236}">
+                <a16:creationId xmlns:a16="http://schemas.microsoft.com/office/drawing/2014/main" id="{AF251EA0-AAC0-BE52-3044-795C2C69C4C0}"/>
+              </a:ext>
+            </a:extLst>
+          </p:cNvPr>
+          <p:cNvPicPr>
+            <a:picLocks noChangeAspect="1"/>
+          </p:cNvPicPr>
+          <p:nvPr/>
+        </p:nvPicPr>
+        <p:blipFill>
+          <a:blip r:embed="rId9">
+            <a:extLst>
+              <a:ext uri="{28A0092B-C50C-407E-A947-70E740481C1C}">
+                <a14:useLocalDpi xmlns:a14="http://schemas.microsoft.com/office/drawing/2010/main" val="0"/>
+              </a:ext>
+            </a:extLst>
+          </a:blip>
+          <a:stretch>
+            <a:fillRect/>
+          </a:stretch>
+        </p:blipFill>
+        <p:spPr>
+          <a:xfrm>
+            <a:off x="115123" y="4472608"/>
+            <a:ext cx="1294952" cy="613742"/>
+          </a:xfrm>
+          <a:prstGeom prst="rect">
+            <a:avLst/>
+          </a:prstGeom>
+        </p:spPr>
+      </p:pic>
     </p:spTree>
     <p:extLst>
       <p:ext uri="{BB962C8B-B14F-4D97-AF65-F5344CB8AC3E}">
-        <p14:creationId xmlns:p14="http://schemas.microsoft.com/office/powerpoint/2010/main" val="3676200875"/>
+        <p14:creationId xmlns:p14="http://schemas.microsoft.com/office/powerpoint/2010/main" val="389676035"/>
       </p:ext>
     </p:extLst>
   </p:cSld>
   <p:clrMap accent1="accent1" accent2="accent2" accent3="accent3" accent4="accent4" accent5="accent5" accent6="accent6" bg1="lt1" bg2="lt2" folHlink="folHlink" hlink="hlink" tx1="dk1" tx2="dk2"/>
   <p:sldLayoutIdLst>
-    <p:sldLayoutId id="2147483649" r:id="rId1"/>
-    <p:sldLayoutId id="2147483650" r:id="rId2"/>
-    <p:sldLayoutId id="2147483651" r:id="rId3"/>
-    <p:sldLayoutId id="2147483652" r:id="rId4"/>
-    <p:sldLayoutId id="2147483653" r:id="rId5"/>
-    <p:sldLayoutId id="2147483654" r:id="rId6"/>
-    <p:sldLayoutId id="2147483655" r:id="rId7"/>
-    <p:sldLayoutId id="2147483656" r:id="rId8"/>
-    <p:sldLayoutId id="2147483657" r:id="rId9"/>
-    <p:sldLayoutId id="2147483658" r:id="rId10"/>
-    <p:sldLayoutId id="2147483659" r:id="rId11"/>
+    <p:sldLayoutId id="2147483661" r:id="rId1"/>
+    <p:sldLayoutId id="2147483662" r:id="rId2"/>
+    <p:sldLayoutId id="2147483663" r:id="rId3"/>
+    <p:sldLayoutId id="2147483664" r:id="rId4"/>
+    <p:sldLayoutId id="2147483665" r:id="rId5"/>
+    <p:sldLayoutId id="2147483666" r:id="rId6"/>
+    <p:sldLayoutId id="2147483667" r:id="rId7"/>
   </p:sldLayoutIdLst>
   <p:txStyles>
     <p:titleStyle>
-      <a:lvl1pPr algn="ctr" defTabSz="342900" eaLnBrk="1" hangingPunct="1" latinLnBrk="0" rtl="0">
+      <a:lvl1pPr algn="l" defTabSz="685800" eaLnBrk="1" hangingPunct="1" latinLnBrk="0" rtl="0">
+        <a:lnSpc>
+          <a:spcPct val="90000"/>
+        </a:lnSpc>
         <a:spcBef>
           <a:spcPct val="0"/>
         </a:spcBef>
         <a:buNone/>
-        <a:defRPr kern="1200" sz="3300">
+        <a:defRPr kern="1200" sz="3000">
           <a:solidFill>
             <a:schemeClr val="tx1"/>
           </a:solidFill>
@@ -2861,13 +3940,16 @@
       </a:lvl1pPr>
     </p:titleStyle>
     <p:bodyStyle>
-      <a:lvl1pPr algn="l" defTabSz="342900" eaLnBrk="1" hangingPunct="1" indent="-342900" latinLnBrk="0" marL="342900" rtl="0">
+      <a:lvl1pPr algn="l" defTabSz="685800" eaLnBrk="1" hangingPunct="1" indent="-171450" latinLnBrk="0" marL="171450" rtl="0">
+        <a:lnSpc>
+          <a:spcPct val="90000"/>
+        </a:lnSpc>
         <a:spcBef>
-          <a:spcPct val="20000"/>
+          <a:spcPts val="750"/>
         </a:spcBef>
-        <a:buFont typeface="Arial"/>
+        <a:buFont charset="0" panose="020B0604020202020204" pitchFamily="34" typeface="Arial"/>
         <a:buChar char="•"/>
-        <a:defRPr kern="1200" sz="2400">
+        <a:defRPr kern="1200" sz="2100">
           <a:solidFill>
             <a:schemeClr val="tx1"/>
           </a:solidFill>
@@ -2876,26 +3958,14 @@
           <a:cs typeface="+mn-cs"/>
         </a:defRPr>
       </a:lvl1pPr>
-      <a:lvl2pPr algn="l" defTabSz="342900" eaLnBrk="1" hangingPunct="1" indent="-342900" latinLnBrk="0" marL="685800" rtl="0">
+      <a:lvl2pPr algn="l" defTabSz="685800" eaLnBrk="1" hangingPunct="1" indent="-171450" latinLnBrk="0" marL="514350" rtl="0">
+        <a:lnSpc>
+          <a:spcPct val="90000"/>
+        </a:lnSpc>
         <a:spcBef>
-          <a:spcPct val="20000"/>
+          <a:spcPts val="375"/>
         </a:spcBef>
-        <a:buFont typeface="Arial"/>
-        <a:buChar char="–"/>
-        <a:defRPr kern="1200" sz="2100">
-          <a:solidFill>
-            <a:schemeClr val="tx1"/>
-          </a:solidFill>
-          <a:latin typeface="+mn-lt"/>
-          <a:ea typeface="+mn-ea"/>
-          <a:cs typeface="+mn-cs"/>
-        </a:defRPr>
-      </a:lvl2pPr>
-      <a:lvl3pPr algn="l" defTabSz="342900" eaLnBrk="1" hangingPunct="1" indent="-342900" latinLnBrk="0" marL="1028700" rtl="0">
-        <a:spcBef>
-          <a:spcPct val="20000"/>
-        </a:spcBef>
-        <a:buFont typeface="Arial"/>
+        <a:buFont charset="0" panose="020B0604020202020204" pitchFamily="34" typeface="Arial"/>
         <a:buChar char="•"/>
         <a:defRPr kern="1200" sz="1800">
           <a:solidFill>
@@ -2905,42 +3975,15 @@
           <a:ea typeface="+mn-ea"/>
           <a:cs typeface="+mn-cs"/>
         </a:defRPr>
-      </a:lvl3pPr>
-      <a:lvl4pPr algn="l" defTabSz="342900" eaLnBrk="1" hangingPunct="1" indent="-342900" latinLnBrk="0" marL="1371600" rtl="0">
+      </a:lvl2pPr>
+      <a:lvl3pPr algn="l" defTabSz="685800" eaLnBrk="1" hangingPunct="1" indent="-171450" latinLnBrk="0" marL="857250" rtl="0">
+        <a:lnSpc>
+          <a:spcPct val="90000"/>
+        </a:lnSpc>
         <a:spcBef>
-          <a:spcPct val="20000"/>
+          <a:spcPts val="375"/>
         </a:spcBef>
-        <a:buFont typeface="Arial"/>
-        <a:buChar char="–"/>
-        <a:defRPr kern="1200" sz="1500">
-          <a:solidFill>
-            <a:schemeClr val="tx1"/>
-          </a:solidFill>
-          <a:latin typeface="+mn-lt"/>
-          <a:ea typeface="+mn-ea"/>
-          <a:cs typeface="+mn-cs"/>
-        </a:defRPr>
-      </a:lvl4pPr>
-      <a:lvl5pPr algn="l" defTabSz="342900" eaLnBrk="1" hangingPunct="1" indent="-342900" latinLnBrk="0" marL="1714500" rtl="0">
-        <a:spcBef>
-          <a:spcPct val="20000"/>
-        </a:spcBef>
-        <a:buFont typeface="Arial"/>
-        <a:buChar char="»"/>
-        <a:defRPr kern="1200" sz="1500">
-          <a:solidFill>
-            <a:schemeClr val="tx1"/>
-          </a:solidFill>
-          <a:latin typeface="+mn-lt"/>
-          <a:ea typeface="+mn-ea"/>
-          <a:cs typeface="+mn-cs"/>
-        </a:defRPr>
-      </a:lvl5pPr>
-      <a:lvl6pPr algn="l" defTabSz="342900" eaLnBrk="1" hangingPunct="1" indent="-342900" latinLnBrk="0" marL="2057400" rtl="0">
-        <a:spcBef>
-          <a:spcPct val="20000"/>
-        </a:spcBef>
-        <a:buFont typeface="Arial"/>
+        <a:buFont charset="0" panose="020B0604020202020204" pitchFamily="34" typeface="Arial"/>
         <a:buChar char="•"/>
         <a:defRPr kern="1200" sz="1500">
           <a:solidFill>
@@ -2950,14 +3993,71 @@
           <a:ea typeface="+mn-ea"/>
           <a:cs typeface="+mn-cs"/>
         </a:defRPr>
+      </a:lvl3pPr>
+      <a:lvl4pPr algn="l" defTabSz="685800" eaLnBrk="1" hangingPunct="1" indent="-171450" latinLnBrk="0" marL="1200150" rtl="0">
+        <a:lnSpc>
+          <a:spcPct val="90000"/>
+        </a:lnSpc>
+        <a:spcBef>
+          <a:spcPts val="375"/>
+        </a:spcBef>
+        <a:buFont charset="0" panose="020B0604020202020204" pitchFamily="34" typeface="Arial"/>
+        <a:buChar char="•"/>
+        <a:defRPr kern="1200" sz="1350">
+          <a:solidFill>
+            <a:schemeClr val="tx1"/>
+          </a:solidFill>
+          <a:latin typeface="+mn-lt"/>
+          <a:ea typeface="+mn-ea"/>
+          <a:cs typeface="+mn-cs"/>
+        </a:defRPr>
+      </a:lvl4pPr>
+      <a:lvl5pPr algn="l" defTabSz="685800" eaLnBrk="1" hangingPunct="1" indent="-171450" latinLnBrk="0" marL="1543050" rtl="0">
+        <a:lnSpc>
+          <a:spcPct val="90000"/>
+        </a:lnSpc>
+        <a:spcBef>
+          <a:spcPts val="375"/>
+        </a:spcBef>
+        <a:buFont charset="0" panose="020B0604020202020204" pitchFamily="34" typeface="Arial"/>
+        <a:buChar char="•"/>
+        <a:defRPr kern="1200" sz="1350">
+          <a:solidFill>
+            <a:schemeClr val="tx1"/>
+          </a:solidFill>
+          <a:latin typeface="+mn-lt"/>
+          <a:ea typeface="+mn-ea"/>
+          <a:cs typeface="+mn-cs"/>
+        </a:defRPr>
+      </a:lvl5pPr>
+      <a:lvl6pPr algn="l" defTabSz="685800" eaLnBrk="1" hangingPunct="1" indent="-171450" latinLnBrk="0" marL="1885950" rtl="0">
+        <a:lnSpc>
+          <a:spcPct val="90000"/>
+        </a:lnSpc>
+        <a:spcBef>
+          <a:spcPts val="375"/>
+        </a:spcBef>
+        <a:buFont charset="0" panose="020B0604020202020204" pitchFamily="34" typeface="Arial"/>
+        <a:buChar char="•"/>
+        <a:defRPr kern="1200" sz="1350">
+          <a:solidFill>
+            <a:schemeClr val="tx1"/>
+          </a:solidFill>
+          <a:latin typeface="+mn-lt"/>
+          <a:ea typeface="+mn-ea"/>
+          <a:cs typeface="+mn-cs"/>
+        </a:defRPr>
       </a:lvl6pPr>
-      <a:lvl7pPr algn="l" defTabSz="342900" eaLnBrk="1" hangingPunct="1" indent="-342900" latinLnBrk="0" marL="2400300" rtl="0">
+      <a:lvl7pPr algn="l" defTabSz="685800" eaLnBrk="1" hangingPunct="1" indent="-171450" latinLnBrk="0" marL="2228850" rtl="0">
+        <a:lnSpc>
+          <a:spcPct val="90000"/>
+        </a:lnSpc>
         <a:spcBef>
-          <a:spcPct val="20000"/>
+          <a:spcPts val="375"/>
         </a:spcBef>
-        <a:buFont typeface="Arial"/>
+        <a:buFont charset="0" panose="020B0604020202020204" pitchFamily="34" typeface="Arial"/>
         <a:buChar char="•"/>
-        <a:defRPr kern="1200" sz="1500">
+        <a:defRPr kern="1200" sz="1350">
           <a:solidFill>
             <a:schemeClr val="tx1"/>
           </a:solidFill>
@@ -2966,13 +4066,16 @@
           <a:cs typeface="+mn-cs"/>
         </a:defRPr>
       </a:lvl7pPr>
-      <a:lvl8pPr algn="l" defTabSz="342900" eaLnBrk="1" hangingPunct="1" indent="-342900" latinLnBrk="0" marL="2743200" rtl="0">
+      <a:lvl8pPr algn="l" defTabSz="685800" eaLnBrk="1" hangingPunct="1" indent="-171450" latinLnBrk="0" marL="2571750" rtl="0">
+        <a:lnSpc>
+          <a:spcPct val="90000"/>
+        </a:lnSpc>
         <a:spcBef>
-          <a:spcPct val="20000"/>
+          <a:spcPts val="375"/>
         </a:spcBef>
-        <a:buFont typeface="Arial"/>
+        <a:buFont charset="0" panose="020B0604020202020204" pitchFamily="34" typeface="Arial"/>
         <a:buChar char="•"/>
-        <a:defRPr kern="1200" sz="1500">
+        <a:defRPr kern="1200" sz="1350">
           <a:solidFill>
             <a:schemeClr val="tx1"/>
           </a:solidFill>
@@ -2981,13 +4084,16 @@
           <a:cs typeface="+mn-cs"/>
         </a:defRPr>
       </a:lvl8pPr>
-      <a:lvl9pPr algn="l" defTabSz="342900" eaLnBrk="1" hangingPunct="1" indent="-342900" latinLnBrk="0" marL="3086100" rtl="0">
+      <a:lvl9pPr algn="l" defTabSz="685800" eaLnBrk="1" hangingPunct="1" indent="-171450" latinLnBrk="0" marL="2914650" rtl="0">
+        <a:lnSpc>
+          <a:spcPct val="90000"/>
+        </a:lnSpc>
         <a:spcBef>
-          <a:spcPct val="20000"/>
+          <a:spcPts val="375"/>
         </a:spcBef>
-        <a:buFont typeface="Arial"/>
+        <a:buFont charset="0" panose="020B0604020202020204" pitchFamily="34" typeface="Arial"/>
         <a:buChar char="•"/>
-        <a:defRPr kern="1200" sz="1500">
+        <a:defRPr kern="1200" sz="1350">
           <a:solidFill>
             <a:schemeClr val="tx1"/>
           </a:solidFill>
@@ -3001,7 +4107,7 @@
       <a:defPPr>
         <a:defRPr lang="en-US"/>
       </a:defPPr>
-      <a:lvl1pPr algn="l" defTabSz="342900" eaLnBrk="1" hangingPunct="1" latinLnBrk="0" marL="0" rtl="0">
+      <a:lvl1pPr algn="l" defTabSz="685800" eaLnBrk="1" hangingPunct="1" latinLnBrk="0" marL="0" rtl="0">
         <a:defRPr kern="1200" sz="1350">
           <a:solidFill>
             <a:schemeClr val="tx1"/>
@@ -3011,7 +4117,7 @@
           <a:cs typeface="+mn-cs"/>
         </a:defRPr>
       </a:lvl1pPr>
-      <a:lvl2pPr algn="l" defTabSz="342900" eaLnBrk="1" hangingPunct="1" latinLnBrk="0" marL="342900" rtl="0">
+      <a:lvl2pPr algn="l" defTabSz="685800" eaLnBrk="1" hangingPunct="1" latinLnBrk="0" marL="342900" rtl="0">
         <a:defRPr kern="1200" sz="1350">
           <a:solidFill>
             <a:schemeClr val="tx1"/>
@@ -3021,7 +4127,7 @@
           <a:cs typeface="+mn-cs"/>
         </a:defRPr>
       </a:lvl2pPr>
-      <a:lvl3pPr algn="l" defTabSz="342900" eaLnBrk="1" hangingPunct="1" latinLnBrk="0" marL="685800" rtl="0">
+      <a:lvl3pPr algn="l" defTabSz="685800" eaLnBrk="1" hangingPunct="1" latinLnBrk="0" marL="685800" rtl="0">
         <a:defRPr kern="1200" sz="1350">
           <a:solidFill>
             <a:schemeClr val="tx1"/>
@@ -3031,7 +4137,7 @@
           <a:cs typeface="+mn-cs"/>
         </a:defRPr>
       </a:lvl3pPr>
-      <a:lvl4pPr algn="l" defTabSz="342900" eaLnBrk="1" hangingPunct="1" latinLnBrk="0" marL="1028700" rtl="0">
+      <a:lvl4pPr algn="l" defTabSz="685800" eaLnBrk="1" hangingPunct="1" latinLnBrk="0" marL="1028700" rtl="0">
         <a:defRPr kern="1200" sz="1350">
           <a:solidFill>
             <a:schemeClr val="tx1"/>
@@ -3041,7 +4147,7 @@
           <a:cs typeface="+mn-cs"/>
         </a:defRPr>
       </a:lvl4pPr>
-      <a:lvl5pPr algn="l" defTabSz="342900" eaLnBrk="1" hangingPunct="1" latinLnBrk="0" marL="1371600" rtl="0">
+      <a:lvl5pPr algn="l" defTabSz="685800" eaLnBrk="1" hangingPunct="1" latinLnBrk="0" marL="1371600" rtl="0">
         <a:defRPr kern="1200" sz="1350">
           <a:solidFill>
             <a:schemeClr val="tx1"/>
@@ -3051,7 +4157,7 @@
           <a:cs typeface="+mn-cs"/>
         </a:defRPr>
       </a:lvl5pPr>
-      <a:lvl6pPr algn="l" defTabSz="342900" eaLnBrk="1" hangingPunct="1" latinLnBrk="0" marL="1714500" rtl="0">
+      <a:lvl6pPr algn="l" defTabSz="685800" eaLnBrk="1" hangingPunct="1" latinLnBrk="0" marL="1714500" rtl="0">
         <a:defRPr kern="1200" sz="1350">
           <a:solidFill>
             <a:schemeClr val="tx1"/>
@@ -3061,7 +4167,7 @@
           <a:cs typeface="+mn-cs"/>
         </a:defRPr>
       </a:lvl6pPr>
-      <a:lvl7pPr algn="l" defTabSz="342900" eaLnBrk="1" hangingPunct="1" latinLnBrk="0" marL="2057400" rtl="0">
+      <a:lvl7pPr algn="l" defTabSz="685800" eaLnBrk="1" hangingPunct="1" latinLnBrk="0" marL="2057400" rtl="0">
         <a:defRPr kern="1200" sz="1350">
           <a:solidFill>
             <a:schemeClr val="tx1"/>
@@ -3071,7 +4177,7 @@
           <a:cs typeface="+mn-cs"/>
         </a:defRPr>
       </a:lvl7pPr>
-      <a:lvl8pPr algn="l" defTabSz="342900" eaLnBrk="1" hangingPunct="1" latinLnBrk="0" marL="2400300" rtl="0">
+      <a:lvl8pPr algn="l" defTabSz="685800" eaLnBrk="1" hangingPunct="1" latinLnBrk="0" marL="2400300" rtl="0">
         <a:defRPr kern="1200" sz="1350">
           <a:solidFill>
             <a:schemeClr val="tx1"/>
@@ -3081,7 +4187,7 @@
           <a:cs typeface="+mn-cs"/>
         </a:defRPr>
       </a:lvl8pPr>
-      <a:lvl9pPr algn="l" defTabSz="342900" eaLnBrk="1" hangingPunct="1" latinLnBrk="0" marL="2743200" rtl="0">
+      <a:lvl9pPr algn="l" defTabSz="685800" eaLnBrk="1" hangingPunct="1" latinLnBrk="0" marL="2743200" rtl="0">
         <a:defRPr kern="1200" sz="1350">
           <a:solidFill>
             <a:schemeClr val="tx1"/>
@@ -3093,6 +4199,52 @@
       </a:lvl9pPr>
     </p:otherStyle>
   </p:txStyles>
+  <p:extLst>
+    <p:ext uri="{27BBF7A9-308A-43DC-89C8-2F10F3537804}">
+      <p15:sldGuideLst xmlns:p15="http://schemas.microsoft.com/office/powerpoint/2012/main">
+        <p15:guide id="1" orient="horz" pos="888">
+          <p15:clr>
+            <a:srgbClr val="F26B43"/>
+          </p15:clr>
+        </p15:guide>
+        <p15:guide id="2" pos="96">
+          <p15:clr>
+            <a:srgbClr val="F26B43"/>
+          </p15:clr>
+        </p15:guide>
+        <p15:guide id="3" pos="6864">
+          <p15:clr>
+            <a:srgbClr val="F26B43"/>
+          </p15:clr>
+        </p15:guide>
+        <p15:guide id="4" orient="horz" pos="4272">
+          <p15:clr>
+            <a:srgbClr val="F26B43"/>
+          </p15:clr>
+        </p15:guide>
+        <p15:guide id="5" orient="horz" pos="3672">
+          <p15:clr>
+            <a:srgbClr val="F26B43"/>
+          </p15:clr>
+        </p15:guide>
+        <p15:guide id="6" pos="192">
+          <p15:clr>
+            <a:srgbClr val="F26B43"/>
+          </p15:clr>
+        </p15:guide>
+        <p15:guide id="7" orient="horz" pos="168">
+          <p15:clr>
+            <a:srgbClr val="F26B43"/>
+          </p15:clr>
+        </p15:guide>
+        <p15:guide id="8" orient="horz" pos="1008">
+          <p15:clr>
+            <a:srgbClr val="F26B43"/>
+          </p15:clr>
+        </p15:guide>
+      </p15:sldGuideLst>
+    </p:ext>
+  </p:extLst>
 </p:sldMaster>
 </file>
 
@@ -3115,18 +4267,24 @@
       </p:grpSpPr>
       <p:sp>
         <p:nvSpPr>
-          <p:cNvPr id="2" name="Title 1"/>
+          <p:cNvPr id="2" name="Title 1">
+            <a:extLst>
+              <a:ext uri="{FF2B5EF4-FFF2-40B4-BE49-F238E27FC236}">
+                <a16:creationId xmlns:a16="http://schemas.microsoft.com/office/drawing/2014/main" id="{602B37E5-D300-1592-3196-16347820FA03}"/>
+              </a:ext>
+            </a:extLst>
+          </p:cNvPr>
           <p:cNvSpPr>
             <a:spLocks noGrp="1"/>
           </p:cNvSpPr>
           <p:nvPr>
-            <p:ph type="ctrTitle"/>
+            <p:ph hasCustomPrompt="1" type="ctrTitle"/>
           </p:nvPr>
         </p:nvSpPr>
         <p:spPr>
           <a:xfrm>
-            <a:off x="685800" y="1597819"/>
-            <a:ext cx="7772400" cy="1102519"/>
+            <a:off x="1143000" y="841772"/>
+            <a:ext cx="6858000" cy="1790700"/>
           </a:xfrm>
         </p:spPr>
         <p:txBody>
@@ -3145,18 +4303,24 @@
       </p:sp>
       <p:sp>
         <p:nvSpPr>
-          <p:cNvPr id="3" name="Subtitle 2"/>
+          <p:cNvPr id="3" name="Subtitle 2">
+            <a:extLst>
+              <a:ext uri="{FF2B5EF4-FFF2-40B4-BE49-F238E27FC236}">
+                <a16:creationId xmlns:a16="http://schemas.microsoft.com/office/drawing/2014/main" id="{70E89392-98FE-25C5-8C7E-F04934948651}"/>
+              </a:ext>
+            </a:extLst>
+          </p:cNvPr>
           <p:cNvSpPr>
             <a:spLocks noGrp="1"/>
           </p:cNvSpPr>
           <p:nvPr>
-            <p:ph idx="1" type="subTitle"/>
+            <p:ph hasCustomPrompt="1" idx="1" type="subTitle"/>
           </p:nvPr>
         </p:nvSpPr>
         <p:spPr>
           <a:xfrm>
-            <a:off x="1371600" y="2914650"/>
-            <a:ext cx="6400800" cy="1314450"/>
+            <a:off x="1143000" y="2701529"/>
+            <a:ext cx="6858000" cy="934640"/>
           </a:xfrm>
         </p:spPr>
         <p:txBody>
@@ -3168,7 +4332,7 @@
             </a:pPr>
             <a:r>
               <a:rPr/>
-              <a:t>2024</a:t>
+              <a:t>2025</a:t>
             </a:r>
             <a:br/>
             <a:br/>
@@ -3203,12 +4367,18 @@
       </p:grpSpPr>
       <p:sp>
         <p:nvSpPr>
-          <p:cNvPr id="2" name="Title 1"/>
+          <p:cNvPr id="2" name="Title 1">
+            <a:extLst>
+              <a:ext uri="{FF2B5EF4-FFF2-40B4-BE49-F238E27FC236}">
+                <a16:creationId xmlns:a16="http://schemas.microsoft.com/office/drawing/2014/main" id="{2DEB43F4-64B6-7152-A0ED-E3A60DA1F14B}"/>
+              </a:ext>
+            </a:extLst>
+          </p:cNvPr>
           <p:cNvSpPr>
             <a:spLocks noGrp="1"/>
           </p:cNvSpPr>
           <p:nvPr>
-            <p:ph type="title"/>
+            <p:ph hasCustomPrompt="1" type="title"/>
           </p:nvPr>
         </p:nvSpPr>
         <p:spPr/>
@@ -3221,7 +4391,7 @@
             </a:pPr>
             <a:r>
               <a:rPr/>
-              <a:t>County Wide Chronic Absenteeism (All students)</a:t>
+              <a:t>2025 County Wide Chronic Absenteeism (All students)</a:t>
             </a:r>
           </a:p>
         </p:txBody>
@@ -3242,8 +4412,8 @@
         </p:blipFill>
         <p:spPr bwMode="auto">
           <a:xfrm>
-            <a:off x="1181100" y="1193800"/>
-            <a:ext cx="6781800" cy="3390900"/>
+            <a:off x="1041400" y="1219200"/>
+            <a:ext cx="6299200" cy="3149600"/>
           </a:xfrm>
           <a:prstGeom prst="rect">
             <a:avLst/>
@@ -3280,12 +4450,18 @@
       </p:grpSpPr>
       <p:sp>
         <p:nvSpPr>
-          <p:cNvPr id="2" name="Title 1"/>
+          <p:cNvPr id="2" name="Title 1">
+            <a:extLst>
+              <a:ext uri="{FF2B5EF4-FFF2-40B4-BE49-F238E27FC236}">
+                <a16:creationId xmlns:a16="http://schemas.microsoft.com/office/drawing/2014/main" id="{2DEB43F4-64B6-7152-A0ED-E3A60DA1F14B}"/>
+              </a:ext>
+            </a:extLst>
+          </p:cNvPr>
           <p:cNvSpPr>
             <a:spLocks noGrp="1"/>
           </p:cNvSpPr>
           <p:nvPr>
-            <p:ph type="title"/>
+            <p:ph hasCustomPrompt="1" type="title"/>
           </p:nvPr>
         </p:nvSpPr>
         <p:spPr/>
@@ -3298,7 +4474,7 @@
             </a:pPr>
             <a:r>
               <a:rPr/>
-              <a:t>County Wide Suspension (All students)</a:t>
+              <a:t>2025 County Wide Suspension (All students)</a:t>
             </a:r>
           </a:p>
         </p:txBody>
@@ -3319,8 +4495,8 @@
         </p:blipFill>
         <p:spPr bwMode="auto">
           <a:xfrm>
-            <a:off x="1181100" y="1193800"/>
-            <a:ext cx="6781800" cy="3390900"/>
+            <a:off x="1041400" y="1219200"/>
+            <a:ext cx="6299200" cy="3149600"/>
           </a:xfrm>
           <a:prstGeom prst="rect">
             <a:avLst/>
@@ -3357,12 +4533,18 @@
       </p:grpSpPr>
       <p:sp>
         <p:nvSpPr>
-          <p:cNvPr id="2" name="Title 1"/>
+          <p:cNvPr id="2" name="Title 1">
+            <a:extLst>
+              <a:ext uri="{FF2B5EF4-FFF2-40B4-BE49-F238E27FC236}">
+                <a16:creationId xmlns:a16="http://schemas.microsoft.com/office/drawing/2014/main" id="{2DEB43F4-64B6-7152-A0ED-E3A60DA1F14B}"/>
+              </a:ext>
+            </a:extLst>
+          </p:cNvPr>
           <p:cNvSpPr>
             <a:spLocks noGrp="1"/>
           </p:cNvSpPr>
           <p:nvPr>
-            <p:ph type="title"/>
+            <p:ph hasCustomPrompt="1" type="title"/>
           </p:nvPr>
         </p:nvSpPr>
         <p:spPr/>
@@ -3375,7 +4557,7 @@
             </a:pPr>
             <a:r>
               <a:rPr/>
-              <a:t>County Wide Graduation (All students)</a:t>
+              <a:t>2025 County Wide Graduation (All students)</a:t>
             </a:r>
           </a:p>
         </p:txBody>
@@ -3396,8 +4578,8 @@
         </p:blipFill>
         <p:spPr bwMode="auto">
           <a:xfrm>
-            <a:off x="1181100" y="1193800"/>
-            <a:ext cx="6781800" cy="3390900"/>
+            <a:off x="1041400" y="1219200"/>
+            <a:ext cx="6299200" cy="3149600"/>
           </a:xfrm>
           <a:prstGeom prst="rect">
             <a:avLst/>
@@ -3434,12 +4616,18 @@
       </p:grpSpPr>
       <p:sp>
         <p:nvSpPr>
-          <p:cNvPr id="2" name="Title 1"/>
+          <p:cNvPr id="2" name="Title 1">
+            <a:extLst>
+              <a:ext uri="{FF2B5EF4-FFF2-40B4-BE49-F238E27FC236}">
+                <a16:creationId xmlns:a16="http://schemas.microsoft.com/office/drawing/2014/main" id="{2DEB43F4-64B6-7152-A0ED-E3A60DA1F14B}"/>
+              </a:ext>
+            </a:extLst>
+          </p:cNvPr>
           <p:cNvSpPr>
             <a:spLocks noGrp="1"/>
           </p:cNvSpPr>
           <p:nvPr>
-            <p:ph type="title"/>
+            <p:ph hasCustomPrompt="1" type="title"/>
           </p:nvPr>
         </p:nvSpPr>
         <p:spPr/>
@@ -3452,7 +4640,7 @@
             </a:pPr>
             <a:r>
               <a:rPr/>
-              <a:t>County Wide College/Career (All students)</a:t>
+              <a:t>2025 County Wide College/Career (All students)</a:t>
             </a:r>
           </a:p>
         </p:txBody>
@@ -3473,8 +4661,8 @@
         </p:blipFill>
         <p:spPr bwMode="auto">
           <a:xfrm>
-            <a:off x="1181100" y="1193800"/>
-            <a:ext cx="6781800" cy="3390900"/>
+            <a:off x="1041400" y="1219200"/>
+            <a:ext cx="6299200" cy="3149600"/>
           </a:xfrm>
           <a:prstGeom prst="rect">
             <a:avLst/>
@@ -3511,12 +4699,18 @@
       </p:grpSpPr>
       <p:sp>
         <p:nvSpPr>
-          <p:cNvPr id="2" name="Title 1"/>
+          <p:cNvPr id="2" name="Title 1">
+            <a:extLst>
+              <a:ext uri="{FF2B5EF4-FFF2-40B4-BE49-F238E27FC236}">
+                <a16:creationId xmlns:a16="http://schemas.microsoft.com/office/drawing/2014/main" id="{2DEB43F4-64B6-7152-A0ED-E3A60DA1F14B}"/>
+              </a:ext>
+            </a:extLst>
+          </p:cNvPr>
           <p:cNvSpPr>
             <a:spLocks noGrp="1"/>
           </p:cNvSpPr>
           <p:nvPr>
-            <p:ph type="title"/>
+            <p:ph hasCustomPrompt="1" type="title"/>
           </p:nvPr>
         </p:nvSpPr>
         <p:spPr/>
@@ -3529,14 +4723,14 @@
             </a:pPr>
             <a:r>
               <a:rPr/>
-              <a:t>Long-Term English Learners: Districts</a:t>
+              <a:t>2025 Long-Term English Learners: Districts</a:t>
             </a:r>
           </a:p>
         </p:txBody>
       </p:sp>
       <p:graphicFrame xmlns:a="http://schemas.openxmlformats.org/drawingml/2006/main" xmlns:r="http://schemas.openxmlformats.org/officeDocument/2006/relationships" xmlns:p="http://schemas.openxmlformats.org/presentationml/2006/main">
         <p:nvGraphicFramePr>
-          <p:cNvPr id="29903071" name=""/>
+          <p:cNvPr id="779992651" name=""/>
           <p:cNvGraphicFramePr>
             <a:graphicFrameLocks noGrp="true"/>
           </p:cNvGraphicFramePr>
@@ -4037,7 +5231,7 @@
                           <a:ea typeface="Arial"/>
                           <a:sym typeface="Arial"/>
                         </a:rPr>
-                        <a:t>268</a:t>
+                        <a:t>256</a:t>
                       </a:r>
                     </a:p>
                   </a:txBody>
@@ -4094,7 +5288,7 @@
                           <a:ea typeface="Arial"/>
                           <a:sym typeface="Arial"/>
                         </a:rPr>
-                        <a:t>28</a:t>
+                        <a:t>26</a:t>
                       </a:r>
                     </a:p>
                   </a:txBody>
@@ -4151,7 +5345,7 @@
                           <a:ea typeface="Arial"/>
                           <a:sym typeface="Arial"/>
                         </a:rPr>
-                        <a:t>27</a:t>
+                        <a:t>23</a:t>
                       </a:r>
                     </a:p>
                   </a:txBody>
@@ -4208,7 +5402,7 @@
                           <a:ea typeface="Arial"/>
                           <a:sym typeface="Arial"/>
                         </a:rPr>
-                        <a:t>10.45%</a:t>
+                        <a:t>10.16%</a:t>
                       </a:r>
                     </a:p>
                   </a:txBody>
@@ -4265,7 +5459,7 @@
                           <a:ea typeface="Arial"/>
                           <a:sym typeface="Arial"/>
                         </a:rPr>
-                        <a:t>96.43%</a:t>
+                        <a:t>88.46%</a:t>
                       </a:r>
                     </a:p>
                   </a:txBody>
@@ -4381,7 +5575,7 @@
                           <a:ea typeface="Arial"/>
                           <a:sym typeface="Arial"/>
                         </a:rPr>
-                        <a:t>4,477</a:t>
+                        <a:t>4,458</a:t>
                       </a:r>
                     </a:p>
                   </a:txBody>
@@ -4438,7 +5632,7 @@
                           <a:ea typeface="Arial"/>
                           <a:sym typeface="Arial"/>
                         </a:rPr>
-                        <a:t>178</a:t>
+                        <a:t>150</a:t>
                       </a:r>
                     </a:p>
                   </a:txBody>
@@ -4495,7 +5689,7 @@
                           <a:ea typeface="Arial"/>
                           <a:sym typeface="Arial"/>
                         </a:rPr>
-                        <a:t>43</a:t>
+                        <a:t>32</a:t>
                       </a:r>
                     </a:p>
                   </a:txBody>
@@ -4552,7 +5746,7 @@
                           <a:ea typeface="Arial"/>
                           <a:sym typeface="Arial"/>
                         </a:rPr>
-                        <a:t>3.98%</a:t>
+                        <a:t>3.36%</a:t>
                       </a:r>
                     </a:p>
                   </a:txBody>
@@ -4609,7 +5803,7 @@
                           <a:ea typeface="Arial"/>
                           <a:sym typeface="Arial"/>
                         </a:rPr>
-                        <a:t>24.16%</a:t>
+                        <a:t>21.33%</a:t>
                       </a:r>
                     </a:p>
                   </a:txBody>
@@ -4725,7 +5919,7 @@
                           <a:ea typeface="Arial"/>
                           <a:sym typeface="Arial"/>
                         </a:rPr>
-                        <a:t>3,241</a:t>
+                        <a:t>3,169</a:t>
                       </a:r>
                     </a:p>
                   </a:txBody>
@@ -4782,7 +5976,7 @@
                           <a:ea typeface="Arial"/>
                           <a:sym typeface="Arial"/>
                         </a:rPr>
-                        <a:t>741</a:t>
+                        <a:t>696</a:t>
                       </a:r>
                     </a:p>
                   </a:txBody>
@@ -4839,7 +6033,7 @@
                           <a:ea typeface="Arial"/>
                           <a:sym typeface="Arial"/>
                         </a:rPr>
-                        <a:t>228</a:t>
+                        <a:t>194</a:t>
                       </a:r>
                     </a:p>
                   </a:txBody>
@@ -4896,7 +6090,7 @@
                           <a:ea typeface="Arial"/>
                           <a:sym typeface="Arial"/>
                         </a:rPr>
-                        <a:t>22.86%</a:t>
+                        <a:t>21.96%</a:t>
                       </a:r>
                     </a:p>
                   </a:txBody>
@@ -4953,7 +6147,7 @@
                           <a:ea typeface="Arial"/>
                           <a:sym typeface="Arial"/>
                         </a:rPr>
-                        <a:t>30.77%</a:t>
+                        <a:t>27.87%</a:t>
                       </a:r>
                     </a:p>
                   </a:txBody>
@@ -5069,7 +6263,7 @@
                           <a:ea typeface="Arial"/>
                           <a:sym typeface="Arial"/>
                         </a:rPr>
-                        <a:t>21,545</a:t>
+                        <a:t>21,419</a:t>
                       </a:r>
                     </a:p>
                   </a:txBody>
@@ -5126,7 +6320,7 @@
                           <a:ea typeface="Arial"/>
                           <a:sym typeface="Arial"/>
                         </a:rPr>
-                        <a:t>3,499</a:t>
+                        <a:t>3,458</a:t>
                       </a:r>
                     </a:p>
                   </a:txBody>
@@ -5183,7 +6377,7 @@
                           <a:ea typeface="Arial"/>
                           <a:sym typeface="Arial"/>
                         </a:rPr>
-                        <a:t>648</a:t>
+                        <a:t>630</a:t>
                       </a:r>
                     </a:p>
                   </a:txBody>
@@ -5240,7 +6434,7 @@
                           <a:ea typeface="Arial"/>
                           <a:sym typeface="Arial"/>
                         </a:rPr>
-                        <a:t>16.24%</a:t>
+                        <a:t>16.14%</a:t>
                       </a:r>
                     </a:p>
                   </a:txBody>
@@ -5297,7 +6491,7 @@
                           <a:ea typeface="Arial"/>
                           <a:sym typeface="Arial"/>
                         </a:rPr>
-                        <a:t>18.52%</a:t>
+                        <a:t>18.22%</a:t>
                       </a:r>
                     </a:p>
                   </a:txBody>
@@ -5413,7 +6607,7 @@
                           <a:ea typeface="Arial"/>
                           <a:sym typeface="Arial"/>
                         </a:rPr>
-                        <a:t>5,736</a:t>
+                        <a:t>5,790</a:t>
                       </a:r>
                     </a:p>
                   </a:txBody>
@@ -5470,7 +6664,7 @@
                           <a:ea typeface="Arial"/>
                           <a:sym typeface="Arial"/>
                         </a:rPr>
-                        <a:t>212</a:t>
+                        <a:t>227</a:t>
                       </a:r>
                     </a:p>
                   </a:txBody>
@@ -5527,7 +6721,7 @@
                           <a:ea typeface="Arial"/>
                           <a:sym typeface="Arial"/>
                         </a:rPr>
-                        <a:t>38</a:t>
+                        <a:t>37</a:t>
                       </a:r>
                     </a:p>
                   </a:txBody>
@@ -5584,7 +6778,7 @@
                           <a:ea typeface="Arial"/>
                           <a:sym typeface="Arial"/>
                         </a:rPr>
-                        <a:t>3.7%</a:t>
+                        <a:t>3.92%</a:t>
                       </a:r>
                     </a:p>
                   </a:txBody>
@@ -5641,7 +6835,7 @@
                           <a:ea typeface="Arial"/>
                           <a:sym typeface="Arial"/>
                         </a:rPr>
-                        <a:t>17.92%</a:t>
+                        <a:t>16.3%</a:t>
                       </a:r>
                     </a:p>
                   </a:txBody>
@@ -5757,7 +6951,7 @@
                           <a:ea typeface="Arial"/>
                           <a:sym typeface="Arial"/>
                         </a:rPr>
-                        <a:t>11,880</a:t>
+                        <a:t>12,053</a:t>
                       </a:r>
                     </a:p>
                   </a:txBody>
@@ -5814,7 +7008,7 @@
                           <a:ea typeface="Arial"/>
                           <a:sym typeface="Arial"/>
                         </a:rPr>
-                        <a:t>1,112</a:t>
+                        <a:t>1,053</a:t>
                       </a:r>
                     </a:p>
                   </a:txBody>
@@ -5871,7 +7065,7 @@
                           <a:ea typeface="Arial"/>
                           <a:sym typeface="Arial"/>
                         </a:rPr>
-                        <a:t>227</a:t>
+                        <a:t>191</a:t>
                       </a:r>
                     </a:p>
                   </a:txBody>
@@ -5928,7 +7122,7 @@
                           <a:ea typeface="Arial"/>
                           <a:sym typeface="Arial"/>
                         </a:rPr>
-                        <a:t>9.36%</a:t>
+                        <a:t>8.74%</a:t>
                       </a:r>
                     </a:p>
                   </a:txBody>
@@ -5985,7 +7179,7 @@
                           <a:ea typeface="Arial"/>
                           <a:sym typeface="Arial"/>
                         </a:rPr>
-                        <a:t>20.41%</a:t>
+                        <a:t>18.14%</a:t>
                       </a:r>
                     </a:p>
                   </a:txBody>
@@ -6105,7 +7299,7 @@
                           <a:ea typeface="Arial"/>
                           <a:sym typeface="Arial"/>
                         </a:rPr>
-                        <a:t>10,344</a:t>
+                        <a:t>10,037</a:t>
                       </a:r>
                     </a:p>
                   </a:txBody>
@@ -6166,7 +7360,7 @@
                           <a:ea typeface="Arial"/>
                           <a:sym typeface="Arial"/>
                         </a:rPr>
-                        <a:t>3,003</a:t>
+                        <a:t>2,804</a:t>
                       </a:r>
                     </a:p>
                   </a:txBody>
@@ -6227,7 +7421,7 @@
                           <a:ea typeface="Arial"/>
                           <a:sym typeface="Arial"/>
                         </a:rPr>
-                        <a:t>701</a:t>
+                        <a:t>646</a:t>
                       </a:r>
                     </a:p>
                   </a:txBody>
@@ -6288,7 +7482,7 @@
                           <a:ea typeface="Arial"/>
                           <a:sym typeface="Arial"/>
                         </a:rPr>
-                        <a:t>29.03%</a:t>
+                        <a:t>27.94%</a:t>
                       </a:r>
                     </a:p>
                   </a:txBody>
@@ -6349,7 +7543,7 @@
                           <a:ea typeface="Arial"/>
                           <a:sym typeface="Arial"/>
                         </a:rPr>
-                        <a:t>23.34%</a:t>
+                        <a:t>23.04%</a:t>
                       </a:r>
                     </a:p>
                   </a:txBody>
@@ -6765,12 +7959,18 @@
       </p:grpSpPr>
       <p:sp>
         <p:nvSpPr>
-          <p:cNvPr id="2" name="Title 1"/>
+          <p:cNvPr id="2" name="Title 1">
+            <a:extLst>
+              <a:ext uri="{FF2B5EF4-FFF2-40B4-BE49-F238E27FC236}">
+                <a16:creationId xmlns:a16="http://schemas.microsoft.com/office/drawing/2014/main" id="{2DEB43F4-64B6-7152-A0ED-E3A60DA1F14B}"/>
+              </a:ext>
+            </a:extLst>
+          </p:cNvPr>
           <p:cNvSpPr>
             <a:spLocks noGrp="1"/>
           </p:cNvSpPr>
           <p:nvPr>
-            <p:ph type="title"/>
+            <p:ph hasCustomPrompt="1" type="title"/>
           </p:nvPr>
         </p:nvSpPr>
         <p:spPr/>
@@ -6783,14 +7983,14 @@
             </a:pPr>
             <a:r>
               <a:rPr/>
-              <a:t>Long-Term English Learners: Charters</a:t>
+              <a:t>2025 Long-Term English Learners: Charters</a:t>
             </a:r>
           </a:p>
         </p:txBody>
       </p:sp>
       <p:graphicFrame xmlns:a="http://schemas.openxmlformats.org/drawingml/2006/main" xmlns:r="http://schemas.openxmlformats.org/officeDocument/2006/relationships" xmlns:p="http://schemas.openxmlformats.org/presentationml/2006/main">
         <p:nvGraphicFramePr>
-          <p:cNvPr id="615750960" name=""/>
+          <p:cNvPr id="653411039" name=""/>
           <p:cNvGraphicFramePr>
             <a:graphicFrameLocks noGrp="true"/>
           </p:cNvGraphicFramePr>
@@ -7291,7 +8491,7 @@
                           <a:ea typeface="Arial"/>
                           <a:sym typeface="Arial"/>
                         </a:rPr>
-                        <a:t>489</a:t>
+                        <a:t>485</a:t>
                       </a:r>
                     </a:p>
                   </a:txBody>
@@ -7348,7 +8548,7 @@
                           <a:ea typeface="Arial"/>
                           <a:sym typeface="Arial"/>
                         </a:rPr>
-                        <a:t>5</a:t>
+                        <a:t>3</a:t>
                       </a:r>
                     </a:p>
                   </a:txBody>
@@ -7405,7 +8605,7 @@
                           <a:ea typeface="Arial"/>
                           <a:sym typeface="Arial"/>
                         </a:rPr>
-                        <a:t>4</a:t>
+                        <a:t>3</a:t>
                       </a:r>
                     </a:p>
                   </a:txBody>
@@ -7462,7 +8662,7 @@
                           <a:ea typeface="Arial"/>
                           <a:sym typeface="Arial"/>
                         </a:rPr>
-                        <a:t>1.02%</a:t>
+                        <a:t>0.62%</a:t>
                       </a:r>
                     </a:p>
                   </a:txBody>
@@ -7519,7 +8719,7 @@
                           <a:ea typeface="Arial"/>
                           <a:sym typeface="Arial"/>
                         </a:rPr>
-                        <a:t>80%</a:t>
+                        <a:t>100%</a:t>
                       </a:r>
                     </a:p>
                   </a:txBody>
@@ -7635,7 +8835,7 @@
                           <a:ea typeface="Arial"/>
                           <a:sym typeface="Arial"/>
                         </a:rPr>
-                        <a:t>991</a:t>
+                        <a:t>1,000</a:t>
                       </a:r>
                     </a:p>
                   </a:txBody>
@@ -7692,7 +8892,7 @@
                           <a:ea typeface="Arial"/>
                           <a:sym typeface="Arial"/>
                         </a:rPr>
-                        <a:t>258</a:t>
+                        <a:t>255</a:t>
                       </a:r>
                     </a:p>
                   </a:txBody>
@@ -7749,7 +8949,7 @@
                           <a:ea typeface="Arial"/>
                           <a:sym typeface="Arial"/>
                         </a:rPr>
-                        <a:t>34</a:t>
+                        <a:t>36</a:t>
                       </a:r>
                     </a:p>
                   </a:txBody>
@@ -7806,7 +9006,7 @@
                           <a:ea typeface="Arial"/>
                           <a:sym typeface="Arial"/>
                         </a:rPr>
-                        <a:t>26.03%</a:t>
+                        <a:t>25.5%</a:t>
                       </a:r>
                     </a:p>
                   </a:txBody>
@@ -7863,7 +9063,7 @@
                           <a:ea typeface="Arial"/>
                           <a:sym typeface="Arial"/>
                         </a:rPr>
-                        <a:t>13.18%</a:t>
+                        <a:t>14.12%</a:t>
                       </a:r>
                     </a:p>
                   </a:txBody>
@@ -7979,7 +9179,7 @@
                           <a:ea typeface="Arial"/>
                           <a:sym typeface="Arial"/>
                         </a:rPr>
-                        <a:t>834</a:t>
+                        <a:t>709</a:t>
                       </a:r>
                     </a:p>
                   </a:txBody>
@@ -8036,7 +9236,7 @@
                           <a:ea typeface="Arial"/>
                           <a:sym typeface="Arial"/>
                         </a:rPr>
-                        <a:t>156</a:t>
+                        <a:t>159</a:t>
                       </a:r>
                     </a:p>
                   </a:txBody>
@@ -8093,7 +9293,7 @@
                           <a:ea typeface="Arial"/>
                           <a:sym typeface="Arial"/>
                         </a:rPr>
-                        <a:t>23</a:t>
+                        <a:t>26</a:t>
                       </a:r>
                     </a:p>
                   </a:txBody>
@@ -8150,7 +9350,7 @@
                           <a:ea typeface="Arial"/>
                           <a:sym typeface="Arial"/>
                         </a:rPr>
-                        <a:t>18.71%</a:t>
+                        <a:t>22.43%</a:t>
                       </a:r>
                     </a:p>
                   </a:txBody>
@@ -8207,7 +9407,7 @@
                           <a:ea typeface="Arial"/>
                           <a:sym typeface="Arial"/>
                         </a:rPr>
-                        <a:t>14.74%</a:t>
+                        <a:t>16.35%</a:t>
                       </a:r>
                     </a:p>
                   </a:txBody>
@@ -8323,7 +9523,7 @@
                           <a:ea typeface="Arial"/>
                           <a:sym typeface="Arial"/>
                         </a:rPr>
-                        <a:t>465</a:t>
+                        <a:t>244</a:t>
                       </a:r>
                     </a:p>
                   </a:txBody>
@@ -8380,7 +9580,7 @@
                           <a:ea typeface="Arial"/>
                           <a:sym typeface="Arial"/>
                         </a:rPr>
-                        <a:t>29</a:t>
+                        <a:t>25</a:t>
                       </a:r>
                     </a:p>
                   </a:txBody>
@@ -8437,7 +9637,7 @@
                           <a:ea typeface="Arial"/>
                           <a:sym typeface="Arial"/>
                         </a:rPr>
-                        <a:t>24</a:t>
+                        <a:t>20</a:t>
                       </a:r>
                     </a:p>
                   </a:txBody>
@@ -8494,7 +9694,7 @@
                           <a:ea typeface="Arial"/>
                           <a:sym typeface="Arial"/>
                         </a:rPr>
-                        <a:t>6.24%</a:t>
+                        <a:t>10.25%</a:t>
                       </a:r>
                     </a:p>
                   </a:txBody>
@@ -8551,7 +9751,7 @@
                           <a:ea typeface="Arial"/>
                           <a:sym typeface="Arial"/>
                         </a:rPr>
-                        <a:t>82.76%</a:t>
+                        <a:t>80%</a:t>
                       </a:r>
                     </a:p>
                   </a:txBody>
@@ -8667,7 +9867,7 @@
                           <a:ea typeface="Arial"/>
                           <a:sym typeface="Arial"/>
                         </a:rPr>
-                        <a:t>456</a:t>
+                        <a:t>473</a:t>
                       </a:r>
                     </a:p>
                   </a:txBody>
@@ -8724,7 +9924,7 @@
                           <a:ea typeface="Arial"/>
                           <a:sym typeface="Arial"/>
                         </a:rPr>
-                        <a:t>34</a:t>
+                        <a:t>30</a:t>
                       </a:r>
                     </a:p>
                   </a:txBody>
@@ -8838,7 +10038,7 @@
                           <a:ea typeface="Arial"/>
                           <a:sym typeface="Arial"/>
                         </a:rPr>
-                        <a:t>7.46%</a:t>
+                        <a:t>6.34%</a:t>
                       </a:r>
                     </a:p>
                   </a:txBody>
@@ -8895,7 +10095,7 @@
                           <a:ea typeface="Arial"/>
                           <a:sym typeface="Arial"/>
                         </a:rPr>
-                        <a:t>5.88%</a:t>
+                        <a:t>6.67%</a:t>
                       </a:r>
                     </a:p>
                   </a:txBody>
@@ -9011,7 +10211,7 @@
                           <a:ea typeface="Arial"/>
                           <a:sym typeface="Arial"/>
                         </a:rPr>
-                        <a:t>643</a:t>
+                        <a:t>613</a:t>
                       </a:r>
                     </a:p>
                   </a:txBody>
@@ -9068,7 +10268,7 @@
                           <a:ea typeface="Arial"/>
                           <a:sym typeface="Arial"/>
                         </a:rPr>
-                        <a:t>107</a:t>
+                        <a:t>80</a:t>
                       </a:r>
                     </a:p>
                   </a:txBody>
@@ -9113,30 +10313,19 @@
                         </a:spcAft>
                         <a:buNone/>
                       </a:pPr>
-                      <a:endParaRPr cap="none" sz="800" i="0" b="0" u="none">
-                        <a:solidFill>
-                          <a:srgbClr val="000000">
-                            <a:alpha val="100000"/>
-                          </a:srgbClr>
-                        </a:solidFill>
-                        <a:latin typeface="Arial"/>
-                        <a:cs typeface="Arial"/>
-                        <a:ea typeface="Arial"/>
-                        <a:sym typeface="Arial"/>
-                      </a:endParaRPr>
-                      <a:r>
-                        <a:rPr cap="none" sz="800" i="0" b="0" u="none">
-                          <a:solidFill>
-                            <a:srgbClr val="000000">
-                              <a:alpha val="100000"/>
-                            </a:srgbClr>
-                          </a:solidFill>
-                          <a:latin typeface="Arial"/>
-                          <a:cs typeface="Arial"/>
-                          <a:ea typeface="Arial"/>
-                          <a:sym typeface="Arial"/>
-                        </a:rPr>
-                        <a:t/>
+                      <a:r>
+                        <a:rPr cap="none" sz="800" i="0" b="0" u="none">
+                          <a:solidFill>
+                            <a:srgbClr val="000000">
+                              <a:alpha val="100000"/>
+                            </a:srgbClr>
+                          </a:solidFill>
+                          <a:latin typeface="Arial"/>
+                          <a:cs typeface="Arial"/>
+                          <a:ea typeface="Arial"/>
+                          <a:sym typeface="Arial"/>
+                        </a:rPr>
+                        <a:t>2</a:t>
                       </a:r>
                     </a:p>
                   </a:txBody>
@@ -9193,7 +10382,7 @@
                           <a:ea typeface="Arial"/>
                           <a:sym typeface="Arial"/>
                         </a:rPr>
-                        <a:t>16.64%</a:t>
+                        <a:t>13.05%</a:t>
                       </a:r>
                     </a:p>
                   </a:txBody>
@@ -9250,7 +10439,7 @@
                           <a:ea typeface="Arial"/>
                           <a:sym typeface="Arial"/>
                         </a:rPr>
-                        <a:t>NA%</a:t>
+                        <a:t>2.5%</a:t>
                       </a:r>
                     </a:p>
                   </a:txBody>
@@ -9366,7 +10555,7 @@
                           <a:ea typeface="Arial"/>
                           <a:sym typeface="Arial"/>
                         </a:rPr>
-                        <a:t>193</a:t>
+                        <a:t>201</a:t>
                       </a:r>
                     </a:p>
                   </a:txBody>
@@ -9423,7 +10612,7 @@
                           <a:ea typeface="Arial"/>
                           <a:sym typeface="Arial"/>
                         </a:rPr>
-                        <a:t>31</a:t>
+                        <a:t>33</a:t>
                       </a:r>
                     </a:p>
                   </a:txBody>
@@ -9537,7 +10726,7 @@
                           <a:ea typeface="Arial"/>
                           <a:sym typeface="Arial"/>
                         </a:rPr>
-                        <a:t>16.06%</a:t>
+                        <a:t>16.42%</a:t>
                       </a:r>
                     </a:p>
                   </a:txBody>
@@ -9594,7 +10783,7 @@
                           <a:ea typeface="Arial"/>
                           <a:sym typeface="Arial"/>
                         </a:rPr>
-                        <a:t>77.42%</a:t>
+                        <a:t>72.73%</a:t>
                       </a:r>
                     </a:p>
                   </a:txBody>
@@ -9710,7 +10899,7 @@
                           <a:ea typeface="Arial"/>
                           <a:sym typeface="Arial"/>
                         </a:rPr>
-                        <a:t>680</a:t>
+                        <a:t>807</a:t>
                       </a:r>
                     </a:p>
                   </a:txBody>
@@ -9767,7 +10956,7 @@
                           <a:ea typeface="Arial"/>
                           <a:sym typeface="Arial"/>
                         </a:rPr>
-                        <a:t>10</a:t>
+                        <a:t>11</a:t>
                       </a:r>
                     </a:p>
                   </a:txBody>
@@ -9881,7 +11070,7 @@
                           <a:ea typeface="Arial"/>
                           <a:sym typeface="Arial"/>
                         </a:rPr>
-                        <a:t>1.47%</a:t>
+                        <a:t>1.36%</a:t>
                       </a:r>
                     </a:p>
                   </a:txBody>
@@ -9938,7 +11127,7 @@
                           <a:ea typeface="Arial"/>
                           <a:sym typeface="Arial"/>
                         </a:rPr>
-                        <a:t>40%</a:t>
+                        <a:t>36.36%</a:t>
                       </a:r>
                     </a:p>
                   </a:txBody>
@@ -10054,7 +11243,7 @@
                           <a:ea typeface="Arial"/>
                           <a:sym typeface="Arial"/>
                         </a:rPr>
-                        <a:t>278</a:t>
+                        <a:t>277</a:t>
                       </a:r>
                     </a:p>
                   </a:txBody>
@@ -10111,7 +11300,7 @@
                           <a:ea typeface="Arial"/>
                           <a:sym typeface="Arial"/>
                         </a:rPr>
-                        <a:t>52</a:t>
+                        <a:t>57</a:t>
                       </a:r>
                     </a:p>
                   </a:txBody>
@@ -10168,7 +11357,7 @@
                           <a:ea typeface="Arial"/>
                           <a:sym typeface="Arial"/>
                         </a:rPr>
-                        <a:t>35</a:t>
+                        <a:t>33</a:t>
                       </a:r>
                     </a:p>
                   </a:txBody>
@@ -10225,7 +11414,7 @@
                           <a:ea typeface="Arial"/>
                           <a:sym typeface="Arial"/>
                         </a:rPr>
-                        <a:t>18.71%</a:t>
+                        <a:t>20.58%</a:t>
                       </a:r>
                     </a:p>
                   </a:txBody>
@@ -10282,7 +11471,7 @@
                           <a:ea typeface="Arial"/>
                           <a:sym typeface="Arial"/>
                         </a:rPr>
-                        <a:t>67.31%</a:t>
+                        <a:t>57.89%</a:t>
                       </a:r>
                     </a:p>
                   </a:txBody>
@@ -10398,7 +11587,7 @@
                           <a:ea typeface="Arial"/>
                           <a:sym typeface="Arial"/>
                         </a:rPr>
-                        <a:t>501</a:t>
+                        <a:t>498</a:t>
                       </a:r>
                     </a:p>
                   </a:txBody>
@@ -10455,7 +11644,7 @@
                           <a:ea typeface="Arial"/>
                           <a:sym typeface="Arial"/>
                         </a:rPr>
-                        <a:t>99</a:t>
+                        <a:t>95</a:t>
                       </a:r>
                     </a:p>
                   </a:txBody>
@@ -10512,7 +11701,7 @@
                           <a:ea typeface="Arial"/>
                           <a:sym typeface="Arial"/>
                         </a:rPr>
-                        <a:t>75</a:t>
+                        <a:t>68</a:t>
                       </a:r>
                     </a:p>
                   </a:txBody>
@@ -10569,7 +11758,7 @@
                           <a:ea typeface="Arial"/>
                           <a:sym typeface="Arial"/>
                         </a:rPr>
-                        <a:t>19.76%</a:t>
+                        <a:t>19.08%</a:t>
                       </a:r>
                     </a:p>
                   </a:txBody>
@@ -10626,7 +11815,7 @@
                           <a:ea typeface="Arial"/>
                           <a:sym typeface="Arial"/>
                         </a:rPr>
-                        <a:t>75.76%</a:t>
+                        <a:t>71.58%</a:t>
                       </a:r>
                     </a:p>
                   </a:txBody>
@@ -10742,7 +11931,7 @@
                           <a:ea typeface="Arial"/>
                           <a:sym typeface="Arial"/>
                         </a:rPr>
-                        <a:t>78</a:t>
+                        <a:t>126</a:t>
                       </a:r>
                     </a:p>
                   </a:txBody>
@@ -10799,7 +11988,7 @@
                           <a:ea typeface="Arial"/>
                           <a:sym typeface="Arial"/>
                         </a:rPr>
-                        <a:t>15</a:t>
+                        <a:t>27</a:t>
                       </a:r>
                     </a:p>
                   </a:txBody>
@@ -10856,7 +12045,7 @@
                           <a:ea typeface="Arial"/>
                           <a:sym typeface="Arial"/>
                         </a:rPr>
-                        <a:t>9</a:t>
+                        <a:t>20</a:t>
                       </a:r>
                     </a:p>
                   </a:txBody>
@@ -10913,7 +12102,7 @@
                           <a:ea typeface="Arial"/>
                           <a:sym typeface="Arial"/>
                         </a:rPr>
-                        <a:t>19.23%</a:t>
+                        <a:t>21.43%</a:t>
                       </a:r>
                     </a:p>
                   </a:txBody>
@@ -10970,7 +12159,7 @@
                           <a:ea typeface="Arial"/>
                           <a:sym typeface="Arial"/>
                         </a:rPr>
-                        <a:t>60%</a:t>
+                        <a:t>74.07%</a:t>
                       </a:r>
                     </a:p>
                   </a:txBody>
@@ -11090,7 +12279,7 @@
                           <a:ea typeface="Arial"/>
                           <a:sym typeface="Arial"/>
                         </a:rPr>
-                        <a:t>471</a:t>
+                        <a:t>421</a:t>
                       </a:r>
                     </a:p>
                   </a:txBody>
@@ -11151,7 +12340,7 @@
                           <a:ea typeface="Arial"/>
                           <a:sym typeface="Arial"/>
                         </a:rPr>
-                        <a:t>94</a:t>
+                        <a:t>89</a:t>
                       </a:r>
                     </a:p>
                   </a:txBody>
@@ -11212,7 +12401,7 @@
                           <a:ea typeface="Arial"/>
                           <a:sym typeface="Arial"/>
                         </a:rPr>
-                        <a:t>13</a:t>
+                        <a:t>17</a:t>
                       </a:r>
                     </a:p>
                   </a:txBody>
@@ -11273,7 +12462,7 @@
                           <a:ea typeface="Arial"/>
                           <a:sym typeface="Arial"/>
                         </a:rPr>
-                        <a:t>19.96%</a:t>
+                        <a:t>21.14%</a:t>
                       </a:r>
                     </a:p>
                   </a:txBody>
@@ -11334,7 +12523,7 @@
                           <a:ea typeface="Arial"/>
                           <a:sym typeface="Arial"/>
                         </a:rPr>
-                        <a:t>13.83%</a:t>
+                        <a:t>19.1%</a:t>
                       </a:r>
                     </a:p>
                   </a:txBody>
@@ -11750,18 +12939,24 @@
       </p:grpSpPr>
       <p:sp>
         <p:nvSpPr>
-          <p:cNvPr id="2" name="Title 1"/>
+          <p:cNvPr id="2" name="Title 1">
+            <a:extLst>
+              <a:ext uri="{FF2B5EF4-FFF2-40B4-BE49-F238E27FC236}">
+                <a16:creationId xmlns:a16="http://schemas.microsoft.com/office/drawing/2014/main" id="{E4048048-D19C-FCF2-EEF1-69C60400FEDC}"/>
+              </a:ext>
+            </a:extLst>
+          </p:cNvPr>
           <p:cNvSpPr>
             <a:spLocks noGrp="1"/>
           </p:cNvSpPr>
           <p:nvPr>
-            <p:ph type="title"/>
+            <p:ph hasCustomPrompt="1" type="title"/>
           </p:nvPr>
         </p:nvSpPr>
         <p:spPr>
           <a:xfrm>
-            <a:off x="722313" y="3305176"/>
-            <a:ext cx="7772400" cy="1021556"/>
+            <a:off x="623887" y="1282304"/>
+            <a:ext cx="7548563" cy="2210990"/>
           </a:xfrm>
         </p:spPr>
         <p:txBody>
@@ -11773,7 +12968,7 @@
             </a:pPr>
             <a:r>
               <a:rPr/>
-              <a:t>Student Group Details</a:t>
+              <a:t>2025 Student Group Details</a:t>
             </a:r>
           </a:p>
         </p:txBody>
@@ -11802,12 +12997,18 @@
       </p:grpSpPr>
       <p:sp>
         <p:nvSpPr>
-          <p:cNvPr id="2" name="Title 1"/>
+          <p:cNvPr id="2" name="Title 1">
+            <a:extLst>
+              <a:ext uri="{FF2B5EF4-FFF2-40B4-BE49-F238E27FC236}">
+                <a16:creationId xmlns:a16="http://schemas.microsoft.com/office/drawing/2014/main" id="{2DEB43F4-64B6-7152-A0ED-E3A60DA1F14B}"/>
+              </a:ext>
+            </a:extLst>
+          </p:cNvPr>
           <p:cNvSpPr>
             <a:spLocks noGrp="1"/>
           </p:cNvSpPr>
           <p:nvPr>
-            <p:ph type="title"/>
+            <p:ph hasCustomPrompt="1" type="title"/>
           </p:nvPr>
         </p:nvSpPr>
         <p:spPr/>
@@ -11827,7 +13028,7 @@
       </p:sp>
       <p:pic>
         <p:nvPicPr>
-          <p:cNvPr descr="dashboard-cell-key-CDE-change%20CSI.png" id="0" name="Picture 1"/>
+          <p:cNvPr descr="../images/dashboard-cell-key-CDE-change%20CSI.png" id="0" name="Picture 1"/>
           <p:cNvPicPr>
             <a:picLocks noGrp="1" noChangeAspect="1"/>
           </p:cNvPicPr>
@@ -11841,8 +13042,8 @@
         </p:blipFill>
         <p:spPr bwMode="auto">
           <a:xfrm>
-            <a:off x="457200" y="1485900"/>
-            <a:ext cx="8229600" cy="2819400"/>
+            <a:off x="241300" y="1435100"/>
+            <a:ext cx="7912100" cy="2705100"/>
           </a:xfrm>
           <a:prstGeom prst="rect">
             <a:avLst/>
@@ -11879,12 +13080,18 @@
       </p:grpSpPr>
       <p:sp>
         <p:nvSpPr>
-          <p:cNvPr id="2" name="Title 1"/>
+          <p:cNvPr id="2" name="Title 1">
+            <a:extLst>
+              <a:ext uri="{FF2B5EF4-FFF2-40B4-BE49-F238E27FC236}">
+                <a16:creationId xmlns:a16="http://schemas.microsoft.com/office/drawing/2014/main" id="{2DEB43F4-64B6-7152-A0ED-E3A60DA1F14B}"/>
+              </a:ext>
+            </a:extLst>
+          </p:cNvPr>
           <p:cNvSpPr>
             <a:spLocks noGrp="1"/>
           </p:cNvSpPr>
           <p:nvPr>
-            <p:ph type="title"/>
+            <p:ph hasCustomPrompt="1" type="title"/>
           </p:nvPr>
         </p:nvSpPr>
         <p:spPr/>
@@ -11897,7 +13104,7 @@
             </a:pPr>
             <a:r>
               <a:rPr/>
-              <a:t>All Students</a:t>
+              <a:t>2025 All Students</a:t>
             </a:r>
           </a:p>
         </p:txBody>
@@ -11918,8 +13125,8 @@
         </p:blipFill>
         <p:spPr bwMode="auto">
           <a:xfrm>
-            <a:off x="1181100" y="1193800"/>
-            <a:ext cx="6781800" cy="3390900"/>
+            <a:off x="1041400" y="1219200"/>
+            <a:ext cx="6299200" cy="3149600"/>
           </a:xfrm>
           <a:prstGeom prst="rect">
             <a:avLst/>
@@ -11956,12 +13163,18 @@
       </p:grpSpPr>
       <p:sp>
         <p:nvSpPr>
-          <p:cNvPr id="2" name="Title 1"/>
+          <p:cNvPr id="2" name="Title 1">
+            <a:extLst>
+              <a:ext uri="{FF2B5EF4-FFF2-40B4-BE49-F238E27FC236}">
+                <a16:creationId xmlns:a16="http://schemas.microsoft.com/office/drawing/2014/main" id="{2DEB43F4-64B6-7152-A0ED-E3A60DA1F14B}"/>
+              </a:ext>
+            </a:extLst>
+          </p:cNvPr>
           <p:cNvSpPr>
             <a:spLocks noGrp="1"/>
           </p:cNvSpPr>
           <p:nvPr>
-            <p:ph type="title"/>
+            <p:ph hasCustomPrompt="1" type="title"/>
           </p:nvPr>
         </p:nvSpPr>
         <p:spPr/>
@@ -11974,7 +13187,7 @@
             </a:pPr>
             <a:r>
               <a:rPr/>
-              <a:t>Students with disabilities</a:t>
+              <a:t>2025 Students with disabilities</a:t>
             </a:r>
           </a:p>
         </p:txBody>
@@ -11995,8 +13208,8 @@
         </p:blipFill>
         <p:spPr bwMode="auto">
           <a:xfrm>
-            <a:off x="1181100" y="1193800"/>
-            <a:ext cx="6781800" cy="3390900"/>
+            <a:off x="1041400" y="1219200"/>
+            <a:ext cx="6299200" cy="3149600"/>
           </a:xfrm>
           <a:prstGeom prst="rect">
             <a:avLst/>
@@ -12033,18 +13246,24 @@
       </p:grpSpPr>
       <p:sp>
         <p:nvSpPr>
-          <p:cNvPr id="2" name="Title 1"/>
+          <p:cNvPr id="2" name="Title 1">
+            <a:extLst>
+              <a:ext uri="{FF2B5EF4-FFF2-40B4-BE49-F238E27FC236}">
+                <a16:creationId xmlns:a16="http://schemas.microsoft.com/office/drawing/2014/main" id="{E4048048-D19C-FCF2-EEF1-69C60400FEDC}"/>
+              </a:ext>
+            </a:extLst>
+          </p:cNvPr>
           <p:cNvSpPr>
             <a:spLocks noGrp="1"/>
           </p:cNvSpPr>
           <p:nvPr>
-            <p:ph type="title"/>
+            <p:ph hasCustomPrompt="1" type="title"/>
           </p:nvPr>
         </p:nvSpPr>
         <p:spPr>
           <a:xfrm>
-            <a:off x="722313" y="3305176"/>
-            <a:ext cx="7772400" cy="1021556"/>
+            <a:off x="623887" y="1282304"/>
+            <a:ext cx="7548563" cy="2210990"/>
           </a:xfrm>
         </p:spPr>
         <p:txBody>
@@ -12056,7 +13275,7 @@
             </a:pPr>
             <a:r>
               <a:rPr/>
-              <a:t>Solano County Dashboard Overview</a:t>
+              <a:t>Solano County Dashboard Overview 2025</a:t>
             </a:r>
           </a:p>
         </p:txBody>
@@ -12085,12 +13304,18 @@
       </p:grpSpPr>
       <p:sp>
         <p:nvSpPr>
-          <p:cNvPr id="2" name="Title 1"/>
+          <p:cNvPr id="2" name="Title 1">
+            <a:extLst>
+              <a:ext uri="{FF2B5EF4-FFF2-40B4-BE49-F238E27FC236}">
+                <a16:creationId xmlns:a16="http://schemas.microsoft.com/office/drawing/2014/main" id="{2DEB43F4-64B6-7152-A0ED-E3A60DA1F14B}"/>
+              </a:ext>
+            </a:extLst>
+          </p:cNvPr>
           <p:cNvSpPr>
             <a:spLocks noGrp="1"/>
           </p:cNvSpPr>
           <p:nvPr>
-            <p:ph type="title"/>
+            <p:ph hasCustomPrompt="1" type="title"/>
           </p:nvPr>
         </p:nvSpPr>
         <p:spPr/>
@@ -12103,14 +13328,14 @@
             </a:pPr>
             <a:r>
               <a:rPr/>
-              <a:t>English Learners</a:t>
+              <a:t>2025 Foster</a:t>
             </a:r>
           </a:p>
         </p:txBody>
       </p:sp>
       <p:pic>
         <p:nvPicPr>
-          <p:cNvPr descr="dashboard_summary_files/figure-pptx/el-1.png" id="0" name="Picture 1"/>
+          <p:cNvPr descr="dashboard_summary_files/figure-pptx/foster-1.png" id="0" name="Picture 1"/>
           <p:cNvPicPr>
             <a:picLocks noGrp="1" noChangeAspect="1"/>
           </p:cNvPicPr>
@@ -12124,8 +13349,8 @@
         </p:blipFill>
         <p:spPr bwMode="auto">
           <a:xfrm>
-            <a:off x="1181100" y="1193800"/>
-            <a:ext cx="6781800" cy="3390900"/>
+            <a:off x="1041400" y="1219200"/>
+            <a:ext cx="6299200" cy="3149600"/>
           </a:xfrm>
           <a:prstGeom prst="rect">
             <a:avLst/>
@@ -12162,12 +13387,18 @@
       </p:grpSpPr>
       <p:sp>
         <p:nvSpPr>
-          <p:cNvPr id="2" name="Title 1"/>
+          <p:cNvPr id="2" name="Title 1">
+            <a:extLst>
+              <a:ext uri="{FF2B5EF4-FFF2-40B4-BE49-F238E27FC236}">
+                <a16:creationId xmlns:a16="http://schemas.microsoft.com/office/drawing/2014/main" id="{2DEB43F4-64B6-7152-A0ED-E3A60DA1F14B}"/>
+              </a:ext>
+            </a:extLst>
+          </p:cNvPr>
           <p:cNvSpPr>
             <a:spLocks noGrp="1"/>
           </p:cNvSpPr>
           <p:nvPr>
-            <p:ph type="title"/>
+            <p:ph hasCustomPrompt="1" type="title"/>
           </p:nvPr>
         </p:nvSpPr>
         <p:spPr/>
@@ -12180,14 +13411,14 @@
             </a:pPr>
             <a:r>
               <a:rPr/>
-              <a:t>Long-Term English Learners</a:t>
+              <a:t>2025 English Learners</a:t>
             </a:r>
           </a:p>
         </p:txBody>
       </p:sp>
       <p:pic>
         <p:nvPicPr>
-          <p:cNvPr descr="dashboard_summary_files/figure-pptx/ltel-1.png" id="0" name="Picture 1"/>
+          <p:cNvPr descr="dashboard_summary_files/figure-pptx/el-1.png" id="0" name="Picture 1"/>
           <p:cNvPicPr>
             <a:picLocks noGrp="1" noChangeAspect="1"/>
           </p:cNvPicPr>
@@ -12201,8 +13432,8 @@
         </p:blipFill>
         <p:spPr bwMode="auto">
           <a:xfrm>
-            <a:off x="1181100" y="1193800"/>
-            <a:ext cx="6781800" cy="3390900"/>
+            <a:off x="1041400" y="1219200"/>
+            <a:ext cx="6299200" cy="3149600"/>
           </a:xfrm>
           <a:prstGeom prst="rect">
             <a:avLst/>
@@ -12239,12 +13470,18 @@
       </p:grpSpPr>
       <p:sp>
         <p:nvSpPr>
-          <p:cNvPr id="2" name="Title 1"/>
+          <p:cNvPr id="2" name="Title 1">
+            <a:extLst>
+              <a:ext uri="{FF2B5EF4-FFF2-40B4-BE49-F238E27FC236}">
+                <a16:creationId xmlns:a16="http://schemas.microsoft.com/office/drawing/2014/main" id="{2DEB43F4-64B6-7152-A0ED-E3A60DA1F14B}"/>
+              </a:ext>
+            </a:extLst>
+          </p:cNvPr>
           <p:cNvSpPr>
             <a:spLocks noGrp="1"/>
           </p:cNvSpPr>
           <p:nvPr>
-            <p:ph type="title"/>
+            <p:ph hasCustomPrompt="1" type="title"/>
           </p:nvPr>
         </p:nvSpPr>
         <p:spPr/>
@@ -12257,14 +13494,14 @@
             </a:pPr>
             <a:r>
               <a:rPr/>
-              <a:t>Black/African American</a:t>
+              <a:t>2025 Long-Term English Learners</a:t>
             </a:r>
           </a:p>
         </p:txBody>
       </p:sp>
       <p:pic>
         <p:nvPicPr>
-          <p:cNvPr descr="dashboard_summary_files/figure-pptx/aa-1.png" id="0" name="Picture 1"/>
+          <p:cNvPr descr="dashboard_summary_files/figure-pptx/ltel-1.png" id="0" name="Picture 1"/>
           <p:cNvPicPr>
             <a:picLocks noGrp="1" noChangeAspect="1"/>
           </p:cNvPicPr>
@@ -12278,8 +13515,8 @@
         </p:blipFill>
         <p:spPr bwMode="auto">
           <a:xfrm>
-            <a:off x="1181100" y="1193800"/>
-            <a:ext cx="6781800" cy="3390900"/>
+            <a:off x="1041400" y="1219200"/>
+            <a:ext cx="6299200" cy="3149600"/>
           </a:xfrm>
           <a:prstGeom prst="rect">
             <a:avLst/>
@@ -12314,36 +13551,62 @@
           <a:chExt cx="0" cy="0"/>
         </a:xfrm>
       </p:grpSpPr>
-      <p:pic>
-        <p:nvPicPr>
-          <p:cNvPr descr="dashboard_summary_files/figure-pptx/aa_anonmyized-1.png" id="0" name="Picture 1"/>
-          <p:cNvPicPr>
-            <a:picLocks noGrp="1" noChangeAspect="1"/>
-          </p:cNvPicPr>
-          <p:nvPr/>
-        </p:nvPicPr>
-        <p:blipFill>
-          <a:blip r:embed="rId2"/>
-          <a:stretch>
-            <a:fillRect/>
-          </a:stretch>
-        </p:blipFill>
-        <p:spPr bwMode="auto">
-          <a:xfrm>
-            <a:off x="1181100" y="1193800"/>
-            <a:ext cx="6781800" cy="3390900"/>
-          </a:xfrm>
-          <a:prstGeom prst="rect">
-            <a:avLst/>
-          </a:prstGeom>
-          <a:noFill/>
-          <a:ln w="9525">
-            <a:noFill/>
-            <a:headEnd/>
-            <a:tailEnd/>
-          </a:ln>
-        </p:spPr>
-      </p:pic>
+      <p:sp>
+        <p:nvSpPr>
+          <p:cNvPr id="3" name="Content Placeholder 2">
+            <a:extLst>
+              <a:ext uri="{FF2B5EF4-FFF2-40B4-BE49-F238E27FC236}">
+                <a16:creationId xmlns:a16="http://schemas.microsoft.com/office/drawing/2014/main" id="{05EBDBDD-1506-E6EB-08B3-3B4E995DE2B3}"/>
+              </a:ext>
+            </a:extLst>
+          </p:cNvPr>
+          <p:cNvSpPr>
+            <a:spLocks noGrp="1"/>
+          </p:cNvSpPr>
+          <p:nvPr>
+            <p:ph hasCustomPrompt="1" idx="1"/>
+          </p:nvPr>
+        </p:nvSpPr>
+        <p:spPr/>
+        <p:txBody>
+          <a:bodyPr/>
+          <a:lstStyle/>
+          <a:p>
+            <a:pPr lvl="0" indent="0" marL="0">
+              <a:spcBef>
+                <a:spcPts val="3000"/>
+              </a:spcBef>
+              <a:buNone/>
+            </a:pPr>
+            <a:r>
+              <a:rPr b="1"/>
+              <a:t>2025 Black/African American</a:t>
+            </a:r>
+          </a:p>
+          <a:p>
+            <a:pPr lvl="0" indent="0" marL="0">
+              <a:buNone/>
+            </a:pPr>
+          </a:p>
+          <a:p>
+            <a:pPr lvl="0" indent="0" marL="0">
+              <a:spcBef>
+                <a:spcPts val="3000"/>
+              </a:spcBef>
+              <a:buNone/>
+            </a:pPr>
+            <a:r>
+              <a:rPr b="1"/>
+              <a:t>2025 Black/African American (Anonymized)</a:t>
+            </a:r>
+          </a:p>
+          <a:p>
+            <a:pPr lvl="0" indent="0" marL="0">
+              <a:buNone/>
+            </a:pPr>
+          </a:p>
+        </p:txBody>
+      </p:sp>
     </p:spTree>
   </p:cSld>
 </p:sld>
@@ -12368,12 +13631,18 @@
       </p:grpSpPr>
       <p:sp>
         <p:nvSpPr>
-          <p:cNvPr id="2" name="Title 1"/>
+          <p:cNvPr id="2" name="Title 1">
+            <a:extLst>
+              <a:ext uri="{FF2B5EF4-FFF2-40B4-BE49-F238E27FC236}">
+                <a16:creationId xmlns:a16="http://schemas.microsoft.com/office/drawing/2014/main" id="{2DEB43F4-64B6-7152-A0ED-E3A60DA1F14B}"/>
+              </a:ext>
+            </a:extLst>
+          </p:cNvPr>
           <p:cNvSpPr>
             <a:spLocks noGrp="1"/>
           </p:cNvSpPr>
           <p:nvPr>
-            <p:ph type="title"/>
+            <p:ph hasCustomPrompt="1" type="title"/>
           </p:nvPr>
         </p:nvSpPr>
         <p:spPr/>
@@ -12386,7 +13655,7 @@
             </a:pPr>
             <a:r>
               <a:rPr/>
-              <a:t>Homeless Youth</a:t>
+              <a:t>2025 Homeless Youth</a:t>
             </a:r>
           </a:p>
         </p:txBody>
@@ -12407,8 +13676,8 @@
         </p:blipFill>
         <p:spPr bwMode="auto">
           <a:xfrm>
-            <a:off x="1181100" y="1193800"/>
-            <a:ext cx="6781800" cy="3390900"/>
+            <a:off x="1041400" y="1219200"/>
+            <a:ext cx="6299200" cy="3149600"/>
           </a:xfrm>
           <a:prstGeom prst="rect">
             <a:avLst/>
@@ -12445,12 +13714,18 @@
       </p:grpSpPr>
       <p:sp>
         <p:nvSpPr>
-          <p:cNvPr id="2" name="Title 1"/>
+          <p:cNvPr id="2" name="Title 1">
+            <a:extLst>
+              <a:ext uri="{FF2B5EF4-FFF2-40B4-BE49-F238E27FC236}">
+                <a16:creationId xmlns:a16="http://schemas.microsoft.com/office/drawing/2014/main" id="{2DEB43F4-64B6-7152-A0ED-E3A60DA1F14B}"/>
+              </a:ext>
+            </a:extLst>
+          </p:cNvPr>
           <p:cNvSpPr>
             <a:spLocks noGrp="1"/>
           </p:cNvSpPr>
           <p:nvPr>
-            <p:ph type="title"/>
+            <p:ph hasCustomPrompt="1" type="title"/>
           </p:nvPr>
         </p:nvSpPr>
         <p:spPr/>
@@ -12470,7 +13745,7 @@
       </p:sp>
       <p:pic>
         <p:nvPicPr>
-          <p:cNvPr descr="CDE%20Colors.png" id="0" name="Picture 1"/>
+          <p:cNvPr descr="../images/CDE%20Colors.png" id="0" name="Picture 1"/>
           <p:cNvPicPr>
             <a:picLocks noGrp="1" noChangeAspect="1"/>
           </p:cNvPicPr>
@@ -12484,8 +13759,8 @@
         </p:blipFill>
         <p:spPr bwMode="auto">
           <a:xfrm>
-            <a:off x="457200" y="1943100"/>
-            <a:ext cx="8229600" cy="1397000"/>
+            <a:off x="241300" y="1866900"/>
+            <a:ext cx="7912100" cy="1346200"/>
           </a:xfrm>
           <a:prstGeom prst="rect">
             <a:avLst/>
@@ -12506,8 +13781,8 @@
         </p:nvSpPr>
         <p:spPr>
           <a:xfrm>
-            <a:off x="457200" y="4076700"/>
-            <a:ext cx="8229600" cy="508000"/>
+            <a:off x="241300" y="3860800"/>
+            <a:ext cx="7912100" cy="508000"/>
           </a:xfrm>
           <a:prstGeom prst="rect">
             <a:avLst/>
@@ -12552,12 +13827,18 @@
       </p:grpSpPr>
       <p:sp>
         <p:nvSpPr>
-          <p:cNvPr id="2" name="Title 1"/>
+          <p:cNvPr id="2" name="Title 1">
+            <a:extLst>
+              <a:ext uri="{FF2B5EF4-FFF2-40B4-BE49-F238E27FC236}">
+                <a16:creationId xmlns:a16="http://schemas.microsoft.com/office/drawing/2014/main" id="{2DEB43F4-64B6-7152-A0ED-E3A60DA1F14B}"/>
+              </a:ext>
+            </a:extLst>
+          </p:cNvPr>
           <p:cNvSpPr>
             <a:spLocks noGrp="1"/>
           </p:cNvSpPr>
           <p:nvPr>
-            <p:ph type="title"/>
+            <p:ph hasCustomPrompt="1" type="title"/>
           </p:nvPr>
         </p:nvSpPr>
         <p:spPr/>
@@ -12570,14 +13851,14 @@
             </a:pPr>
             <a:r>
               <a:rPr/>
-              <a:t>District Indicator Colors</a:t>
+              <a:t>2025 District Indicator Colors</a:t>
             </a:r>
           </a:p>
         </p:txBody>
       </p:sp>
       <p:graphicFrame xmlns:a="http://schemas.openxmlformats.org/drawingml/2006/main" xmlns:r="http://schemas.openxmlformats.org/officeDocument/2006/relationships" xmlns:p="http://schemas.openxmlformats.org/presentationml/2006/main">
         <p:nvGraphicFramePr>
-          <p:cNvPr id="83332686" name=""/>
+          <p:cNvPr id="621875521" name=""/>
           <p:cNvGraphicFramePr>
             <a:graphicFrameLocks noGrp="true"/>
           </p:cNvGraphicFramePr>
@@ -13612,7 +14893,7 @@
                           <a:ea typeface="Arial"/>
                           <a:sym typeface="Arial"/>
                         </a:rPr>
-                        <a:t>30</a:t>
+                        <a:t>50</a:t>
                       </a:r>
                     </a:p>
                   </a:txBody>
@@ -13669,7 +14950,7 @@
                           <a:ea typeface="Arial"/>
                           <a:sym typeface="Arial"/>
                         </a:rPr>
-                        <a:t>3</a:t>
+                        <a:t>1</a:t>
                       </a:r>
                     </a:p>
                   </a:txBody>
@@ -13726,7 +15007,7 @@
                           <a:ea typeface="Arial"/>
                           <a:sym typeface="Arial"/>
                         </a:rPr>
-                        <a:t>12</a:t>
+                        <a:t>11</a:t>
                       </a:r>
                     </a:p>
                   </a:txBody>
@@ -13783,7 +15064,7 @@
                           <a:ea typeface="Arial"/>
                           <a:sym typeface="Arial"/>
                         </a:rPr>
-                        <a:t>24</a:t>
+                        <a:t>21</a:t>
                       </a:r>
                     </a:p>
                   </a:txBody>
@@ -13840,7 +15121,7 @@
                           <a:ea typeface="Arial"/>
                           <a:sym typeface="Arial"/>
                         </a:rPr>
-                        <a:t>18</a:t>
+                        <a:t>27</a:t>
                       </a:r>
                     </a:p>
                   </a:txBody>
@@ -13897,7 +15178,7 @@
                           <a:ea typeface="Arial"/>
                           <a:sym typeface="Arial"/>
                         </a:rPr>
-                        <a:t>7</a:t>
+                        <a:t>9</a:t>
                       </a:r>
                     </a:p>
                   </a:txBody>
@@ -14013,7 +15294,7 @@
                           <a:ea typeface="Arial"/>
                           <a:sym typeface="Arial"/>
                         </a:rPr>
-                        <a:t>33</a:t>
+                        <a:t>51</a:t>
                       </a:r>
                     </a:p>
                   </a:txBody>
@@ -14070,7 +15351,7 @@
                           <a:ea typeface="Arial"/>
                           <a:sym typeface="Arial"/>
                         </a:rPr>
-                        <a:t>7</a:t>
+                        <a:t>11</a:t>
                       </a:r>
                     </a:p>
                   </a:txBody>
@@ -14127,7 +15408,7 @@
                           <a:ea typeface="Arial"/>
                           <a:sym typeface="Arial"/>
                         </a:rPr>
-                        <a:t>32</a:t>
+                        <a:t>23</a:t>
                       </a:r>
                     </a:p>
                   </a:txBody>
@@ -14184,7 +15465,7 @@
                           <a:ea typeface="Arial"/>
                           <a:sym typeface="Arial"/>
                         </a:rPr>
-                        <a:t>14</a:t>
+                        <a:t>21</a:t>
                       </a:r>
                     </a:p>
                   </a:txBody>
@@ -14241,7 +15522,7 @@
                           <a:ea typeface="Arial"/>
                           <a:sym typeface="Arial"/>
                         </a:rPr>
-                        <a:t>9</a:t>
+                        <a:t>11</a:t>
                       </a:r>
                     </a:p>
                   </a:txBody>
@@ -14298,7 +15579,7 @@
                           <a:ea typeface="Arial"/>
                           <a:sym typeface="Arial"/>
                         </a:rPr>
-                        <a:t>1</a:t>
+                        <a:t>5</a:t>
                       </a:r>
                     </a:p>
                   </a:txBody>
@@ -14414,7 +15695,7 @@
                           <a:ea typeface="Arial"/>
                           <a:sym typeface="Arial"/>
                         </a:rPr>
-                        <a:t>8</a:t>
+                        <a:t>24</a:t>
                       </a:r>
                     </a:p>
                   </a:txBody>
@@ -14471,7 +15752,7 @@
                           <a:ea typeface="Arial"/>
                           <a:sym typeface="Arial"/>
                         </a:rPr>
-                        <a:t>19</a:t>
+                        <a:t>11</a:t>
                       </a:r>
                     </a:p>
                   </a:txBody>
@@ -14528,7 +15809,7 @@
                           <a:ea typeface="Arial"/>
                           <a:sym typeface="Arial"/>
                         </a:rPr>
-                        <a:t>23</a:t>
+                        <a:t>38</a:t>
                       </a:r>
                     </a:p>
                   </a:txBody>
@@ -14585,7 +15866,7 @@
                           <a:ea typeface="Arial"/>
                           <a:sym typeface="Arial"/>
                         </a:rPr>
-                        <a:t>27</a:t>
+                        <a:t>22</a:t>
                       </a:r>
                     </a:p>
                   </a:txBody>
@@ -14642,7 +15923,7 @@
                           <a:ea typeface="Arial"/>
                           <a:sym typeface="Arial"/>
                         </a:rPr>
-                        <a:t>16</a:t>
+                        <a:t>24</a:t>
                       </a:r>
                     </a:p>
                   </a:txBody>
@@ -14815,7 +16096,7 @@
                           <a:ea typeface="Arial"/>
                           <a:sym typeface="Arial"/>
                         </a:rPr>
-                        <a:t>64</a:t>
+                        <a:t>93</a:t>
                       </a:r>
                     </a:p>
                   </a:txBody>
@@ -14872,7 +16153,7 @@
                           <a:ea typeface="Arial"/>
                           <a:sym typeface="Arial"/>
                         </a:rPr>
-                        <a:t>4</a:t>
+                        <a:t>2</a:t>
                       </a:r>
                     </a:p>
                   </a:txBody>
@@ -14929,7 +16210,7 @@
                           <a:ea typeface="Arial"/>
                           <a:sym typeface="Arial"/>
                         </a:rPr>
-                        <a:t>0</a:t>
+                        <a:t>2</a:t>
                       </a:r>
                     </a:p>
                   </a:txBody>
@@ -14986,7 +16267,7 @@
                           <a:ea typeface="Arial"/>
                           <a:sym typeface="Arial"/>
                         </a:rPr>
-                        <a:t>1</a:t>
+                        <a:t>0</a:t>
                       </a:r>
                     </a:p>
                   </a:txBody>
@@ -15043,7 +16324,7 @@
                           <a:ea typeface="Arial"/>
                           <a:sym typeface="Arial"/>
                         </a:rPr>
-                        <a:t>2</a:t>
+                        <a:t>0</a:t>
                       </a:r>
                     </a:p>
                   </a:txBody>
@@ -15100,7 +16381,7 @@
                           <a:ea typeface="Arial"/>
                           <a:sym typeface="Arial"/>
                         </a:rPr>
-                        <a:t>4</a:t>
+                        <a:t>8</a:t>
                       </a:r>
                     </a:p>
                   </a:txBody>
@@ -15216,7 +16497,7 @@
                           <a:ea typeface="Arial"/>
                           <a:sym typeface="Arial"/>
                         </a:rPr>
-                        <a:t>33</a:t>
+                        <a:t>44</a:t>
                       </a:r>
                     </a:p>
                   </a:txBody>
@@ -15330,7 +16611,7 @@
                           <a:ea typeface="Arial"/>
                           <a:sym typeface="Arial"/>
                         </a:rPr>
-                        <a:t>26</a:t>
+                        <a:t>15</a:t>
                       </a:r>
                     </a:p>
                   </a:txBody>
@@ -15387,7 +16668,7 @@
                           <a:ea typeface="Arial"/>
                           <a:sym typeface="Arial"/>
                         </a:rPr>
-                        <a:t>13</a:t>
+                        <a:t>22</a:t>
                       </a:r>
                     </a:p>
                   </a:txBody>
@@ -15444,7 +16725,7 @@
                           <a:ea typeface="Arial"/>
                           <a:sym typeface="Arial"/>
                         </a:rPr>
-                        <a:t>12</a:t>
+                        <a:t>21</a:t>
                       </a:r>
                     </a:p>
                   </a:txBody>
@@ -15501,7 +16782,7 @@
                           <a:ea typeface="Arial"/>
                           <a:sym typeface="Arial"/>
                         </a:rPr>
-                        <a:t>8</a:t>
+                        <a:t>14</a:t>
                       </a:r>
                     </a:p>
                   </a:txBody>
@@ -15617,7 +16898,7 @@
                           <a:ea typeface="Arial"/>
                           <a:sym typeface="Arial"/>
                         </a:rPr>
-                        <a:t>13</a:t>
+                        <a:t>31</a:t>
                       </a:r>
                     </a:p>
                   </a:txBody>
@@ -15674,7 +16955,7 @@
                           <a:ea typeface="Arial"/>
                           <a:sym typeface="Arial"/>
                         </a:rPr>
-                        <a:t>14</a:t>
+                        <a:t>11</a:t>
                       </a:r>
                     </a:p>
                   </a:txBody>
@@ -15731,7 +17012,7 @@
                           <a:ea typeface="Arial"/>
                           <a:sym typeface="Arial"/>
                         </a:rPr>
-                        <a:t>30</a:t>
+                        <a:t>25</a:t>
                       </a:r>
                     </a:p>
                   </a:txBody>
@@ -15788,7 +17069,7 @@
                           <a:ea typeface="Arial"/>
                           <a:sym typeface="Arial"/>
                         </a:rPr>
-                        <a:t>21</a:t>
+                        <a:t>33</a:t>
                       </a:r>
                     </a:p>
                   </a:txBody>
@@ -15845,7 +17126,7 @@
                           <a:ea typeface="Arial"/>
                           <a:sym typeface="Arial"/>
                         </a:rPr>
-                        <a:t>16</a:t>
+                        <a:t>15</a:t>
                       </a:r>
                     </a:p>
                   </a:txBody>
@@ -15902,7 +17183,7 @@
                           <a:ea typeface="Arial"/>
                           <a:sym typeface="Arial"/>
                         </a:rPr>
-                        <a:t>2</a:t>
+                        <a:t>7</a:t>
                       </a:r>
                     </a:p>
                   </a:txBody>
@@ -16022,7 +17303,7 @@
                           <a:ea typeface="Arial"/>
                           <a:sym typeface="Arial"/>
                         </a:rPr>
-                        <a:t>14</a:t>
+                        <a:t>32</a:t>
                       </a:r>
                     </a:p>
                   </a:txBody>
@@ -16083,7 +17364,7 @@
                           <a:ea typeface="Arial"/>
                           <a:sym typeface="Arial"/>
                         </a:rPr>
-                        <a:t>23</a:t>
+                        <a:t>22</a:t>
                       </a:r>
                     </a:p>
                   </a:txBody>
@@ -16144,7 +17425,7 @@
                           <a:ea typeface="Arial"/>
                           <a:sym typeface="Arial"/>
                         </a:rPr>
-                        <a:t>28</a:t>
+                        <a:t>32</a:t>
                       </a:r>
                     </a:p>
                   </a:txBody>
@@ -16205,7 +17486,7 @@
                           <a:ea typeface="Arial"/>
                           <a:sym typeface="Arial"/>
                         </a:rPr>
-                        <a:t>24</a:t>
+                        <a:t>30</a:t>
                       </a:r>
                     </a:p>
                   </a:txBody>
@@ -16266,7 +17547,7 @@
                           <a:ea typeface="Arial"/>
                           <a:sym typeface="Arial"/>
                         </a:rPr>
-                        <a:t>7</a:t>
+                        <a:t>6</a:t>
                       </a:r>
                     </a:p>
                   </a:txBody>
@@ -16388,12 +17669,18 @@
       </p:grpSpPr>
       <p:sp>
         <p:nvSpPr>
-          <p:cNvPr id="2" name="Title 1"/>
+          <p:cNvPr id="2" name="Title 1">
+            <a:extLst>
+              <a:ext uri="{FF2B5EF4-FFF2-40B4-BE49-F238E27FC236}">
+                <a16:creationId xmlns:a16="http://schemas.microsoft.com/office/drawing/2014/main" id="{2DEB43F4-64B6-7152-A0ED-E3A60DA1F14B}"/>
+              </a:ext>
+            </a:extLst>
+          </p:cNvPr>
           <p:cNvSpPr>
             <a:spLocks noGrp="1"/>
           </p:cNvSpPr>
           <p:nvPr>
-            <p:ph type="title"/>
+            <p:ph hasCustomPrompt="1" type="title"/>
           </p:nvPr>
         </p:nvSpPr>
         <p:spPr/>
@@ -16406,14 +17693,14 @@
             </a:pPr>
             <a:r>
               <a:rPr/>
-              <a:t>Charter Indicator Colors</a:t>
+              <a:t>2025 Charter Indicator Colors</a:t>
             </a:r>
           </a:p>
         </p:txBody>
       </p:sp>
       <p:graphicFrame xmlns:a="http://schemas.openxmlformats.org/drawingml/2006/main" xmlns:r="http://schemas.openxmlformats.org/officeDocument/2006/relationships" xmlns:p="http://schemas.openxmlformats.org/presentationml/2006/main">
         <p:nvGraphicFramePr>
-          <p:cNvPr id="89867247" name=""/>
+          <p:cNvPr id="989288679" name=""/>
           <p:cNvGraphicFramePr>
             <a:graphicFrameLocks noGrp="true"/>
           </p:cNvGraphicFramePr>
@@ -17448,7 +18735,7 @@
                           <a:ea typeface="Arial"/>
                           <a:sym typeface="Arial"/>
                         </a:rPr>
-                        <a:t>47</a:t>
+                        <a:t>58</a:t>
                       </a:r>
                     </a:p>
                   </a:txBody>
@@ -17562,7 +18849,7 @@
                           <a:ea typeface="Arial"/>
                           <a:sym typeface="Arial"/>
                         </a:rPr>
-                        <a:t>2</a:t>
+                        <a:t>1</a:t>
                       </a:r>
                     </a:p>
                   </a:txBody>
@@ -17619,7 +18906,7 @@
                           <a:ea typeface="Arial"/>
                           <a:sym typeface="Arial"/>
                         </a:rPr>
-                        <a:t>4</a:t>
+                        <a:t>1</a:t>
                       </a:r>
                     </a:p>
                   </a:txBody>
@@ -17676,7 +18963,7 @@
                           <a:ea typeface="Arial"/>
                           <a:sym typeface="Arial"/>
                         </a:rPr>
-                        <a:t>10</a:t>
+                        <a:t>11</a:t>
                       </a:r>
                     </a:p>
                   </a:txBody>
@@ -17733,7 +19020,7 @@
                           <a:ea typeface="Arial"/>
                           <a:sym typeface="Arial"/>
                         </a:rPr>
-                        <a:t>4</a:t>
+                        <a:t>9</a:t>
                       </a:r>
                     </a:p>
                   </a:txBody>
@@ -17849,7 +19136,7 @@
                           <a:ea typeface="Arial"/>
                           <a:sym typeface="Arial"/>
                         </a:rPr>
-                        <a:t>29</a:t>
+                        <a:t>44</a:t>
                       </a:r>
                     </a:p>
                   </a:txBody>
@@ -17906,7 +19193,7 @@
                           <a:ea typeface="Arial"/>
                           <a:sym typeface="Arial"/>
                         </a:rPr>
-                        <a:t>12</a:t>
+                        <a:t>5</a:t>
                       </a:r>
                     </a:p>
                   </a:txBody>
@@ -17963,7 +19250,7 @@
                           <a:ea typeface="Arial"/>
                           <a:sym typeface="Arial"/>
                         </a:rPr>
-                        <a:t>9</a:t>
+                        <a:t>11</a:t>
                       </a:r>
                     </a:p>
                   </a:txBody>
@@ -18020,7 +19307,7 @@
                           <a:ea typeface="Arial"/>
                           <a:sym typeface="Arial"/>
                         </a:rPr>
-                        <a:t>8</a:t>
+                        <a:t>16</a:t>
                       </a:r>
                     </a:p>
                   </a:txBody>
@@ -18077,7 +19364,7 @@
                           <a:ea typeface="Arial"/>
                           <a:sym typeface="Arial"/>
                         </a:rPr>
-                        <a:t>2</a:t>
+                        <a:t>9</a:t>
                       </a:r>
                     </a:p>
                   </a:txBody>
@@ -18134,7 +19421,7 @@
                           <a:ea typeface="Arial"/>
                           <a:sym typeface="Arial"/>
                         </a:rPr>
-                        <a:t>4</a:t>
+                        <a:t>1</a:t>
                       </a:r>
                     </a:p>
                   </a:txBody>
@@ -18250,7 +19537,7 @@
                           <a:ea typeface="Arial"/>
                           <a:sym typeface="Arial"/>
                         </a:rPr>
-                        <a:t>34</a:t>
+                        <a:t>51</a:t>
                       </a:r>
                     </a:p>
                   </a:txBody>
@@ -18307,7 +19594,7 @@
                           <a:ea typeface="Arial"/>
                           <a:sym typeface="Arial"/>
                         </a:rPr>
-                        <a:t>1</a:t>
+                        <a:t>0</a:t>
                       </a:r>
                     </a:p>
                   </a:txBody>
@@ -18364,7 +19651,7 @@
                           <a:ea typeface="Arial"/>
                           <a:sym typeface="Arial"/>
                         </a:rPr>
-                        <a:t>8</a:t>
+                        <a:t>3</a:t>
                       </a:r>
                     </a:p>
                   </a:txBody>
@@ -18478,7 +19765,7 @@
                           <a:ea typeface="Arial"/>
                           <a:sym typeface="Arial"/>
                         </a:rPr>
-                        <a:t>5</a:t>
+                        <a:t>11</a:t>
                       </a:r>
                     </a:p>
                   </a:txBody>
@@ -18535,7 +19822,7 @@
                           <a:ea typeface="Arial"/>
                           <a:sym typeface="Arial"/>
                         </a:rPr>
-                        <a:t>6</a:t>
+                        <a:t>7</a:t>
                       </a:r>
                     </a:p>
                   </a:txBody>
@@ -18651,7 +19938,7 @@
                           <a:ea typeface="Arial"/>
                           <a:sym typeface="Arial"/>
                         </a:rPr>
-                        <a:t>59</a:t>
+                        <a:t>75</a:t>
                       </a:r>
                     </a:p>
                   </a:txBody>
@@ -18708,7 +19995,7 @@
                           <a:ea typeface="Arial"/>
                           <a:sym typeface="Arial"/>
                         </a:rPr>
-                        <a:t>13</a:t>
+                        <a:t>2</a:t>
                       </a:r>
                     </a:p>
                   </a:txBody>
@@ -18765,7 +20052,7 @@
                           <a:ea typeface="Arial"/>
                           <a:sym typeface="Arial"/>
                         </a:rPr>
-                        <a:t>5</a:t>
+                        <a:t>11</a:t>
                       </a:r>
                     </a:p>
                   </a:txBody>
@@ -18822,7 +20109,7 @@
                           <a:ea typeface="Arial"/>
                           <a:sym typeface="Arial"/>
                         </a:rPr>
-                        <a:t>8</a:t>
+                        <a:t>15</a:t>
                       </a:r>
                     </a:p>
                   </a:txBody>
@@ -18879,7 +20166,7 @@
                           <a:ea typeface="Arial"/>
                           <a:sym typeface="Arial"/>
                         </a:rPr>
-                        <a:t>1</a:t>
+                        <a:t>3</a:t>
                       </a:r>
                     </a:p>
                   </a:txBody>
@@ -19052,7 +20339,7 @@
                           <a:ea typeface="Arial"/>
                           <a:sym typeface="Arial"/>
                         </a:rPr>
-                        <a:t>51</a:t>
+                        <a:t>75</a:t>
                       </a:r>
                     </a:p>
                   </a:txBody>
@@ -19109,7 +20396,7 @@
                           <a:ea typeface="Arial"/>
                           <a:sym typeface="Arial"/>
                         </a:rPr>
-                        <a:t>5</a:t>
+                        <a:t>15</a:t>
                       </a:r>
                     </a:p>
                   </a:txBody>
@@ -19166,7 +20453,7 @@
                           <a:ea typeface="Arial"/>
                           <a:sym typeface="Arial"/>
                         </a:rPr>
-                        <a:t>14</a:t>
+                        <a:t>4</a:t>
                       </a:r>
                     </a:p>
                   </a:txBody>
@@ -19223,7 +20510,7 @@
                           <a:ea typeface="Arial"/>
                           <a:sym typeface="Arial"/>
                         </a:rPr>
-                        <a:t>2</a:t>
+                        <a:t>1</a:t>
                       </a:r>
                     </a:p>
                   </a:txBody>
@@ -19280,7 +20567,7 @@
                           <a:ea typeface="Arial"/>
                           <a:sym typeface="Arial"/>
                         </a:rPr>
-                        <a:t>3</a:t>
+                        <a:t>1</a:t>
                       </a:r>
                     </a:p>
                   </a:txBody>
@@ -19453,7 +20740,7 @@
                           <a:ea typeface="Arial"/>
                           <a:sym typeface="Arial"/>
                         </a:rPr>
-                        <a:t>24</a:t>
+                        <a:t>49</a:t>
                       </a:r>
                     </a:p>
                   </a:txBody>
@@ -19510,7 +20797,7 @@
                           <a:ea typeface="Arial"/>
                           <a:sym typeface="Arial"/>
                         </a:rPr>
-                        <a:t>7</a:t>
+                        <a:t>6</a:t>
                       </a:r>
                     </a:p>
                   </a:txBody>
@@ -19567,7 +20854,7 @@
                           <a:ea typeface="Arial"/>
                           <a:sym typeface="Arial"/>
                         </a:rPr>
-                        <a:t>17</a:t>
+                        <a:t>18</a:t>
                       </a:r>
                     </a:p>
                   </a:txBody>
@@ -19624,7 +20911,7 @@
                           <a:ea typeface="Arial"/>
                           <a:sym typeface="Arial"/>
                         </a:rPr>
-                        <a:t>7</a:t>
+                        <a:t>8</a:t>
                       </a:r>
                     </a:p>
                   </a:txBody>
@@ -19854,7 +21141,7 @@
                           <a:ea typeface="Arial"/>
                           <a:sym typeface="Arial"/>
                         </a:rPr>
-                        <a:t>61</a:t>
+                        <a:t>78</a:t>
                       </a:r>
                     </a:p>
                   </a:txBody>
@@ -19911,7 +21198,7 @@
                           <a:ea typeface="Arial"/>
                           <a:sym typeface="Arial"/>
                         </a:rPr>
-                        <a:t>0</a:t>
+                        <a:t>3</a:t>
                       </a:r>
                     </a:p>
                   </a:txBody>
@@ -19968,7 +21255,7 @@
                           <a:ea typeface="Arial"/>
                           <a:sym typeface="Arial"/>
                         </a:rPr>
-                        <a:t>2</a:t>
+                        <a:t>5</a:t>
                       </a:r>
                     </a:p>
                   </a:txBody>
@@ -20025,7 +21312,7 @@
                           <a:ea typeface="Arial"/>
                           <a:sym typeface="Arial"/>
                         </a:rPr>
-                        <a:t>6</a:t>
+                        <a:t>2</a:t>
                       </a:r>
                     </a:p>
                   </a:txBody>
@@ -20139,7 +21426,7 @@
                           <a:ea typeface="Arial"/>
                           <a:sym typeface="Arial"/>
                         </a:rPr>
-                        <a:t>0</a:t>
+                        <a:t>1</a:t>
                       </a:r>
                     </a:p>
                   </a:txBody>
@@ -20255,7 +21542,7 @@
                           <a:ea typeface="Arial"/>
                           <a:sym typeface="Arial"/>
                         </a:rPr>
-                        <a:t>34</a:t>
+                        <a:t>56</a:t>
                       </a:r>
                     </a:p>
                   </a:txBody>
@@ -20369,7 +21656,7 @@
                           <a:ea typeface="Arial"/>
                           <a:sym typeface="Arial"/>
                         </a:rPr>
-                        <a:t>7</a:t>
+                        <a:t>2</a:t>
                       </a:r>
                     </a:p>
                   </a:txBody>
@@ -20426,7 +21713,7 @@
                           <a:ea typeface="Arial"/>
                           <a:sym typeface="Arial"/>
                         </a:rPr>
-                        <a:t>5</a:t>
+                        <a:t>10</a:t>
                       </a:r>
                     </a:p>
                   </a:txBody>
@@ -20483,7 +21770,7 @@
                           <a:ea typeface="Arial"/>
                           <a:sym typeface="Arial"/>
                         </a:rPr>
-                        <a:t>8</a:t>
+                        <a:t>11</a:t>
                       </a:r>
                     </a:p>
                   </a:txBody>
@@ -20540,7 +21827,7 @@
                           <a:ea typeface="Arial"/>
                           <a:sym typeface="Arial"/>
                         </a:rPr>
-                        <a:t>6</a:t>
+                        <a:t>3</a:t>
                       </a:r>
                     </a:p>
                   </a:txBody>
@@ -20656,7 +21943,7 @@
                           <a:ea typeface="Arial"/>
                           <a:sym typeface="Arial"/>
                         </a:rPr>
-                        <a:t>42</a:t>
+                        <a:t>67</a:t>
                       </a:r>
                     </a:p>
                   </a:txBody>
@@ -20713,7 +22000,7 @@
                           <a:ea typeface="Arial"/>
                           <a:sym typeface="Arial"/>
                         </a:rPr>
-                        <a:t>5</a:t>
+                        <a:t>2</a:t>
                       </a:r>
                     </a:p>
                   </a:txBody>
@@ -20827,7 +22114,7 @@
                           <a:ea typeface="Arial"/>
                           <a:sym typeface="Arial"/>
                         </a:rPr>
-                        <a:t>6</a:t>
+                        <a:t>7</a:t>
                       </a:r>
                     </a:p>
                   </a:txBody>
@@ -20941,7 +22228,7 @@
                           <a:ea typeface="Arial"/>
                           <a:sym typeface="Arial"/>
                         </a:rPr>
-                        <a:t>0</a:t>
+                        <a:t>3</a:t>
                       </a:r>
                     </a:p>
                   </a:txBody>
@@ -21057,7 +22344,7 @@
                           <a:ea typeface="Arial"/>
                           <a:sym typeface="Arial"/>
                         </a:rPr>
-                        <a:t>40</a:t>
+                        <a:t>68</a:t>
                       </a:r>
                     </a:p>
                   </a:txBody>
@@ -21114,7 +22401,7 @@
                           <a:ea typeface="Arial"/>
                           <a:sym typeface="Arial"/>
                         </a:rPr>
-                        <a:t>1</a:t>
+                        <a:t>7</a:t>
                       </a:r>
                     </a:p>
                   </a:txBody>
@@ -21228,7 +22515,7 @@
                           <a:ea typeface="Arial"/>
                           <a:sym typeface="Arial"/>
                         </a:rPr>
-                        <a:t>5</a:t>
+                        <a:t>0</a:t>
                       </a:r>
                     </a:p>
                   </a:txBody>
@@ -21285,7 +22572,7 @@
                           <a:ea typeface="Arial"/>
                           <a:sym typeface="Arial"/>
                         </a:rPr>
-                        <a:t>3</a:t>
+                        <a:t>0</a:t>
                       </a:r>
                     </a:p>
                   </a:txBody>
@@ -21458,7 +22745,7 @@
                           <a:ea typeface="Arial"/>
                           <a:sym typeface="Arial"/>
                         </a:rPr>
-                        <a:t>37</a:t>
+                        <a:t>54</a:t>
                       </a:r>
                     </a:p>
                   </a:txBody>
@@ -21515,7 +22802,7 @@
                           <a:ea typeface="Arial"/>
                           <a:sym typeface="Arial"/>
                         </a:rPr>
-                        <a:t>2</a:t>
+                        <a:t>5</a:t>
                       </a:r>
                     </a:p>
                   </a:txBody>
@@ -21572,7 +22859,7 @@
                           <a:ea typeface="Arial"/>
                           <a:sym typeface="Arial"/>
                         </a:rPr>
-                        <a:t>13</a:t>
+                        <a:t>8</a:t>
                       </a:r>
                     </a:p>
                   </a:txBody>
@@ -21629,7 +22916,7 @@
                           <a:ea typeface="Arial"/>
                           <a:sym typeface="Arial"/>
                         </a:rPr>
-                        <a:t>9</a:t>
+                        <a:t>4</a:t>
                       </a:r>
                     </a:p>
                   </a:txBody>
@@ -21743,7 +23030,7 @@
                           <a:ea typeface="Arial"/>
                           <a:sym typeface="Arial"/>
                         </a:rPr>
-                        <a:t>0</a:t>
+                        <a:t>4</a:t>
                       </a:r>
                     </a:p>
                   </a:txBody>
@@ -21863,7 +23150,7 @@
                           <a:ea typeface="Arial"/>
                           <a:sym typeface="Arial"/>
                         </a:rPr>
-                        <a:t>25</a:t>
+                        <a:t>51</a:t>
                       </a:r>
                     </a:p>
                   </a:txBody>
@@ -21924,7 +23211,7 @@
                           <a:ea typeface="Arial"/>
                           <a:sym typeface="Arial"/>
                         </a:rPr>
-                        <a:t>17</a:t>
+                        <a:t>4</a:t>
                       </a:r>
                     </a:p>
                   </a:txBody>
@@ -21985,7 +23272,7 @@
                           <a:ea typeface="Arial"/>
                           <a:sym typeface="Arial"/>
                         </a:rPr>
-                        <a:t>11</a:t>
+                        <a:t>12</a:t>
                       </a:r>
                     </a:p>
                   </a:txBody>
@@ -22046,7 +23333,7 @@
                           <a:ea typeface="Arial"/>
                           <a:sym typeface="Arial"/>
                         </a:rPr>
-                        <a:t>5</a:t>
+                        <a:t>15</a:t>
                       </a:r>
                     </a:p>
                   </a:txBody>
@@ -22107,7 +23394,7 @@
                           <a:ea typeface="Arial"/>
                           <a:sym typeface="Arial"/>
                         </a:rPr>
-                        <a:t>0</a:t>
+                        <a:t>1</a:t>
                       </a:r>
                     </a:p>
                   </a:txBody>
@@ -22229,12 +23516,18 @@
       </p:grpSpPr>
       <p:sp>
         <p:nvSpPr>
-          <p:cNvPr id="2" name="Title 1"/>
+          <p:cNvPr id="2" name="Title 1">
+            <a:extLst>
+              <a:ext uri="{FF2B5EF4-FFF2-40B4-BE49-F238E27FC236}">
+                <a16:creationId xmlns:a16="http://schemas.microsoft.com/office/drawing/2014/main" id="{2DEB43F4-64B6-7152-A0ED-E3A60DA1F14B}"/>
+              </a:ext>
+            </a:extLst>
+          </p:cNvPr>
           <p:cNvSpPr>
             <a:spLocks noGrp="1"/>
           </p:cNvSpPr>
           <p:nvPr>
-            <p:ph type="title"/>
+            <p:ph hasCustomPrompt="1" type="title"/>
           </p:nvPr>
         </p:nvSpPr>
         <p:spPr/>
@@ -22247,7 +23540,7 @@
             </a:pPr>
             <a:r>
               <a:rPr/>
-              <a:t>Counts of Indicator Colors in Solano County Student Groups: Race/Ethnicity</a:t>
+              <a:t>2025 Counts of Indicator Colors in Solano County Student Groups: Race/Ethnicity</a:t>
             </a:r>
           </a:p>
         </p:txBody>
@@ -22268,8 +23561,8 @@
         </p:blipFill>
         <p:spPr bwMode="auto">
           <a:xfrm>
-            <a:off x="1181100" y="1193800"/>
-            <a:ext cx="6781800" cy="3390900"/>
+            <a:off x="1041400" y="1219200"/>
+            <a:ext cx="6299200" cy="3149600"/>
           </a:xfrm>
           <a:prstGeom prst="rect">
             <a:avLst/>
@@ -22306,12 +23599,18 @@
       </p:grpSpPr>
       <p:sp>
         <p:nvSpPr>
-          <p:cNvPr id="2" name="Title 1"/>
+          <p:cNvPr id="2" name="Title 1">
+            <a:extLst>
+              <a:ext uri="{FF2B5EF4-FFF2-40B4-BE49-F238E27FC236}">
+                <a16:creationId xmlns:a16="http://schemas.microsoft.com/office/drawing/2014/main" id="{2DEB43F4-64B6-7152-A0ED-E3A60DA1F14B}"/>
+              </a:ext>
+            </a:extLst>
+          </p:cNvPr>
           <p:cNvSpPr>
             <a:spLocks noGrp="1"/>
           </p:cNvSpPr>
           <p:nvPr>
-            <p:ph type="title"/>
+            <p:ph hasCustomPrompt="1" type="title"/>
           </p:nvPr>
         </p:nvSpPr>
         <p:spPr/>
@@ -22324,7 +23623,7 @@
             </a:pPr>
             <a:r>
               <a:rPr/>
-              <a:t>Counts of Indicator Colors in Solano County Student Groups: Student Program</a:t>
+              <a:t>2025 Counts of Indicator Colors in Solano County Student Groups: Student Program</a:t>
             </a:r>
           </a:p>
         </p:txBody>
@@ -22345,8 +23644,8 @@
         </p:blipFill>
         <p:spPr bwMode="auto">
           <a:xfrm>
-            <a:off x="1181100" y="1193800"/>
-            <a:ext cx="6781800" cy="3390900"/>
+            <a:off x="1041400" y="1219200"/>
+            <a:ext cx="6299200" cy="3149600"/>
           </a:xfrm>
           <a:prstGeom prst="rect">
             <a:avLst/>
@@ -22383,12 +23682,18 @@
       </p:grpSpPr>
       <p:sp>
         <p:nvSpPr>
-          <p:cNvPr id="2" name="Title 1"/>
+          <p:cNvPr id="2" name="Title 1">
+            <a:extLst>
+              <a:ext uri="{FF2B5EF4-FFF2-40B4-BE49-F238E27FC236}">
+                <a16:creationId xmlns:a16="http://schemas.microsoft.com/office/drawing/2014/main" id="{2DEB43F4-64B6-7152-A0ED-E3A60DA1F14B}"/>
+              </a:ext>
+            </a:extLst>
+          </p:cNvPr>
           <p:cNvSpPr>
             <a:spLocks noGrp="1"/>
           </p:cNvSpPr>
           <p:nvPr>
-            <p:ph type="title"/>
+            <p:ph hasCustomPrompt="1" type="title"/>
           </p:nvPr>
         </p:nvSpPr>
         <p:spPr/>
@@ -22401,7 +23706,7 @@
             </a:pPr>
             <a:r>
               <a:rPr/>
-              <a:t>County Wide ELA Performance (All students)</a:t>
+              <a:t>2025 County Wide ELA Performance (All students)</a:t>
             </a:r>
           </a:p>
         </p:txBody>
@@ -22422,8 +23727,8 @@
         </p:blipFill>
         <p:spPr bwMode="auto">
           <a:xfrm>
-            <a:off x="1181100" y="1193800"/>
-            <a:ext cx="6781800" cy="3390900"/>
+            <a:off x="1041400" y="1219200"/>
+            <a:ext cx="6299200" cy="3149600"/>
           </a:xfrm>
           <a:prstGeom prst="rect">
             <a:avLst/>
@@ -22460,12 +23765,18 @@
       </p:grpSpPr>
       <p:sp>
         <p:nvSpPr>
-          <p:cNvPr id="2" name="Title 1"/>
+          <p:cNvPr id="2" name="Title 1">
+            <a:extLst>
+              <a:ext uri="{FF2B5EF4-FFF2-40B4-BE49-F238E27FC236}">
+                <a16:creationId xmlns:a16="http://schemas.microsoft.com/office/drawing/2014/main" id="{2DEB43F4-64B6-7152-A0ED-E3A60DA1F14B}"/>
+              </a:ext>
+            </a:extLst>
+          </p:cNvPr>
           <p:cNvSpPr>
             <a:spLocks noGrp="1"/>
           </p:cNvSpPr>
           <p:nvPr>
-            <p:ph type="title"/>
+            <p:ph hasCustomPrompt="1" type="title"/>
           </p:nvPr>
         </p:nvSpPr>
         <p:spPr/>
@@ -22478,7 +23789,7 @@
             </a:pPr>
             <a:r>
               <a:rPr/>
-              <a:t>County Wide Math Performance (All students)</a:t>
+              <a:t>2025 County Wide Math Performance (All students)</a:t>
             </a:r>
           </a:p>
         </p:txBody>
@@ -22499,8 +23810,8 @@
         </p:blipFill>
         <p:spPr bwMode="auto">
           <a:xfrm>
-            <a:off x="1181100" y="1193800"/>
-            <a:ext cx="6781800" cy="3390900"/>
+            <a:off x="1041400" y="1219200"/>
+            <a:ext cx="6299200" cy="3149600"/>
           </a:xfrm>
           <a:prstGeom prst="rect">
             <a:avLst/>
@@ -22519,9 +23830,9 @@
 </file>
 
 <file path=ppt/theme/theme1.xml><?xml version="1.0" encoding="utf-8"?>
-<a:theme xmlns:a="http://schemas.openxmlformats.org/drawingml/2006/main" name="Office Theme">
+<a:theme xmlns:a="http://schemas.openxmlformats.org/drawingml/2006/main" name="SCOE Quarto PPTX Template">
   <a:themeElements>
-    <a:clrScheme name="Office">
+    <a:clrScheme name="SCOE Colors">
       <a:dk1>
         <a:sysClr val="windowText" lastClr="000000"/>
       </a:dk1>
@@ -22529,106 +23840,46 @@
         <a:sysClr val="window" lastClr="FFFFFF"/>
       </a:lt1>
       <a:dk2>
-        <a:srgbClr val="1F497D"/>
+        <a:srgbClr val="0E2841"/>
       </a:dk2>
       <a:lt2>
-        <a:srgbClr val="EEECE1"/>
+        <a:srgbClr val="E8E8E8"/>
       </a:lt2>
       <a:accent1>
-        <a:srgbClr val="4F81BD"/>
+        <a:srgbClr val="FFD866"/>
       </a:accent1>
       <a:accent2>
-        <a:srgbClr val="C0504D"/>
+        <a:srgbClr val="E50002"/>
       </a:accent2>
       <a:accent3>
-        <a:srgbClr val="9BBB59"/>
+        <a:srgbClr val="005FB2"/>
       </a:accent3>
       <a:accent4>
-        <a:srgbClr val="8064A2"/>
+        <a:srgbClr val="3CA6B9"/>
       </a:accent4>
       <a:accent5>
-        <a:srgbClr val="4BACC6"/>
+        <a:srgbClr val="F79236"/>
       </a:accent5>
       <a:accent6>
-        <a:srgbClr val="F79646"/>
+        <a:srgbClr val="F2F2F2"/>
       </a:accent6>
       <a:hlink>
-        <a:srgbClr val="0000FF"/>
+        <a:srgbClr val="D8D8D8"/>
       </a:hlink>
       <a:folHlink>
-        <a:srgbClr val="800080"/>
+        <a:srgbClr val="4D94D8"/>
       </a:folHlink>
     </a:clrScheme>
-    <a:fontScheme name="Office">
+    <a:fontScheme name="SCOE Fonts">
       <a:majorFont>
-        <a:latin typeface="Calibri"/>
+        <a:latin typeface="Montserrat"/>
         <a:ea typeface=""/>
         <a:cs typeface=""/>
-        <a:font script="Jpan" typeface="ＭＳ Ｐゴシック"/>
-        <a:font script="Hang" typeface="맑은 고딕"/>
-        <a:font script="Hans" typeface="宋体"/>
-        <a:font script="Hant" typeface="新細明體"/>
-        <a:font script="Arab" typeface="Times New Roman"/>
-        <a:font script="Hebr" typeface="Times New Roman"/>
-        <a:font script="Thai" typeface="Angsana New"/>
-        <a:font script="Ethi" typeface="Nyala"/>
-        <a:font script="Beng" typeface="Vrinda"/>
-        <a:font script="Gujr" typeface="Shruti"/>
-        <a:font script="Khmr" typeface="MoolBoran"/>
-        <a:font script="Knda" typeface="Tunga"/>
-        <a:font script="Guru" typeface="Raavi"/>
-        <a:font script="Cans" typeface="Euphemia"/>
-        <a:font script="Cher" typeface="Plantagenet Cherokee"/>
-        <a:font script="Yiii" typeface="Microsoft Yi Baiti"/>
-        <a:font script="Tibt" typeface="Microsoft Himalaya"/>
-        <a:font script="Thaa" typeface="MV Boli"/>
-        <a:font script="Deva" typeface="Mangal"/>
-        <a:font script="Telu" typeface="Gautami"/>
-        <a:font script="Taml" typeface="Latha"/>
-        <a:font script="Syrc" typeface="Estrangelo Edessa"/>
-        <a:font script="Orya" typeface="Kalinga"/>
-        <a:font script="Mlym" typeface="Kartika"/>
-        <a:font script="Laoo" typeface="DokChampa"/>
-        <a:font script="Sinh" typeface="Iskoola Pota"/>
-        <a:font script="Mong" typeface="Mongolian Baiti"/>
-        <a:font script="Viet" typeface="Times New Roman"/>
-        <a:font script="Uigh" typeface="Microsoft Uighur"/>
-        <a:font script="Geor" typeface="Sylfaen"/>
       </a:majorFont>
       <a:minorFont>
-        <a:latin typeface="Calibri"/>
+        <a:latin typeface="Arial"/>
         <a:ea typeface=""/>
         <a:cs typeface=""/>
-        <a:font script="Jpan" typeface="ＭＳ Ｐゴシック"/>
-        <a:font script="Hang" typeface="맑은 고딕"/>
-        <a:font script="Hans" typeface="宋体"/>
-        <a:font script="Hant" typeface="新細明體"/>
-        <a:font script="Arab" typeface="Arial"/>
-        <a:font script="Hebr" typeface="Arial"/>
-        <a:font script="Thai" typeface="Cordia New"/>
-        <a:font script="Ethi" typeface="Nyala"/>
-        <a:font script="Beng" typeface="Vrinda"/>
-        <a:font script="Gujr" typeface="Shruti"/>
-        <a:font script="Khmr" typeface="DaunPenh"/>
-        <a:font script="Knda" typeface="Tunga"/>
-        <a:font script="Guru" typeface="Raavi"/>
-        <a:font script="Cans" typeface="Euphemia"/>
-        <a:font script="Cher" typeface="Plantagenet Cherokee"/>
-        <a:font script="Yiii" typeface="Microsoft Yi Baiti"/>
-        <a:font script="Tibt" typeface="Microsoft Himalaya"/>
-        <a:font script="Thaa" typeface="MV Boli"/>
-        <a:font script="Deva" typeface="Mangal"/>
-        <a:font script="Telu" typeface="Gautami"/>
-        <a:font script="Taml" typeface="Latha"/>
-        <a:font script="Syrc" typeface="Estrangelo Edessa"/>
-        <a:font script="Orya" typeface="Kalinga"/>
-        <a:font script="Mlym" typeface="Kartika"/>
-        <a:font script="Laoo" typeface="DokChampa"/>
-        <a:font script="Sinh" typeface="Iskoola Pota"/>
-        <a:font script="Mong" typeface="Mongolian Baiti"/>
-        <a:font script="Viet" typeface="Arial"/>
-        <a:font script="Uigh" typeface="Microsoft Uighur"/>
-        <a:font script="Geor" typeface="Sylfaen"/>
       </a:minorFont>
     </a:fontScheme>
     <a:fmtScheme name="Office">
@@ -22640,180 +23891,136 @@
           <a:gsLst>
             <a:gs pos="0">
               <a:schemeClr val="phClr">
-                <a:tint val="50000"/>
-                <a:satMod val="300000"/>
+                <a:lumMod val="110000"/>
+                <a:satMod val="105000"/>
+                <a:tint val="67000"/>
               </a:schemeClr>
             </a:gs>
-            <a:gs pos="35000">
+            <a:gs pos="50000">
               <a:schemeClr val="phClr">
-                <a:tint val="37000"/>
-                <a:satMod val="300000"/>
+                <a:lumMod val="105000"/>
+                <a:satMod val="103000"/>
+                <a:tint val="73000"/>
               </a:schemeClr>
             </a:gs>
             <a:gs pos="100000">
               <a:schemeClr val="phClr">
-                <a:tint val="15000"/>
-                <a:satMod val="350000"/>
+                <a:lumMod val="105000"/>
+                <a:satMod val="109000"/>
+                <a:tint val="81000"/>
               </a:schemeClr>
             </a:gs>
           </a:gsLst>
-          <a:lin ang="16200000" scaled="1"/>
+          <a:lin ang="5400000" scaled="0"/>
         </a:gradFill>
         <a:gradFill rotWithShape="1">
           <a:gsLst>
             <a:gs pos="0">
               <a:schemeClr val="phClr">
-                <a:tint val="100000"/>
+                <a:satMod val="103000"/>
+                <a:lumMod val="102000"/>
+                <a:tint val="94000"/>
+              </a:schemeClr>
+            </a:gs>
+            <a:gs pos="50000">
+              <a:schemeClr val="phClr">
+                <a:satMod val="110000"/>
+                <a:lumMod val="100000"/>
                 <a:shade val="100000"/>
-                <a:satMod val="130000"/>
               </a:schemeClr>
             </a:gs>
             <a:gs pos="100000">
               <a:schemeClr val="phClr">
-                <a:tint val="50000"/>
-                <a:shade val="100000"/>
-                <a:satMod val="350000"/>
+                <a:lumMod val="99000"/>
+                <a:satMod val="120000"/>
+                <a:shade val="78000"/>
               </a:schemeClr>
             </a:gs>
           </a:gsLst>
-          <a:lin ang="16200000" scaled="0"/>
+          <a:lin ang="5400000" scaled="0"/>
         </a:gradFill>
       </a:fillStyleLst>
       <a:lnStyleLst>
-        <a:ln w="9525" cap="flat" cmpd="sng" algn="ctr">
+        <a:ln w="12700" cap="flat" cmpd="sng" algn="ctr">
           <a:solidFill>
-            <a:schemeClr val="phClr">
-              <a:shade val="95000"/>
-              <a:satMod val="105000"/>
-            </a:schemeClr>
+            <a:schemeClr val="phClr"/>
           </a:solidFill>
           <a:prstDash val="solid"/>
+          <a:miter lim="800000"/>
+        </a:ln>
+        <a:ln w="19050" cap="flat" cmpd="sng" algn="ctr">
+          <a:solidFill>
+            <a:schemeClr val="phClr"/>
+          </a:solidFill>
+          <a:prstDash val="solid"/>
+          <a:miter lim="800000"/>
         </a:ln>
         <a:ln w="25400" cap="flat" cmpd="sng" algn="ctr">
           <a:solidFill>
             <a:schemeClr val="phClr"/>
           </a:solidFill>
           <a:prstDash val="solid"/>
-        </a:ln>
-        <a:ln w="38100" cap="flat" cmpd="sng" algn="ctr">
-          <a:solidFill>
-            <a:schemeClr val="phClr"/>
-          </a:solidFill>
-          <a:prstDash val="solid"/>
+          <a:miter lim="800000"/>
         </a:ln>
       </a:lnStyleLst>
       <a:effectStyleLst>
         <a:effectStyle>
+          <a:effectLst/>
+        </a:effectStyle>
+        <a:effectStyle>
+          <a:effectLst/>
+        </a:effectStyle>
+        <a:effectStyle>
           <a:effectLst>
-            <a:outerShdw blurRad="40000" dist="20000" dir="5400000" rotWithShape="0">
+            <a:outerShdw blurRad="57150" dist="19050" dir="5400000" algn="ctr" rotWithShape="0">
               <a:srgbClr val="000000">
-                <a:alpha val="38000"/>
+                <a:alpha val="63000"/>
               </a:srgbClr>
             </a:outerShdw>
           </a:effectLst>
-        </a:effectStyle>
-        <a:effectStyle>
-          <a:effectLst>
-            <a:outerShdw blurRad="40000" dist="23000" dir="5400000" rotWithShape="0">
-              <a:srgbClr val="000000">
-                <a:alpha val="35000"/>
-              </a:srgbClr>
-            </a:outerShdw>
-          </a:effectLst>
-        </a:effectStyle>
-        <a:effectStyle>
-          <a:effectLst>
-            <a:outerShdw blurRad="40000" dist="23000" dir="5400000" rotWithShape="0">
-              <a:srgbClr val="000000">
-                <a:alpha val="35000"/>
-              </a:srgbClr>
-            </a:outerShdw>
-          </a:effectLst>
-          <a:scene3d>
-            <a:camera prst="orthographicFront">
-              <a:rot lat="0" lon="0" rev="0"/>
-            </a:camera>
-            <a:lightRig rig="threePt" dir="t">
-              <a:rot lat="0" lon="0" rev="1200000"/>
-            </a:lightRig>
-          </a:scene3d>
-          <a:sp3d>
-            <a:bevelT w="63500" h="25400"/>
-          </a:sp3d>
         </a:effectStyle>
       </a:effectStyleLst>
       <a:bgFillStyleLst>
         <a:solidFill>
           <a:schemeClr val="phClr"/>
         </a:solidFill>
+        <a:solidFill>
+          <a:schemeClr val="phClr">
+            <a:tint val="95000"/>
+            <a:satMod val="170000"/>
+          </a:schemeClr>
+        </a:solidFill>
         <a:gradFill rotWithShape="1">
           <a:gsLst>
             <a:gs pos="0">
               <a:schemeClr val="phClr">
-                <a:tint val="40000"/>
-                <a:satMod val="350000"/>
+                <a:tint val="93000"/>
+                <a:satMod val="150000"/>
+                <a:shade val="98000"/>
+                <a:lumMod val="102000"/>
               </a:schemeClr>
             </a:gs>
-            <a:gs pos="40000">
+            <a:gs pos="50000">
               <a:schemeClr val="phClr">
-                <a:tint val="45000"/>
-                <a:shade val="99000"/>
-                <a:satMod val="350000"/>
+                <a:tint val="98000"/>
+                <a:satMod val="130000"/>
+                <a:shade val="90000"/>
+                <a:lumMod val="103000"/>
               </a:schemeClr>
             </a:gs>
             <a:gs pos="100000">
               <a:schemeClr val="phClr">
-                <a:shade val="20000"/>
-                <a:satMod val="255000"/>
+                <a:shade val="63000"/>
+                <a:satMod val="120000"/>
               </a:schemeClr>
             </a:gs>
           </a:gsLst>
-          <a:path path="circle">
-            <a:fillToRect l="50000" t="-80000" r="50000" b="180000"/>
-          </a:path>
-        </a:gradFill>
-        <a:gradFill rotWithShape="1">
-          <a:gsLst>
-            <a:gs pos="0">
-              <a:schemeClr val="phClr">
-                <a:tint val="80000"/>
-                <a:satMod val="300000"/>
-              </a:schemeClr>
-            </a:gs>
-            <a:gs pos="100000">
-              <a:schemeClr val="phClr">
-                <a:shade val="30000"/>
-                <a:satMod val="200000"/>
-              </a:schemeClr>
-            </a:gs>
-          </a:gsLst>
-          <a:path path="circle">
-            <a:fillToRect l="50000" t="50000" r="50000" b="50000"/>
-          </a:path>
+          <a:lin ang="5400000" scaled="0"/>
         </a:gradFill>
       </a:bgFillStyleLst>
     </a:fmtScheme>
   </a:themeElements>
   <a:objectDefaults>
-    <a:spDef>
-      <a:spPr/>
-      <a:bodyPr/>
-      <a:lstStyle/>
-      <a:style>
-        <a:lnRef idx="1">
-          <a:schemeClr val="accent1"/>
-        </a:lnRef>
-        <a:fillRef idx="3">
-          <a:schemeClr val="accent1"/>
-        </a:fillRef>
-        <a:effectRef idx="2">
-          <a:schemeClr val="accent1"/>
-        </a:effectRef>
-        <a:fontRef idx="minor">
-          <a:schemeClr val="lt1"/>
-        </a:fontRef>
-      </a:style>
-    </a:spDef>
     <a:lnDef>
       <a:spPr/>
       <a:bodyPr/>
@@ -22835,6 +24042,11 @@
     </a:lnDef>
   </a:objectDefaults>
   <a:extraClrSchemeLst/>
+  <a:extLst>
+    <a:ext uri="{05A4C25C-085E-4340-85A3-A5531E510DB2}">
+      <thm15:themeFamily xmlns:thm15="http://schemas.microsoft.com/office/thememl/2012/main" name="Presentation1" id="{13D827BB-12B8-4F8C-A68E-758CD3A6724C}" vid="{7EDD3185-2CEA-4B6A-895B-32039A6E1C46}"/>
+    </a:ext>
+  </a:extLst>
 </a:theme>
 </file>
 
